--- a/submissions/Track2-Physics-First-AI-NuclidePath/NuclidePath_Track2_Deck.pptx
+++ b/submissions/Track2-Physics-First-AI-NuclidePath/NuclidePath_Track2_Deck.pptx
@@ -950,7 +950,7 @@
           <a:p>
             <a:r>
               <a:rPr lang="en-US" dirty="0"/>
-              <a:t>Quote measured numbers only. The current AMD v0.3 run is verified; the equality check compares physical runs, not timestamped memory files.</a:t>
+              <a:t>Quote measured numbers only. The dated AMD v0.3 core-platform snapshot is verified; the equality check compares physical runs, not timestamped memory files.</a:t>
             </a:r>
             <a:endParaRPr lang="en-US" dirty="0"/>
           </a:p>
@@ -2263,7 +2263,7 @@
                 <a:ea typeface="Liberation Mono" pitchFamily="34" charset="-122"/>
                 <a:cs typeface="Liberation Mono" pitchFamily="34" charset="-120"/>
               </a:rPr>
-              <a:t>356/15</a:t>
+              <a:t>373/15</a:t>
             </a:r>
             <a:endParaRPr lang="en-US" sz="3600" dirty="0"/>
           </a:p>

--- a/submissions/Track2-Physics-First-AI-NuclidePath/NuclidePath_Track2_Deck.pptx
+++ b/submissions/Track2-Physics-First-AI-NuclidePath/NuclidePath_Track2_Deck.pptx
@@ -8573,7 +8573,7 @@
                 <a:ea typeface="Liberation Sans" pitchFamily="34" charset="-122"/>
                 <a:cs typeface="Liberation Sans" pitchFamily="34" charset="-120"/>
               </a:rPr>
-              <a:t>231 AMD core tests + FP64 parity + SHA-256</a:t>
+              <a:t>388 AMD post-merge tests + FP64 parity + SHA-256</a:t>
             </a:r>
             <a:endParaRPr lang="en-US" sz="1600" dirty="0"/>
           </a:p>
@@ -8926,7 +8926,7 @@
                 <a:ea typeface="Liberation Mono" pitchFamily="34" charset="-122"/>
                 <a:cs typeface="Liberation Mono" pitchFamily="34" charset="-120"/>
               </a:rPr>
-              <a:t>231</a:t>
+              <a:t>388</a:t>
             </a:r>
             <a:endParaRPr lang="en-US" sz="3600" dirty="0"/>
           </a:p>
@@ -8967,7 +8967,7 @@
                 <a:ea typeface="Liberation Sans" pitchFamily="34" charset="-122"/>
                 <a:cs typeface="Liberation Sans" pitchFamily="34" charset="-120"/>
               </a:rPr>
-              <a:t>AMD core tests</a:t>
+              <a:t>AMD tests (post-merge)</a:t>
             </a:r>
             <a:endParaRPr lang="en-US" sz="1100" dirty="0"/>
           </a:p>

--- a/submissions/Track2-Physics-First-AI-NuclidePath/NuclidePath_Track2_Deck.pptx
+++ b/submissions/Track2-Physics-First-AI-NuclidePath/NuclidePath_Track2_Deck.pptx
@@ -14,9 +14,10 @@
     <p:sldId id="262" r:id="rId8"/>
     <p:sldId id="263" r:id="rId9"/>
     <p:sldId id="264" r:id="rId10"/>
+    <p:sldId id="265" r:id="rId11"/>
   </p:sldIdLst>
   <p:notesMasterIdLst>
-    <p:notesMasterId r:id="rId11"/>
+    <p:notesMasterId r:id="rId12"/>
   </p:notesMasterIdLst>
   <p:sldSz cx="12191695" cy="6858000"/>
   <p:notesSz cx="6858000" cy="12191695"/>
@@ -552,6 +553,94 @@
 </p:notes>
 </file>
 
+<file path=ppt/notesSlides/notesSlide10.xml><?xml version="1.0" encoding="utf-8"?>
+<p:notes xmlns:a="http://schemas.openxmlformats.org/drawingml/2006/main" xmlns:r="http://schemas.openxmlformats.org/officeDocument/2006/relationships" xmlns:p="http://schemas.openxmlformats.org/presentationml/2006/main">
+  <p:cSld>
+    <p:spTree>
+      <p:nvGrpSpPr>
+        <p:cNvPr id="1" name=""/>
+        <p:cNvGrpSpPr/>
+        <p:nvPr/>
+      </p:nvGrpSpPr>
+      <p:grpSpPr>
+        <a:xfrm>
+          <a:off x="0" y="0"/>
+          <a:ext cx="0" cy="0"/>
+          <a:chOff x="0" y="0"/>
+          <a:chExt cx="0" cy="0"/>
+        </a:xfrm>
+      </p:grpSpPr>
+      <p:sp>
+        <p:nvSpPr>
+          <p:cNvPr id="2" name="Slide Image Placeholder 1"/>
+          <p:cNvSpPr>
+            <a:spLocks noGrp="1" noRot="1" noChangeAspect="1"/>
+          </p:cNvSpPr>
+          <p:nvPr>
+            <p:ph type="sldImg"/>
+          </p:nvPr>
+        </p:nvSpPr>
+        <p:spPr/>
+      </p:sp>
+      <p:sp>
+        <p:nvSpPr>
+          <p:cNvPr id="3" name="Notes Placeholder 2"/>
+          <p:cNvSpPr>
+            <a:spLocks noGrp="1"/>
+          </p:cNvSpPr>
+          <p:nvPr>
+            <p:ph type="body" idx="1"/>
+          </p:nvPr>
+        </p:nvSpPr>
+        <p:spPr/>
+        <p:txBody>
+          <a:bodyPr/>
+          <a:lstStyle/>
+          <a:p>
+            <a:r>
+              <a:rPr lang="en-US" dirty="0"/>
+              <a:t>Close on current evidence: local, tested, reproducible and honest about scope. The 137.09× result is the measured device-resident FP64 primary-GCS to receptor pipeline versus the scalar reference, not environmental validation.</a:t>
+            </a:r>
+            <a:endParaRPr lang="en-US" dirty="0"/>
+          </a:p>
+        </p:txBody>
+      </p:sp>
+      <p:sp>
+        <p:nvSpPr>
+          <p:cNvPr id="4" name="Slide Number Placeholder 3"/>
+          <p:cNvSpPr>
+            <a:spLocks noGrp="1"/>
+          </p:cNvSpPr>
+          <p:nvPr>
+            <p:ph type="sldNum" sz="quarter" idx="10"/>
+          </p:nvPr>
+        </p:nvSpPr>
+        <p:spPr/>
+        <p:txBody>
+          <a:bodyPr/>
+          <a:lstStyle/>
+          <a:p>
+            <a:fld id="{F7021451-1387-4CA6-816F-3879F97B5CBC}" type="slidenum">
+              <a:rPr lang="en-US"/>
+              <a:t>10</a:t>
+            </a:fld>
+            <a:endParaRPr lang="en-US"/>
+          </a:p>
+        </p:txBody>
+      </p:sp>
+    </p:spTree>
+    <p:extLst>
+      <p:ext uri="{BB962C8B-B14F-4D97-AF65-F5344CB8AC3E}">
+        <p14:creationId xmlns:p14="http://schemas.microsoft.com/office/powerpoint/2010/main" val="1024086991"/>
+      </p:ext>
+    </p:extLst>
+  </p:cSld>
+  <p:clrMapOvr>
+    <a:masterClrMapping/>
+  </p:clrMapOvr>
+</p:notes>
+</file>
+
 <file path=ppt/notesSlides/notesSlide2.xml><?xml version="1.0" encoding="utf-8"?>
 <p:notes xmlns:a="http://schemas.openxmlformats.org/drawingml/2006/main" xmlns:r="http://schemas.openxmlformats.org/officeDocument/2006/relationships" xmlns:p="http://schemas.openxmlformats.org/presentationml/2006/main">
   <p:cSld>
@@ -950,7 +1039,7 @@
           <a:p>
             <a:r>
               <a:rPr lang="en-US" dirty="0"/>
-              <a:t>Quote measured numbers only. The dated AMD v0.3 core-platform snapshot is verified; the equality check compares physical runs, not timestamped memory files.</a:t>
+              <a:t>Present the recent work as deterministic, tested and honestly scoped: the PHREEQC bridge is process-qualified, not calibrated chemistry. The canonical screening path is unchanged and authoritative.</a:t>
             </a:r>
             <a:endParaRPr lang="en-US" dirty="0"/>
           </a:p>
@@ -1038,7 +1127,7 @@
           <a:p>
             <a:r>
               <a:rPr lang="en-US" dirty="0"/>
-              <a:t>Run the live UI in the video. This slide is a fallback visual and repository preview.</a:t>
+              <a:t>Quote measured numbers only. The dated AMD v0.3 core-platform snapshot is verified; the equality check compares physical runs, not timestamped memory files.</a:t>
             </a:r>
             <a:endParaRPr lang="en-US" dirty="0"/>
           </a:p>
@@ -1126,7 +1215,7 @@
           <a:p>
             <a:r>
               <a:rPr lang="en-US" dirty="0"/>
-              <a:t>Stress that reported intervals are input-range propagation, not total predictive uncertainty.</a:t>
+              <a:t>Run the live UI in the video. This slide is a fallback visual and repository preview.</a:t>
             </a:r>
             <a:endParaRPr lang="en-US" dirty="0"/>
           </a:p>
@@ -1214,7 +1303,7 @@
           <a:p>
             <a:r>
               <a:rPr lang="en-US" dirty="0"/>
-              <a:t>Close on current evidence: local, tested, reproducible and honest about scope. The 137.09× result is the measured device-resident FP64 primary-GCS to receptor pipeline versus the scalar reference, not environmental validation.</a:t>
+              <a:t>Stress that reported intervals are input-range propagation, not total predictive uncertainty.</a:t>
             </a:r>
             <a:endParaRPr lang="en-US" dirty="0"/>
           </a:p>
@@ -2318,6 +2407,1052 @@
 </p:sld>
 </file>
 
+<file path=ppt/slides/slide10.xml><?xml version="1.0" encoding="utf-8"?>
+<p:sld xmlns:a="http://schemas.openxmlformats.org/drawingml/2006/main" xmlns:r="http://schemas.openxmlformats.org/officeDocument/2006/relationships" xmlns:p="http://schemas.openxmlformats.org/presentationml/2006/main">
+  <p:cSld name="Slide 10">
+    <p:bg>
+      <p:bgPr>
+        <a:solidFill>
+          <a:srgbClr val="08090B"/>
+        </a:solidFill>
+      </p:bgPr>
+    </p:bg>
+    <p:spTree>
+      <p:nvGrpSpPr>
+        <p:cNvPr id="1" name=""/>
+        <p:cNvGrpSpPr/>
+        <p:nvPr/>
+      </p:nvGrpSpPr>
+      <p:grpSpPr>
+        <a:xfrm>
+          <a:off x="0" y="0"/>
+          <a:ext cx="0" cy="0"/>
+          <a:chOff x="0" y="0"/>
+          <a:chExt cx="0" cy="0"/>
+        </a:xfrm>
+      </p:grpSpPr>
+      <p:sp>
+        <p:nvSpPr>
+          <p:cNvPr id="2" name="Text 0"/>
+          <p:cNvSpPr/>
+          <p:nvPr/>
+        </p:nvSpPr>
+        <p:spPr>
+          <a:xfrm>
+            <a:off x="658368" y="502920"/>
+            <a:ext cx="3840480" cy="274320"/>
+          </a:xfrm>
+          <a:prstGeom prst="rect">
+            <a:avLst/>
+          </a:prstGeom>
+          <a:noFill/>
+          <a:ln/>
+        </p:spPr>
+        <p:txBody>
+          <a:bodyPr wrap="square" lIns="0" tIns="0" rIns="0" bIns="0" rtlCol="0" anchor="ctr">
+            <a:normAutofit/>
+          </a:bodyPr>
+          <a:lstStyle/>
+          <a:p>
+            <a:pPr algn="l" indent="0" marL="0">
+              <a:buNone/>
+            </a:pPr>
+            <a:r>
+              <a:rPr lang="en-US" sz="1100" b="1" spc="180" kern="0" dirty="0">
+                <a:solidFill>
+                  <a:srgbClr val="FF6B00"/>
+                </a:solidFill>
+                <a:latin typeface="Liberation Sans" pitchFamily="34" charset="0"/>
+                <a:ea typeface="Liberation Sans" pitchFamily="34" charset="-122"/>
+                <a:cs typeface="Liberation Sans" pitchFamily="34" charset="-120"/>
+              </a:rPr>
+              <a:t>WHY NUCLIDEPATH WINS</a:t>
+            </a:r>
+            <a:endParaRPr lang="en-US" sz="1100" dirty="0"/>
+          </a:p>
+        </p:txBody>
+      </p:sp>
+      <p:sp>
+        <p:nvSpPr>
+          <p:cNvPr id="3" name="Text 1"/>
+          <p:cNvSpPr/>
+          <p:nvPr/>
+        </p:nvSpPr>
+        <p:spPr>
+          <a:xfrm>
+            <a:off x="658368" y="1097280"/>
+            <a:ext cx="5623560" cy="1389888"/>
+          </a:xfrm>
+          <a:prstGeom prst="rect">
+            <a:avLst/>
+          </a:prstGeom>
+          <a:noFill/>
+          <a:ln/>
+        </p:spPr>
+        <p:txBody>
+          <a:bodyPr wrap="square" lIns="0" tIns="0" rIns="0" bIns="0" rtlCol="0" anchor="t">
+            <a:normAutofit/>
+          </a:bodyPr>
+          <a:lstStyle/>
+          <a:p>
+            <a:pPr algn="l" indent="0" marL="0">
+              <a:buNone/>
+            </a:pPr>
+            <a:r>
+              <a:rPr lang="en-US" sz="3600" b="1" dirty="0">
+                <a:solidFill>
+                  <a:srgbClr val="F5F7FA"/>
+                </a:solidFill>
+                <a:latin typeface="Liberation Sans" pitchFamily="34" charset="0"/>
+                <a:ea typeface="Liberation Sans" pitchFamily="34" charset="-122"/>
+                <a:cs typeface="Liberation Sans" pitchFamily="34" charset="-120"/>
+              </a:rPr>
+              <a:t>Private AI without</a:t>
+            </a:r>
+            <a:endParaRPr lang="en-US" sz="3600" dirty="0"/>
+          </a:p>
+          <a:p>
+            <a:pPr algn="l" indent="0" marL="0">
+              <a:buNone/>
+            </a:pPr>
+            <a:r>
+              <a:rPr lang="en-US" sz="3600" b="1" dirty="0">
+                <a:solidFill>
+                  <a:srgbClr val="F5F7FA"/>
+                </a:solidFill>
+                <a:latin typeface="Liberation Sans" pitchFamily="34" charset="0"/>
+                <a:ea typeface="Liberation Sans" pitchFamily="34" charset="-122"/>
+                <a:cs typeface="Liberation Sans" pitchFamily="34" charset="-120"/>
+              </a:rPr>
+              <a:t>scientific surrender.</a:t>
+            </a:r>
+            <a:endParaRPr lang="en-US" sz="3600" dirty="0"/>
+          </a:p>
+        </p:txBody>
+      </p:sp>
+      <p:sp>
+        <p:nvSpPr>
+          <p:cNvPr id="4" name="Text 2"/>
+          <p:cNvSpPr/>
+          <p:nvPr/>
+        </p:nvSpPr>
+        <p:spPr>
+          <a:xfrm>
+            <a:off x="749808" y="2971800"/>
+            <a:ext cx="1280160" cy="310896"/>
+          </a:xfrm>
+          <a:prstGeom prst="rect">
+            <a:avLst/>
+          </a:prstGeom>
+          <a:noFill/>
+          <a:ln/>
+        </p:spPr>
+        <p:txBody>
+          <a:bodyPr wrap="square" lIns="0" tIns="0" rIns="0" bIns="0" rtlCol="0" anchor="ctr">
+            <a:normAutofit/>
+          </a:bodyPr>
+          <a:lstStyle/>
+          <a:p>
+            <a:pPr algn="l" indent="0" marL="0">
+              <a:buNone/>
+            </a:pPr>
+            <a:r>
+              <a:rPr lang="en-US" sz="1200" b="1" dirty="0">
+                <a:solidFill>
+                  <a:srgbClr val="42BE65"/>
+                </a:solidFill>
+                <a:latin typeface="Liberation Mono" pitchFamily="34" charset="0"/>
+                <a:ea typeface="Liberation Mono" pitchFamily="34" charset="-122"/>
+                <a:cs typeface="Liberation Mono" pitchFamily="34" charset="-120"/>
+              </a:rPr>
+              <a:t>LOCAL</a:t>
+            </a:r>
+            <a:endParaRPr lang="en-US" sz="1200" dirty="0"/>
+          </a:p>
+        </p:txBody>
+      </p:sp>
+      <p:sp>
+        <p:nvSpPr>
+          <p:cNvPr id="5" name="Text 3"/>
+          <p:cNvSpPr/>
+          <p:nvPr/>
+        </p:nvSpPr>
+        <p:spPr>
+          <a:xfrm>
+            <a:off x="2103120" y="2971800"/>
+            <a:ext cx="4206240" cy="310896"/>
+          </a:xfrm>
+          <a:prstGeom prst="rect">
+            <a:avLst/>
+          </a:prstGeom>
+          <a:noFill/>
+          <a:ln/>
+        </p:spPr>
+        <p:txBody>
+          <a:bodyPr wrap="square" lIns="0" tIns="0" rIns="0" bIns="0" rtlCol="0" anchor="ctr">
+            <a:normAutofit/>
+          </a:bodyPr>
+          <a:lstStyle/>
+          <a:p>
+            <a:pPr algn="l" indent="0" marL="0">
+              <a:buNone/>
+            </a:pPr>
+            <a:r>
+              <a:rPr lang="en-US" sz="1600" b="1" dirty="0">
+                <a:solidFill>
+                  <a:srgbClr val="F5F7FA"/>
+                </a:solidFill>
+                <a:latin typeface="Liberation Sans" pitchFamily="34" charset="0"/>
+                <a:ea typeface="Liberation Sans" pitchFamily="34" charset="-122"/>
+                <a:cs typeface="Liberation Sans" pitchFamily="34" charset="-120"/>
+              </a:rPr>
+              <a:t>Qwen3.5-9B + RAG + memory on AMD</a:t>
+            </a:r>
+            <a:endParaRPr lang="en-US" sz="1600" dirty="0"/>
+          </a:p>
+        </p:txBody>
+      </p:sp>
+      <p:sp>
+        <p:nvSpPr>
+          <p:cNvPr id="6" name="Text 4"/>
+          <p:cNvSpPr/>
+          <p:nvPr/>
+        </p:nvSpPr>
+        <p:spPr>
+          <a:xfrm>
+            <a:off x="749808" y="3630168"/>
+            <a:ext cx="1280160" cy="310896"/>
+          </a:xfrm>
+          <a:prstGeom prst="rect">
+            <a:avLst/>
+          </a:prstGeom>
+          <a:noFill/>
+          <a:ln/>
+        </p:spPr>
+        <p:txBody>
+          <a:bodyPr wrap="square" lIns="0" tIns="0" rIns="0" bIns="0" rtlCol="0" anchor="ctr">
+            <a:normAutofit/>
+          </a:bodyPr>
+          <a:lstStyle/>
+          <a:p>
+            <a:pPr algn="l" indent="0" marL="0">
+              <a:buNone/>
+            </a:pPr>
+            <a:r>
+              <a:rPr lang="en-US" sz="1200" b="1" dirty="0">
+                <a:solidFill>
+                  <a:srgbClr val="78A9FF"/>
+                </a:solidFill>
+                <a:latin typeface="Liberation Mono" pitchFamily="34" charset="0"/>
+                <a:ea typeface="Liberation Mono" pitchFamily="34" charset="-122"/>
+                <a:cs typeface="Liberation Mono" pitchFamily="34" charset="-120"/>
+              </a:rPr>
+              <a:t>VERIFIABLE</a:t>
+            </a:r>
+            <a:endParaRPr lang="en-US" sz="1200" dirty="0"/>
+          </a:p>
+        </p:txBody>
+      </p:sp>
+      <p:sp>
+        <p:nvSpPr>
+          <p:cNvPr id="7" name="Text 5"/>
+          <p:cNvSpPr/>
+          <p:nvPr/>
+        </p:nvSpPr>
+        <p:spPr>
+          <a:xfrm>
+            <a:off x="2103120" y="3630168"/>
+            <a:ext cx="4206240" cy="310896"/>
+          </a:xfrm>
+          <a:prstGeom prst="rect">
+            <a:avLst/>
+          </a:prstGeom>
+          <a:noFill/>
+          <a:ln/>
+        </p:spPr>
+        <p:txBody>
+          <a:bodyPr wrap="square" lIns="0" tIns="0" rIns="0" bIns="0" rtlCol="0" anchor="ctr">
+            <a:normAutofit/>
+          </a:bodyPr>
+          <a:lstStyle/>
+          <a:p>
+            <a:pPr algn="l" indent="0" marL="0">
+              <a:buNone/>
+            </a:pPr>
+            <a:r>
+              <a:rPr lang="en-US" sz="1600" b="1" dirty="0">
+                <a:solidFill>
+                  <a:srgbClr val="F5F7FA"/>
+                </a:solidFill>
+                <a:latin typeface="Liberation Sans" pitchFamily="34" charset="0"/>
+                <a:ea typeface="Liberation Sans" pitchFamily="34" charset="-122"/>
+                <a:cs typeface="Liberation Sans" pitchFamily="34" charset="-120"/>
+              </a:rPr>
+              <a:t>388 AMD post-merge tests + FP64 parity + SHA-256</a:t>
+            </a:r>
+            <a:endParaRPr lang="en-US" sz="1600" dirty="0"/>
+          </a:p>
+        </p:txBody>
+      </p:sp>
+      <p:sp>
+        <p:nvSpPr>
+          <p:cNvPr id="8" name="Text 6"/>
+          <p:cNvSpPr/>
+          <p:nvPr/>
+        </p:nvSpPr>
+        <p:spPr>
+          <a:xfrm>
+            <a:off x="749808" y="4288536"/>
+            <a:ext cx="1280160" cy="310896"/>
+          </a:xfrm>
+          <a:prstGeom prst="rect">
+            <a:avLst/>
+          </a:prstGeom>
+          <a:noFill/>
+          <a:ln/>
+        </p:spPr>
+        <p:txBody>
+          <a:bodyPr wrap="square" lIns="0" tIns="0" rIns="0" bIns="0" rtlCol="0" anchor="ctr">
+            <a:normAutofit/>
+          </a:bodyPr>
+          <a:lstStyle/>
+          <a:p>
+            <a:pPr algn="l" indent="0" marL="0">
+              <a:buNone/>
+            </a:pPr>
+            <a:r>
+              <a:rPr lang="en-US" sz="1200" b="1" dirty="0">
+                <a:solidFill>
+                  <a:srgbClr val="FF6B00"/>
+                </a:solidFill>
+                <a:latin typeface="Liberation Mono" pitchFamily="34" charset="0"/>
+                <a:ea typeface="Liberation Mono" pitchFamily="34" charset="-122"/>
+                <a:cs typeface="Liberation Mono" pitchFamily="34" charset="-120"/>
+              </a:rPr>
+              <a:t>USEFUL</a:t>
+            </a:r>
+            <a:endParaRPr lang="en-US" sz="1200" dirty="0"/>
+          </a:p>
+        </p:txBody>
+      </p:sp>
+      <p:sp>
+        <p:nvSpPr>
+          <p:cNvPr id="9" name="Text 7"/>
+          <p:cNvSpPr/>
+          <p:nvPr/>
+        </p:nvSpPr>
+        <p:spPr>
+          <a:xfrm>
+            <a:off x="2103120" y="4288536"/>
+            <a:ext cx="4206240" cy="310896"/>
+          </a:xfrm>
+          <a:prstGeom prst="rect">
+            <a:avLst/>
+          </a:prstGeom>
+          <a:noFill/>
+          <a:ln/>
+        </p:spPr>
+        <p:txBody>
+          <a:bodyPr wrap="square" lIns="0" tIns="0" rIns="0" bIns="0" rtlCol="0" anchor="ctr">
+            <a:normAutofit/>
+          </a:bodyPr>
+          <a:lstStyle/>
+          <a:p>
+            <a:pPr algn="l" indent="0" marL="0">
+              <a:buNone/>
+            </a:pPr>
+            <a:r>
+              <a:rPr lang="en-US" sz="1600" b="1" dirty="0">
+                <a:solidFill>
+                  <a:srgbClr val="F5F7FA"/>
+                </a:solidFill>
+                <a:latin typeface="Liberation Sans" pitchFamily="34" charset="0"/>
+                <a:ea typeface="Liberation Sans" pitchFamily="34" charset="-122"/>
+                <a:cs typeface="Liberation Sans" pitchFamily="34" charset="-120"/>
+              </a:rPr>
+              <a:t>One-click workflow from case to report</a:t>
+            </a:r>
+            <a:endParaRPr lang="en-US" sz="1600" dirty="0"/>
+          </a:p>
+        </p:txBody>
+      </p:sp>
+      <p:sp>
+        <p:nvSpPr>
+          <p:cNvPr id="10" name="Text 8"/>
+          <p:cNvSpPr/>
+          <p:nvPr/>
+        </p:nvSpPr>
+        <p:spPr>
+          <a:xfrm>
+            <a:off x="749808" y="4946904"/>
+            <a:ext cx="1280160" cy="310896"/>
+          </a:xfrm>
+          <a:prstGeom prst="rect">
+            <a:avLst/>
+          </a:prstGeom>
+          <a:noFill/>
+          <a:ln/>
+        </p:spPr>
+        <p:txBody>
+          <a:bodyPr wrap="square" lIns="0" tIns="0" rIns="0" bIns="0" rtlCol="0" anchor="ctr">
+            <a:normAutofit/>
+          </a:bodyPr>
+          <a:lstStyle/>
+          <a:p>
+            <a:pPr algn="l" indent="0" marL="0">
+              <a:buNone/>
+            </a:pPr>
+            <a:r>
+              <a:rPr lang="en-US" sz="1200" b="1" dirty="0">
+                <a:solidFill>
+                  <a:srgbClr val="F1C21B"/>
+                </a:solidFill>
+                <a:latin typeface="Liberation Mono" pitchFamily="34" charset="0"/>
+                <a:ea typeface="Liberation Mono" pitchFamily="34" charset="-122"/>
+                <a:cs typeface="Liberation Mono" pitchFamily="34" charset="-120"/>
+              </a:rPr>
+              <a:t>HONEST</a:t>
+            </a:r>
+            <a:endParaRPr lang="en-US" sz="1200" dirty="0"/>
+          </a:p>
+        </p:txBody>
+      </p:sp>
+      <p:sp>
+        <p:nvSpPr>
+          <p:cNvPr id="11" name="Text 9"/>
+          <p:cNvSpPr/>
+          <p:nvPr/>
+        </p:nvSpPr>
+        <p:spPr>
+          <a:xfrm>
+            <a:off x="2103120" y="4946904"/>
+            <a:ext cx="4206240" cy="310896"/>
+          </a:xfrm>
+          <a:prstGeom prst="rect">
+            <a:avLst/>
+          </a:prstGeom>
+          <a:noFill/>
+          <a:ln/>
+        </p:spPr>
+        <p:txBody>
+          <a:bodyPr wrap="square" lIns="0" tIns="0" rIns="0" bIns="0" rtlCol="0" anchor="ctr">
+            <a:normAutofit/>
+          </a:bodyPr>
+          <a:lstStyle/>
+          <a:p>
+            <a:pPr algn="l" indent="0" marL="0">
+              <a:buNone/>
+            </a:pPr>
+            <a:r>
+              <a:rPr lang="en-US" sz="1600" b="1" dirty="0">
+                <a:solidFill>
+                  <a:srgbClr val="F5F7FA"/>
+                </a:solidFill>
+                <a:latin typeface="Liberation Sans" pitchFamily="34" charset="0"/>
+                <a:ea typeface="Liberation Sans" pitchFamily="34" charset="-122"/>
+                <a:cs typeface="Liberation Sans" pitchFamily="34" charset="-120"/>
+              </a:rPr>
+              <a:t>PHREEQC bridge explicit; no unqualified science</a:t>
+            </a:r>
+            <a:endParaRPr lang="en-US" sz="1600" dirty="0"/>
+          </a:p>
+        </p:txBody>
+      </p:sp>
+      <p:sp>
+        <p:nvSpPr>
+          <p:cNvPr id="12" name="Shape 10"/>
+          <p:cNvSpPr/>
+          <p:nvPr/>
+        </p:nvSpPr>
+        <p:spPr>
+          <a:xfrm>
+            <a:off x="6903720" y="658368"/>
+            <a:ext cx="4645152" cy="5468112"/>
+          </a:xfrm>
+          <a:prstGeom prst="rect">
+            <a:avLst/>
+          </a:prstGeom>
+          <a:solidFill>
+            <a:srgbClr val="15171A"/>
+          </a:solidFill>
+          <a:ln w="12700">
+            <a:solidFill>
+              <a:srgbClr val="363A40"/>
+            </a:solidFill>
+            <a:prstDash val="solid"/>
+          </a:ln>
+        </p:spPr>
+      </p:sp>
+      <p:sp>
+        <p:nvSpPr>
+          <p:cNvPr id="13" name="Text 11"/>
+          <p:cNvSpPr/>
+          <p:nvPr/>
+        </p:nvSpPr>
+        <p:spPr>
+          <a:xfrm>
+            <a:off x="7269480" y="1005840"/>
+            <a:ext cx="1828800" cy="329184"/>
+          </a:xfrm>
+          <a:prstGeom prst="rect">
+            <a:avLst/>
+          </a:prstGeom>
+          <a:noFill/>
+          <a:ln/>
+        </p:spPr>
+        <p:txBody>
+          <a:bodyPr wrap="square" lIns="0" tIns="0" rIns="0" bIns="0" rtlCol="0" anchor="ctr">
+            <a:normAutofit/>
+          </a:bodyPr>
+          <a:lstStyle/>
+          <a:p>
+            <a:pPr algn="l" indent="0" marL="0">
+              <a:buNone/>
+            </a:pPr>
+            <a:r>
+              <a:rPr lang="en-US" sz="2000" b="1" dirty="0">
+                <a:solidFill>
+                  <a:srgbClr val="F5F7FA"/>
+                </a:solidFill>
+                <a:latin typeface="Liberation Sans" pitchFamily="34" charset="0"/>
+                <a:ea typeface="Liberation Sans" pitchFamily="34" charset="-122"/>
+                <a:cs typeface="Liberation Sans" pitchFamily="34" charset="-120"/>
+              </a:rPr>
+              <a:t>The proof</a:t>
+            </a:r>
+            <a:endParaRPr lang="en-US" sz="2000" dirty="0"/>
+          </a:p>
+        </p:txBody>
+      </p:sp>
+      <p:sp>
+        <p:nvSpPr>
+          <p:cNvPr id="14" name="Text 12"/>
+          <p:cNvSpPr/>
+          <p:nvPr/>
+        </p:nvSpPr>
+        <p:spPr>
+          <a:xfrm>
+            <a:off x="7269480" y="1627632"/>
+            <a:ext cx="1828800" cy="658368"/>
+          </a:xfrm>
+          <a:prstGeom prst="rect">
+            <a:avLst/>
+          </a:prstGeom>
+          <a:noFill/>
+          <a:ln/>
+        </p:spPr>
+        <p:txBody>
+          <a:bodyPr wrap="square" lIns="0" tIns="0" rIns="0" bIns="0" rtlCol="0" anchor="ctr">
+            <a:normAutofit/>
+          </a:bodyPr>
+          <a:lstStyle/>
+          <a:p>
+            <a:pPr algn="l" indent="0" marL="0">
+              <a:buNone/>
+            </a:pPr>
+            <a:r>
+              <a:rPr lang="en-US" sz="3600" b="1" dirty="0">
+                <a:solidFill>
+                  <a:srgbClr val="42BE65"/>
+                </a:solidFill>
+                <a:latin typeface="Liberation Mono" pitchFamily="34" charset="0"/>
+                <a:ea typeface="Liberation Mono" pitchFamily="34" charset="-122"/>
+                <a:cs typeface="Liberation Mono" pitchFamily="34" charset="-120"/>
+              </a:rPr>
+              <a:t>5/5</a:t>
+            </a:r>
+            <a:endParaRPr lang="en-US" sz="3600" dirty="0"/>
+          </a:p>
+        </p:txBody>
+      </p:sp>
+      <p:sp>
+        <p:nvSpPr>
+          <p:cNvPr id="15" name="Text 13"/>
+          <p:cNvSpPr/>
+          <p:nvPr/>
+        </p:nvSpPr>
+        <p:spPr>
+          <a:xfrm>
+            <a:off x="7269480" y="2286000"/>
+            <a:ext cx="1828800" cy="310896"/>
+          </a:xfrm>
+          <a:prstGeom prst="rect">
+            <a:avLst/>
+          </a:prstGeom>
+          <a:noFill/>
+          <a:ln/>
+        </p:spPr>
+        <p:txBody>
+          <a:bodyPr wrap="square" lIns="0" tIns="0" rIns="0" bIns="0" rtlCol="0" anchor="t">
+            <a:normAutofit/>
+          </a:bodyPr>
+          <a:lstStyle/>
+          <a:p>
+            <a:pPr algn="l" indent="0" marL="0">
+              <a:buNone/>
+            </a:pPr>
+            <a:r>
+              <a:rPr lang="en-US" sz="1100" dirty="0">
+                <a:solidFill>
+                  <a:srgbClr val="A7ADB5"/>
+                </a:solidFill>
+                <a:latin typeface="Liberation Sans" pitchFamily="34" charset="0"/>
+                <a:ea typeface="Liberation Sans" pitchFamily="34" charset="-122"/>
+                <a:cs typeface="Liberation Sans" pitchFamily="34" charset="-120"/>
+              </a:rPr>
+              <a:t>Track 2 capabilities</a:t>
+            </a:r>
+            <a:endParaRPr lang="en-US" sz="1100" dirty="0"/>
+          </a:p>
+        </p:txBody>
+      </p:sp>
+      <p:sp>
+        <p:nvSpPr>
+          <p:cNvPr id="16" name="Text 14"/>
+          <p:cNvSpPr/>
+          <p:nvPr/>
+        </p:nvSpPr>
+        <p:spPr>
+          <a:xfrm>
+            <a:off x="9390888" y="1627632"/>
+            <a:ext cx="1691640" cy="658368"/>
+          </a:xfrm>
+          <a:prstGeom prst="rect">
+            <a:avLst/>
+          </a:prstGeom>
+          <a:noFill/>
+          <a:ln/>
+        </p:spPr>
+        <p:txBody>
+          <a:bodyPr wrap="square" lIns="0" tIns="0" rIns="0" bIns="0" rtlCol="0" anchor="ctr">
+            <a:normAutofit/>
+          </a:bodyPr>
+          <a:lstStyle/>
+          <a:p>
+            <a:pPr algn="l" indent="0" marL="0">
+              <a:buNone/>
+            </a:pPr>
+            <a:r>
+              <a:rPr lang="en-US" sz="3600" b="1" dirty="0">
+                <a:solidFill>
+                  <a:srgbClr val="78A9FF"/>
+                </a:solidFill>
+                <a:latin typeface="Liberation Mono" pitchFamily="34" charset="0"/>
+                <a:ea typeface="Liberation Mono" pitchFamily="34" charset="-122"/>
+                <a:cs typeface="Liberation Mono" pitchFamily="34" charset="-120"/>
+              </a:rPr>
+              <a:t>388</a:t>
+            </a:r>
+            <a:endParaRPr lang="en-US" sz="3600" dirty="0"/>
+          </a:p>
+        </p:txBody>
+      </p:sp>
+      <p:sp>
+        <p:nvSpPr>
+          <p:cNvPr id="17" name="Text 15"/>
+          <p:cNvSpPr/>
+          <p:nvPr/>
+        </p:nvSpPr>
+        <p:spPr>
+          <a:xfrm>
+            <a:off x="9390888" y="2286000"/>
+            <a:ext cx="1691640" cy="310896"/>
+          </a:xfrm>
+          <a:prstGeom prst="rect">
+            <a:avLst/>
+          </a:prstGeom>
+          <a:noFill/>
+          <a:ln/>
+        </p:spPr>
+        <p:txBody>
+          <a:bodyPr wrap="square" lIns="0" tIns="0" rIns="0" bIns="0" rtlCol="0" anchor="t">
+            <a:normAutofit/>
+          </a:bodyPr>
+          <a:lstStyle/>
+          <a:p>
+            <a:pPr algn="l" indent="0" marL="0">
+              <a:buNone/>
+            </a:pPr>
+            <a:r>
+              <a:rPr lang="en-US" sz="1100" dirty="0">
+                <a:solidFill>
+                  <a:srgbClr val="A7ADB5"/>
+                </a:solidFill>
+                <a:latin typeface="Liberation Sans" pitchFamily="34" charset="0"/>
+                <a:ea typeface="Liberation Sans" pitchFamily="34" charset="-122"/>
+                <a:cs typeface="Liberation Sans" pitchFamily="34" charset="-120"/>
+              </a:rPr>
+              <a:t>AMD tests (post-merge)</a:t>
+            </a:r>
+            <a:endParaRPr lang="en-US" sz="1100" dirty="0"/>
+          </a:p>
+        </p:txBody>
+      </p:sp>
+      <p:sp>
+        <p:nvSpPr>
+          <p:cNvPr id="18" name="Text 16"/>
+          <p:cNvSpPr/>
+          <p:nvPr/>
+        </p:nvSpPr>
+        <p:spPr>
+          <a:xfrm>
+            <a:off x="7269480" y="2788920"/>
+            <a:ext cx="1828800" cy="658368"/>
+          </a:xfrm>
+          <a:prstGeom prst="rect">
+            <a:avLst/>
+          </a:prstGeom>
+          <a:noFill/>
+          <a:ln/>
+        </p:spPr>
+        <p:txBody>
+          <a:bodyPr wrap="square" lIns="0" tIns="0" rIns="0" bIns="0" rtlCol="0" anchor="ctr">
+            <a:normAutofit/>
+          </a:bodyPr>
+          <a:lstStyle/>
+          <a:p>
+            <a:pPr algn="l" indent="0" marL="0">
+              <a:buNone/>
+            </a:pPr>
+            <a:r>
+              <a:rPr lang="en-US" sz="3600" b="1" dirty="0">
+                <a:solidFill>
+                  <a:srgbClr val="FF6B00"/>
+                </a:solidFill>
+                <a:latin typeface="Liberation Mono" pitchFamily="34" charset="0"/>
+                <a:ea typeface="Liberation Mono" pitchFamily="34" charset="-122"/>
+                <a:cs typeface="Liberation Mono" pitchFamily="34" charset="-120"/>
+              </a:rPr>
+              <a:t>137.09×</a:t>
+            </a:r>
+            <a:endParaRPr lang="en-US" sz="3600" dirty="0"/>
+          </a:p>
+        </p:txBody>
+      </p:sp>
+      <p:sp>
+        <p:nvSpPr>
+          <p:cNvPr id="19" name="Text 17"/>
+          <p:cNvSpPr/>
+          <p:nvPr/>
+        </p:nvSpPr>
+        <p:spPr>
+          <a:xfrm>
+            <a:off x="7269480" y="3447288"/>
+            <a:ext cx="1828800" cy="310896"/>
+          </a:xfrm>
+          <a:prstGeom prst="rect">
+            <a:avLst/>
+          </a:prstGeom>
+          <a:noFill/>
+          <a:ln/>
+        </p:spPr>
+        <p:txBody>
+          <a:bodyPr wrap="square" lIns="0" tIns="0" rIns="0" bIns="0" rtlCol="0" anchor="t">
+            <a:normAutofit/>
+          </a:bodyPr>
+          <a:lstStyle/>
+          <a:p>
+            <a:pPr algn="l" indent="0" marL="0">
+              <a:buNone/>
+            </a:pPr>
+            <a:r>
+              <a:rPr lang="en-US" sz="1100" dirty="0">
+                <a:solidFill>
+                  <a:srgbClr val="A7ADB5"/>
+                </a:solidFill>
+                <a:latin typeface="Liberation Sans" pitchFamily="34" charset="0"/>
+                <a:ea typeface="Liberation Sans" pitchFamily="34" charset="-122"/>
+                <a:cs typeface="Liberation Sans" pitchFamily="34" charset="-120"/>
+              </a:rPr>
+              <a:t>FP64 platform</a:t>
+            </a:r>
+            <a:endParaRPr lang="en-US" sz="1100" dirty="0"/>
+          </a:p>
+        </p:txBody>
+      </p:sp>
+      <p:sp>
+        <p:nvSpPr>
+          <p:cNvPr id="20" name="Text 18"/>
+          <p:cNvSpPr/>
+          <p:nvPr/>
+        </p:nvSpPr>
+        <p:spPr>
+          <a:xfrm>
+            <a:off x="9390888" y="2788920"/>
+            <a:ext cx="1691640" cy="658368"/>
+          </a:xfrm>
+          <a:prstGeom prst="rect">
+            <a:avLst/>
+          </a:prstGeom>
+          <a:noFill/>
+          <a:ln/>
+        </p:spPr>
+        <p:txBody>
+          <a:bodyPr wrap="square" lIns="0" tIns="0" rIns="0" bIns="0" rtlCol="0" anchor="ctr">
+            <a:normAutofit/>
+          </a:bodyPr>
+          <a:lstStyle/>
+          <a:p>
+            <a:pPr algn="l" indent="0" marL="0">
+              <a:buNone/>
+            </a:pPr>
+            <a:r>
+              <a:rPr lang="en-US" sz="3600" b="1" dirty="0">
+                <a:solidFill>
+                  <a:srgbClr val="BE95FF"/>
+                </a:solidFill>
+                <a:latin typeface="Liberation Mono" pitchFamily="34" charset="0"/>
+                <a:ea typeface="Liberation Mono" pitchFamily="34" charset="-122"/>
+                <a:cs typeface="Liberation Mono" pitchFamily="34" charset="-120"/>
+              </a:rPr>
+              <a:t>0</a:t>
+            </a:r>
+            <a:endParaRPr lang="en-US" sz="3600" dirty="0"/>
+          </a:p>
+        </p:txBody>
+      </p:sp>
+      <p:sp>
+        <p:nvSpPr>
+          <p:cNvPr id="21" name="Text 19"/>
+          <p:cNvSpPr/>
+          <p:nvPr/>
+        </p:nvSpPr>
+        <p:spPr>
+          <a:xfrm>
+            <a:off x="9390888" y="3447288"/>
+            <a:ext cx="1691640" cy="310896"/>
+          </a:xfrm>
+          <a:prstGeom prst="rect">
+            <a:avLst/>
+          </a:prstGeom>
+          <a:noFill/>
+          <a:ln/>
+        </p:spPr>
+        <p:txBody>
+          <a:bodyPr wrap="square" lIns="0" tIns="0" rIns="0" bIns="0" rtlCol="0" anchor="t">
+            <a:normAutofit/>
+          </a:bodyPr>
+          <a:lstStyle/>
+          <a:p>
+            <a:pPr algn="l" indent="0" marL="0">
+              <a:buNone/>
+            </a:pPr>
+            <a:r>
+              <a:rPr lang="en-US" sz="1100" dirty="0">
+                <a:solidFill>
+                  <a:srgbClr val="A7ADB5"/>
+                </a:solidFill>
+                <a:latin typeface="Liberation Sans" pitchFamily="34" charset="0"/>
+                <a:ea typeface="Liberation Sans" pitchFamily="34" charset="-122"/>
+                <a:cs typeface="Liberation Sans" pitchFamily="34" charset="-120"/>
+              </a:rPr>
+              <a:t>cloud calls</a:t>
+            </a:r>
+            <a:endParaRPr lang="en-US" sz="1100" dirty="0"/>
+          </a:p>
+        </p:txBody>
+      </p:sp>
+      <p:sp>
+        <p:nvSpPr>
+          <p:cNvPr id="22" name="Text 20"/>
+          <p:cNvSpPr/>
+          <p:nvPr/>
+        </p:nvSpPr>
+        <p:spPr>
+          <a:xfrm>
+            <a:off x="7269480" y="4187952"/>
+            <a:ext cx="3657600" cy="320040"/>
+          </a:xfrm>
+          <a:prstGeom prst="rect">
+            <a:avLst/>
+          </a:prstGeom>
+          <a:noFill/>
+          <a:ln/>
+        </p:spPr>
+        <p:txBody>
+          <a:bodyPr wrap="square" lIns="0" tIns="0" rIns="0" bIns="0" rtlCol="0" anchor="ctr">
+            <a:normAutofit/>
+          </a:bodyPr>
+          <a:lstStyle/>
+          <a:p>
+            <a:pPr algn="l" indent="0" marL="0">
+              <a:buNone/>
+            </a:pPr>
+            <a:r>
+              <a:rPr lang="en-US" sz="1500" b="1" dirty="0">
+                <a:solidFill>
+                  <a:srgbClr val="F5F7FA"/>
+                </a:solidFill>
+                <a:latin typeface="Liberation Sans" pitchFamily="34" charset="0"/>
+                <a:ea typeface="Liberation Sans" pitchFamily="34" charset="-122"/>
+                <a:cs typeface="Liberation Sans" pitchFamily="34" charset="-120"/>
+              </a:rPr>
+              <a:t>Track 2 · Physics-First AI · NuclidePath</a:t>
+            </a:r>
+            <a:endParaRPr lang="en-US" sz="1500" dirty="0"/>
+          </a:p>
+        </p:txBody>
+      </p:sp>
+      <p:sp>
+        <p:nvSpPr>
+          <p:cNvPr id="23" name="Text 21"/>
+          <p:cNvSpPr/>
+          <p:nvPr/>
+        </p:nvSpPr>
+        <p:spPr>
+          <a:xfrm>
+            <a:off x="7269480" y="4709160"/>
+            <a:ext cx="3657600" cy="292608"/>
+          </a:xfrm>
+          <a:prstGeom prst="rect">
+            <a:avLst/>
+          </a:prstGeom>
+          <a:noFill/>
+          <a:ln/>
+        </p:spPr>
+        <p:txBody>
+          <a:bodyPr wrap="square" lIns="0" tIns="0" rIns="0" bIns="0" rtlCol="0" anchor="ctr">
+            <a:normAutofit/>
+          </a:bodyPr>
+          <a:lstStyle/>
+          <a:p>
+            <a:pPr algn="l" indent="0" marL="0">
+              <a:buNone/>
+            </a:pPr>
+            <a:r>
+              <a:rPr lang="en-US" sz="1200" dirty="0">
+                <a:solidFill>
+                  <a:srgbClr val="78A9FF"/>
+                </a:solidFill>
+                <a:latin typeface="Liberation Mono" pitchFamily="34" charset="0"/>
+                <a:ea typeface="Liberation Mono" pitchFamily="34" charset="-122"/>
+                <a:cs typeface="Liberation Mono" pitchFamily="34" charset="-120"/>
+              </a:rPr>
+              <a:t>Official AMD Track 2 PR package</a:t>
+            </a:r>
+            <a:endParaRPr lang="en-US" sz="1200" dirty="0"/>
+          </a:p>
+        </p:txBody>
+      </p:sp>
+      <p:sp>
+        <p:nvSpPr>
+          <p:cNvPr id="24" name="Shape 22"/>
+          <p:cNvSpPr/>
+          <p:nvPr/>
+        </p:nvSpPr>
+        <p:spPr>
+          <a:xfrm>
+            <a:off x="7269480" y="5303520"/>
+            <a:ext cx="1874520" cy="292608"/>
+          </a:xfrm>
+          <a:prstGeom prst="roundRect">
+            <a:avLst>
+              <a:gd name="adj" fmla="val 25000"/>
+            </a:avLst>
+          </a:prstGeom>
+          <a:solidFill>
+            <a:srgbClr val="42BE65">
+              <a:alpha val="22000"/>
+            </a:srgbClr>
+          </a:solidFill>
+          <a:ln w="12700">
+            <a:solidFill>
+              <a:srgbClr val="42BE65"/>
+            </a:solidFill>
+            <a:prstDash val="solid"/>
+          </a:ln>
+        </p:spPr>
+      </p:sp>
+      <p:sp>
+        <p:nvSpPr>
+          <p:cNvPr id="25" name="Text 23"/>
+          <p:cNvSpPr/>
+          <p:nvPr/>
+        </p:nvSpPr>
+        <p:spPr>
+          <a:xfrm>
+            <a:off x="7342632" y="5321808"/>
+            <a:ext cx="1728216" cy="219456"/>
+          </a:xfrm>
+          <a:prstGeom prst="rect">
+            <a:avLst/>
+          </a:prstGeom>
+          <a:noFill/>
+          <a:ln/>
+        </p:spPr>
+        <p:txBody>
+          <a:bodyPr wrap="square" lIns="0" tIns="0" rIns="0" bIns="0" rtlCol="0" anchor="ctr">
+            <a:normAutofit/>
+          </a:bodyPr>
+          <a:lstStyle/>
+          <a:p>
+            <a:pPr algn="ctr" indent="0" marL="0">
+              <a:buNone/>
+            </a:pPr>
+            <a:r>
+              <a:rPr lang="en-US" sz="900" b="1" dirty="0">
+                <a:solidFill>
+                  <a:srgbClr val="42BE65"/>
+                </a:solidFill>
+                <a:latin typeface="Liberation Sans" pitchFamily="34" charset="0"/>
+                <a:ea typeface="Liberation Sans" pitchFamily="34" charset="-122"/>
+                <a:cs typeface="Liberation Sans" pitchFamily="34" charset="-120"/>
+              </a:rPr>
+              <a:t>TECHNICAL BUILD VERIFIED</a:t>
+            </a:r>
+            <a:endParaRPr lang="en-US" sz="900" dirty="0"/>
+          </a:p>
+        </p:txBody>
+      </p:sp>
+      <p:sp>
+        <p:nvSpPr>
+          <p:cNvPr id="26" name="Text 24"/>
+          <p:cNvSpPr/>
+          <p:nvPr/>
+        </p:nvSpPr>
+        <p:spPr>
+          <a:xfrm>
+            <a:off x="658368" y="6080760"/>
+            <a:ext cx="2011680" cy="292608"/>
+          </a:xfrm>
+          <a:prstGeom prst="rect">
+            <a:avLst/>
+          </a:prstGeom>
+          <a:noFill/>
+          <a:ln/>
+        </p:spPr>
+        <p:txBody>
+          <a:bodyPr wrap="square" lIns="0" tIns="0" rIns="0" bIns="0" rtlCol="0" anchor="ctr">
+            <a:normAutofit/>
+          </a:bodyPr>
+          <a:lstStyle/>
+          <a:p>
+            <a:pPr algn="l" indent="0" marL="0">
+              <a:buNone/>
+            </a:pPr>
+            <a:r>
+              <a:rPr lang="en-US" sz="1100" spc="200" kern="0" dirty="0">
+                <a:solidFill>
+                  <a:srgbClr val="A7ADB5"/>
+                </a:solidFill>
+                <a:latin typeface="Liberation Sans" pitchFamily="34" charset="0"/>
+                <a:ea typeface="Liberation Sans" pitchFamily="34" charset="-122"/>
+                <a:cs typeface="Liberation Sans" pitchFamily="34" charset="-120"/>
+              </a:rPr>
+              <a:t>THANK YOU</a:t>
+            </a:r>
+            <a:endParaRPr lang="en-US" sz="1100" dirty="0"/>
+          </a:p>
+        </p:txBody>
+      </p:sp>
+    </p:spTree>
+  </p:cSld>
+  <p:clrMapOvr>
+    <a:masterClrMapping/>
+  </p:clrMapOvr>
+</p:sld>
+</file>
+
 <file path=ppt/slides/slide2.xml><?xml version="1.0" encoding="utf-8"?>
 <p:sld xmlns:a="http://schemas.openxmlformats.org/drawingml/2006/main" xmlns:r="http://schemas.openxmlformats.org/officeDocument/2006/relationships" xmlns:p="http://schemas.openxmlformats.org/presentationml/2006/main">
   <p:cSld name="Slide 2">
@@ -5786,7 +6921,7 @@
                 <a:ea typeface="Liberation Sans" pitchFamily="34" charset="-122"/>
                 <a:cs typeface="Liberation Sans" pitchFamily="34" charset="-120"/>
               </a:rPr>
-              <a:t>AMD DEPLOYMENT</a:t>
+              <a:t>RECENT EXTENSIONS</a:t>
             </a:r>
             <a:endParaRPr lang="en-US" sz="1000" dirty="0"/>
           </a:p>
@@ -5827,7 +6962,7 @@
                 <a:ea typeface="Liberation Sans" pitchFamily="34" charset="-122"/>
                 <a:cs typeface="Liberation Sans" pitchFamily="34" charset="-120"/>
               </a:rPr>
-              <a:t>Qwen3.5-9B Q8 runs locally on Radeon + ROCm</a:t>
+              <a:t>Traceable post-merge science</a:t>
             </a:r>
             <a:endParaRPr lang="en-US" sz="3000" dirty="0"/>
           </a:p>
@@ -5868,7 +7003,7 @@
                 <a:ea typeface="Liberation Sans" pitchFamily="34" charset="-122"/>
                 <a:cs typeface="Liberation Sans" pitchFamily="34" charset="-120"/>
               </a:rPr>
-              <a:t>The measured local model fits in VRAM and produced the verified allow-listed plan.</a:t>
+              <a:t>The latest work adds deterministic, auditable layers around the canonical screening path.</a:t>
             </a:r>
             <a:endParaRPr lang="en-US" sz="1300" dirty="0"/>
           </a:p>
@@ -5903,13 +7038,13 @@
             <a:r>
               <a:rPr lang="en-US" sz="3600" b="1" dirty="0">
                 <a:solidFill>
-                  <a:srgbClr val="FF6B00"/>
+                  <a:srgbClr val="42BE65"/>
                 </a:solidFill>
                 <a:latin typeface="Liberation Mono" pitchFamily="34" charset="0"/>
                 <a:ea typeface="Liberation Mono" pitchFamily="34" charset="-122"/>
                 <a:cs typeface="Liberation Mono" pitchFamily="34" charset="-120"/>
               </a:rPr>
-              <a:t>2,877.30</a:t>
+              <a:t>388/2</a:t>
             </a:r>
             <a:endParaRPr lang="en-US" sz="3600" dirty="0"/>
           </a:p>
@@ -5950,7 +7085,7 @@
                 <a:ea typeface="Liberation Sans" pitchFamily="34" charset="-122"/>
                 <a:cs typeface="Liberation Sans" pitchFamily="34" charset="-120"/>
               </a:rPr>
-              <a:t>prompt tokens/s · 512 tokens</a:t>
+              <a:t>AMD post-merge tests</a:t>
             </a:r>
             <a:endParaRPr lang="en-US" sz="1100" dirty="0"/>
           </a:p>
@@ -5991,7 +7126,7 @@
                 <a:ea typeface="Liberation Mono" pitchFamily="34" charset="-122"/>
                 <a:cs typeface="Liberation Mono" pitchFamily="34" charset="-120"/>
               </a:rPr>
-              <a:t>67.66</a:t>
+              <a:t>4</a:t>
             </a:r>
             <a:endParaRPr lang="en-US" sz="3600" dirty="0"/>
           </a:p>
@@ -6032,7 +7167,7 @@
                 <a:ea typeface="Liberation Sans" pitchFamily="34" charset="-122"/>
                 <a:cs typeface="Liberation Sans" pitchFamily="34" charset="-120"/>
               </a:rPr>
-              <a:t>generation tokens/s · 128 tokens</a:t>
+              <a:t>ions · K/Na/Ca/Mg</a:t>
             </a:r>
             <a:endParaRPr lang="en-US" sz="1100" dirty="0"/>
           </a:p>
@@ -6067,13 +7202,13 @@
             <a:r>
               <a:rPr lang="en-US" sz="3600" b="1" dirty="0">
                 <a:solidFill>
-                  <a:srgbClr val="42BE65"/>
+                  <a:srgbClr val="FF6B00"/>
                 </a:solidFill>
                 <a:latin typeface="Liberation Mono" pitchFamily="34" charset="0"/>
                 <a:ea typeface="Liberation Mono" pitchFamily="34" charset="-122"/>
                 <a:cs typeface="Liberation Mono" pitchFamily="34" charset="-120"/>
               </a:rPr>
-              <a:t>19.9692 s</a:t>
+              <a:t>2×</a:t>
             </a:r>
             <a:endParaRPr lang="en-US" sz="3600" dirty="0"/>
           </a:p>
@@ -6114,7 +7249,7 @@
                 <a:ea typeface="Liberation Sans" pitchFamily="34" charset="-122"/>
                 <a:cs typeface="Liberation Sans" pitchFamily="34" charset="-120"/>
               </a:rPr>
-              <a:t>AMD v0.3 LLM pipeline</a:t>
+              <a:t>fixtures · brine/recharge</a:t>
             </a:r>
             <a:endParaRPr lang="en-US" sz="1100" dirty="0"/>
           </a:p>
@@ -6155,7 +7290,7 @@
                 <a:ea typeface="Liberation Mono" pitchFamily="34" charset="-122"/>
                 <a:cs typeface="Liberation Mono" pitchFamily="34" charset="-120"/>
               </a:rPr>
-              <a:t>8.86 GiB</a:t>
+              <a:t>0</a:t>
             </a:r>
             <a:endParaRPr lang="en-US" sz="3600" dirty="0"/>
           </a:p>
@@ -6196,7 +7331,7 @@
                 <a:ea typeface="Liberation Sans" pitchFamily="34" charset="-122"/>
                 <a:cs typeface="Liberation Sans" pitchFamily="34" charset="-120"/>
               </a:rPr>
-              <a:t>Q8 model size</a:t>
+              <a:t>unqualified claims</a:t>
             </a:r>
             <a:endParaRPr lang="en-US" sz="1100" dirty="0"/>
           </a:p>
@@ -6204,506 +7339,14 @@
       </p:sp>
       <p:sp>
         <p:nvSpPr>
-          <p:cNvPr id="13" name="Text 11"/>
-          <p:cNvSpPr/>
-          <p:nvPr/>
-        </p:nvSpPr>
-        <p:spPr>
-          <a:xfrm>
-            <a:off x="777240" y="3127248"/>
-            <a:ext cx="1234440" cy="292608"/>
-          </a:xfrm>
-          <a:prstGeom prst="rect">
-            <a:avLst/>
-          </a:prstGeom>
-          <a:noFill/>
-          <a:ln/>
-        </p:spPr>
-        <p:txBody>
-          <a:bodyPr wrap="square" lIns="0" tIns="0" rIns="0" bIns="0" rtlCol="0" anchor="ctr">
-            <a:normAutofit/>
-          </a:bodyPr>
-          <a:lstStyle/>
-          <a:p>
-            <a:pPr algn="l" indent="0" marL="0">
-              <a:buNone/>
-            </a:pPr>
-            <a:r>
-              <a:rPr lang="en-US" sz="1100" dirty="0">
-                <a:solidFill>
-                  <a:srgbClr val="A7ADB5"/>
-                </a:solidFill>
-                <a:latin typeface="Liberation Mono" pitchFamily="34" charset="0"/>
-                <a:ea typeface="Liberation Mono" pitchFamily="34" charset="-122"/>
-                <a:cs typeface="Liberation Mono" pitchFamily="34" charset="-120"/>
-              </a:rPr>
-              <a:t>GPU</a:t>
-            </a:r>
-            <a:endParaRPr lang="en-US" sz="1100" dirty="0"/>
-          </a:p>
-        </p:txBody>
-      </p:sp>
-      <p:sp>
-        <p:nvSpPr>
-          <p:cNvPr id="14" name="Text 12"/>
-          <p:cNvSpPr/>
-          <p:nvPr/>
-        </p:nvSpPr>
-        <p:spPr>
-          <a:xfrm>
-            <a:off x="2057400" y="3127248"/>
-            <a:ext cx="4251960" cy="292608"/>
-          </a:xfrm>
-          <a:prstGeom prst="rect">
-            <a:avLst/>
-          </a:prstGeom>
-          <a:noFill/>
-          <a:ln/>
-        </p:spPr>
-        <p:txBody>
-          <a:bodyPr wrap="square" lIns="0" tIns="0" rIns="0" bIns="0" rtlCol="0" anchor="ctr">
-            <a:normAutofit/>
-          </a:bodyPr>
-          <a:lstStyle/>
-          <a:p>
-            <a:pPr algn="l" indent="0" marL="0">
-              <a:buNone/>
-            </a:pPr>
-            <a:r>
-              <a:rPr lang="en-US" sz="1200" b="1" dirty="0">
-                <a:solidFill>
-                  <a:srgbClr val="F5F7FA"/>
-                </a:solidFill>
-                <a:latin typeface="Liberation Sans" pitchFamily="34" charset="0"/>
-                <a:ea typeface="Liberation Sans" pitchFamily="34" charset="-122"/>
-                <a:cs typeface="Liberation Sans" pitchFamily="34" charset="-120"/>
-              </a:rPr>
-              <a:t>AMD Radeon Graphics · gfx1100</a:t>
-            </a:r>
-            <a:endParaRPr lang="en-US" sz="1200" dirty="0"/>
-          </a:p>
-        </p:txBody>
-      </p:sp>
-      <p:sp>
-        <p:nvSpPr>
-          <p:cNvPr id="15" name="Text 13"/>
-          <p:cNvSpPr/>
-          <p:nvPr/>
-        </p:nvSpPr>
-        <p:spPr>
-          <a:xfrm>
-            <a:off x="777240" y="3566160"/>
-            <a:ext cx="1234440" cy="292608"/>
-          </a:xfrm>
-          <a:prstGeom prst="rect">
-            <a:avLst/>
-          </a:prstGeom>
-          <a:noFill/>
-          <a:ln/>
-        </p:spPr>
-        <p:txBody>
-          <a:bodyPr wrap="square" lIns="0" tIns="0" rIns="0" bIns="0" rtlCol="0" anchor="ctr">
-            <a:normAutofit/>
-          </a:bodyPr>
-          <a:lstStyle/>
-          <a:p>
-            <a:pPr algn="l" indent="0" marL="0">
-              <a:buNone/>
-            </a:pPr>
-            <a:r>
-              <a:rPr lang="en-US" sz="1100" dirty="0">
-                <a:solidFill>
-                  <a:srgbClr val="A7ADB5"/>
-                </a:solidFill>
-                <a:latin typeface="Liberation Mono" pitchFamily="34" charset="0"/>
-                <a:ea typeface="Liberation Mono" pitchFamily="34" charset="-122"/>
-                <a:cs typeface="Liberation Mono" pitchFamily="34" charset="-120"/>
-              </a:rPr>
-              <a:t>Stack</a:t>
-            </a:r>
-            <a:endParaRPr lang="en-US" sz="1100" dirty="0"/>
-          </a:p>
-        </p:txBody>
-      </p:sp>
-      <p:sp>
-        <p:nvSpPr>
-          <p:cNvPr id="16" name="Text 14"/>
-          <p:cNvSpPr/>
-          <p:nvPr/>
-        </p:nvSpPr>
-        <p:spPr>
-          <a:xfrm>
-            <a:off x="2057400" y="3566160"/>
-            <a:ext cx="4251960" cy="292608"/>
-          </a:xfrm>
-          <a:prstGeom prst="rect">
-            <a:avLst/>
-          </a:prstGeom>
-          <a:noFill/>
-          <a:ln/>
-        </p:spPr>
-        <p:txBody>
-          <a:bodyPr wrap="square" lIns="0" tIns="0" rIns="0" bIns="0" rtlCol="0" anchor="ctr">
-            <a:normAutofit/>
-          </a:bodyPr>
-          <a:lstStyle/>
-          <a:p>
-            <a:pPr algn="l" indent="0" marL="0">
-              <a:buNone/>
-            </a:pPr>
-            <a:r>
-              <a:rPr lang="en-US" sz="1200" b="1" dirty="0">
-                <a:solidFill>
-                  <a:srgbClr val="F5F7FA"/>
-                </a:solidFill>
-                <a:latin typeface="Liberation Sans" pitchFamily="34" charset="0"/>
-                <a:ea typeface="Liberation Sans" pitchFamily="34" charset="-122"/>
-                <a:cs typeface="Liberation Sans" pitchFamily="34" charset="-120"/>
-              </a:rPr>
-              <a:t>ROCm 7.2.1 · llama.cpp HIP Release</a:t>
-            </a:r>
-            <a:endParaRPr lang="en-US" sz="1200" dirty="0"/>
-          </a:p>
-        </p:txBody>
-      </p:sp>
-      <p:sp>
-        <p:nvSpPr>
-          <p:cNvPr id="17" name="Text 15"/>
-          <p:cNvSpPr/>
-          <p:nvPr/>
-        </p:nvSpPr>
-        <p:spPr>
-          <a:xfrm>
-            <a:off x="777240" y="4005072"/>
-            <a:ext cx="1234440" cy="292608"/>
-          </a:xfrm>
-          <a:prstGeom prst="rect">
-            <a:avLst/>
-          </a:prstGeom>
-          <a:noFill/>
-          <a:ln/>
-        </p:spPr>
-        <p:txBody>
-          <a:bodyPr wrap="square" lIns="0" tIns="0" rIns="0" bIns="0" rtlCol="0" anchor="ctr">
-            <a:normAutofit/>
-          </a:bodyPr>
-          <a:lstStyle/>
-          <a:p>
-            <a:pPr algn="l" indent="0" marL="0">
-              <a:buNone/>
-            </a:pPr>
-            <a:r>
-              <a:rPr lang="en-US" sz="1100" dirty="0">
-                <a:solidFill>
-                  <a:srgbClr val="A7ADB5"/>
-                </a:solidFill>
-                <a:latin typeface="Liberation Mono" pitchFamily="34" charset="0"/>
-                <a:ea typeface="Liberation Mono" pitchFamily="34" charset="-122"/>
-                <a:cs typeface="Liberation Mono" pitchFamily="34" charset="-120"/>
-              </a:rPr>
-              <a:t>Offload</a:t>
-            </a:r>
-            <a:endParaRPr lang="en-US" sz="1100" dirty="0"/>
-          </a:p>
-        </p:txBody>
-      </p:sp>
-      <p:sp>
-        <p:nvSpPr>
-          <p:cNvPr id="18" name="Text 16"/>
-          <p:cNvSpPr/>
-          <p:nvPr/>
-        </p:nvSpPr>
-        <p:spPr>
-          <a:xfrm>
-            <a:off x="2057400" y="4005072"/>
-            <a:ext cx="4251960" cy="292608"/>
-          </a:xfrm>
-          <a:prstGeom prst="rect">
-            <a:avLst/>
-          </a:prstGeom>
-          <a:noFill/>
-          <a:ln/>
-        </p:spPr>
-        <p:txBody>
-          <a:bodyPr wrap="square" lIns="0" tIns="0" rIns="0" bIns="0" rtlCol="0" anchor="ctr">
-            <a:normAutofit/>
-          </a:bodyPr>
-          <a:lstStyle/>
-          <a:p>
-            <a:pPr algn="l" indent="0" marL="0">
-              <a:buNone/>
-            </a:pPr>
-            <a:r>
-              <a:rPr lang="en-US" sz="1200" b="1" dirty="0">
-                <a:solidFill>
-                  <a:srgbClr val="F5F7FA"/>
-                </a:solidFill>
-                <a:latin typeface="Liberation Sans" pitchFamily="34" charset="0"/>
-                <a:ea typeface="Liberation Sans" pitchFamily="34" charset="-122"/>
-                <a:cs typeface="Liberation Sans" pitchFamily="34" charset="-120"/>
-              </a:rPr>
-              <a:t>-ngl 99 · all model layers</a:t>
-            </a:r>
-            <a:endParaRPr lang="en-US" sz="1200" dirty="0"/>
-          </a:p>
-        </p:txBody>
-      </p:sp>
-      <p:sp>
-        <p:nvSpPr>
-          <p:cNvPr id="19" name="Text 17"/>
-          <p:cNvSpPr/>
-          <p:nvPr/>
-        </p:nvSpPr>
-        <p:spPr>
-          <a:xfrm>
-            <a:off x="777240" y="4443984"/>
-            <a:ext cx="1234440" cy="292608"/>
-          </a:xfrm>
-          <a:prstGeom prst="rect">
-            <a:avLst/>
-          </a:prstGeom>
-          <a:noFill/>
-          <a:ln/>
-        </p:spPr>
-        <p:txBody>
-          <a:bodyPr wrap="square" lIns="0" tIns="0" rIns="0" bIns="0" rtlCol="0" anchor="ctr">
-            <a:normAutofit/>
-          </a:bodyPr>
-          <a:lstStyle/>
-          <a:p>
-            <a:pPr algn="l" indent="0" marL="0">
-              <a:buNone/>
-            </a:pPr>
-            <a:r>
-              <a:rPr lang="en-US" sz="1100" dirty="0">
-                <a:solidFill>
-                  <a:srgbClr val="A7ADB5"/>
-                </a:solidFill>
-                <a:latin typeface="Liberation Mono" pitchFamily="34" charset="0"/>
-                <a:ea typeface="Liberation Mono" pitchFamily="34" charset="-122"/>
-                <a:cs typeface="Liberation Mono" pitchFamily="34" charset="-120"/>
-              </a:rPr>
-              <a:t>Context</a:t>
-            </a:r>
-            <a:endParaRPr lang="en-US" sz="1100" dirty="0"/>
-          </a:p>
-        </p:txBody>
-      </p:sp>
-      <p:sp>
-        <p:nvSpPr>
-          <p:cNvPr id="20" name="Text 18"/>
-          <p:cNvSpPr/>
-          <p:nvPr/>
-        </p:nvSpPr>
-        <p:spPr>
-          <a:xfrm>
-            <a:off x="2057400" y="4443984"/>
-            <a:ext cx="4251960" cy="292608"/>
-          </a:xfrm>
-          <a:prstGeom prst="rect">
-            <a:avLst/>
-          </a:prstGeom>
-          <a:noFill/>
-          <a:ln/>
-        </p:spPr>
-        <p:txBody>
-          <a:bodyPr wrap="square" lIns="0" tIns="0" rIns="0" bIns="0" rtlCol="0" anchor="ctr">
-            <a:normAutofit/>
-          </a:bodyPr>
-          <a:lstStyle/>
-          <a:p>
-            <a:pPr algn="l" indent="0" marL="0">
-              <a:buNone/>
-            </a:pPr>
-            <a:r>
-              <a:rPr lang="en-US" sz="1200" b="1" dirty="0">
-                <a:solidFill>
-                  <a:srgbClr val="F5F7FA"/>
-                </a:solidFill>
-                <a:latin typeface="Liberation Sans" pitchFamily="34" charset="0"/>
-                <a:ea typeface="Liberation Sans" pitchFamily="34" charset="-122"/>
-                <a:cs typeface="Liberation Sans" pitchFamily="34" charset="-120"/>
-              </a:rPr>
-              <a:t>8192 tokens · reasoning off</a:t>
-            </a:r>
-            <a:endParaRPr lang="en-US" sz="1200" dirty="0"/>
-          </a:p>
-        </p:txBody>
-      </p:sp>
-      <p:sp>
-        <p:nvSpPr>
-          <p:cNvPr id="21" name="Text 19"/>
-          <p:cNvSpPr/>
-          <p:nvPr/>
-        </p:nvSpPr>
-        <p:spPr>
-          <a:xfrm>
-            <a:off x="777240" y="4882896"/>
-            <a:ext cx="1234440" cy="292608"/>
-          </a:xfrm>
-          <a:prstGeom prst="rect">
-            <a:avLst/>
-          </a:prstGeom>
-          <a:noFill/>
-          <a:ln/>
-        </p:spPr>
-        <p:txBody>
-          <a:bodyPr wrap="square" lIns="0" tIns="0" rIns="0" bIns="0" rtlCol="0" anchor="ctr">
-            <a:normAutofit/>
-          </a:bodyPr>
-          <a:lstStyle/>
-          <a:p>
-            <a:pPr algn="l" indent="0" marL="0">
-              <a:buNone/>
-            </a:pPr>
-            <a:r>
-              <a:rPr lang="en-US" sz="1100" dirty="0">
-                <a:solidFill>
-                  <a:srgbClr val="A7ADB5"/>
-                </a:solidFill>
-                <a:latin typeface="Liberation Mono" pitchFamily="34" charset="0"/>
-                <a:ea typeface="Liberation Mono" pitchFamily="34" charset="-122"/>
-                <a:cs typeface="Liberation Mono" pitchFamily="34" charset="-120"/>
-              </a:rPr>
-              <a:t>Network</a:t>
-            </a:r>
-            <a:endParaRPr lang="en-US" sz="1100" dirty="0"/>
-          </a:p>
-        </p:txBody>
-      </p:sp>
-      <p:sp>
-        <p:nvSpPr>
-          <p:cNvPr id="22" name="Text 20"/>
-          <p:cNvSpPr/>
-          <p:nvPr/>
-        </p:nvSpPr>
-        <p:spPr>
-          <a:xfrm>
-            <a:off x="2057400" y="4882896"/>
-            <a:ext cx="4251960" cy="292608"/>
-          </a:xfrm>
-          <a:prstGeom prst="rect">
-            <a:avLst/>
-          </a:prstGeom>
-          <a:noFill/>
-          <a:ln/>
-        </p:spPr>
-        <p:txBody>
-          <a:bodyPr wrap="square" lIns="0" tIns="0" rIns="0" bIns="0" rtlCol="0" anchor="ctr">
-            <a:normAutofit/>
-          </a:bodyPr>
-          <a:lstStyle/>
-          <a:p>
-            <a:pPr algn="l" indent="0" marL="0">
-              <a:buNone/>
-            </a:pPr>
-            <a:r>
-              <a:rPr lang="en-US" sz="1200" b="1" dirty="0">
-                <a:solidFill>
-                  <a:srgbClr val="F5F7FA"/>
-                </a:solidFill>
-                <a:latin typeface="Liberation Sans" pitchFamily="34" charset="0"/>
-                <a:ea typeface="Liberation Sans" pitchFamily="34" charset="-122"/>
-                <a:cs typeface="Liberation Sans" pitchFamily="34" charset="-120"/>
-              </a:rPr>
-              <a:t>127.0.0.1:8000 only</a:t>
-            </a:r>
-            <a:endParaRPr lang="en-US" sz="1200" dirty="0"/>
-          </a:p>
-        </p:txBody>
-      </p:sp>
-      <p:sp>
-        <p:nvSpPr>
-          <p:cNvPr id="23" name="Text 21"/>
-          <p:cNvSpPr/>
-          <p:nvPr/>
-        </p:nvSpPr>
-        <p:spPr>
-          <a:xfrm>
-            <a:off x="777240" y="5321808"/>
-            <a:ext cx="1234440" cy="292608"/>
-          </a:xfrm>
-          <a:prstGeom prst="rect">
-            <a:avLst/>
-          </a:prstGeom>
-          <a:noFill/>
-          <a:ln/>
-        </p:spPr>
-        <p:txBody>
-          <a:bodyPr wrap="square" lIns="0" tIns="0" rIns="0" bIns="0" rtlCol="0" anchor="ctr">
-            <a:normAutofit/>
-          </a:bodyPr>
-          <a:lstStyle/>
-          <a:p>
-            <a:pPr algn="l" indent="0" marL="0">
-              <a:buNone/>
-            </a:pPr>
-            <a:r>
-              <a:rPr lang="en-US" sz="1100" dirty="0">
-                <a:solidFill>
-                  <a:srgbClr val="A7ADB5"/>
-                </a:solidFill>
-                <a:latin typeface="Liberation Mono" pitchFamily="34" charset="0"/>
-                <a:ea typeface="Liberation Mono" pitchFamily="34" charset="-122"/>
-                <a:cs typeface="Liberation Mono" pitchFamily="34" charset="-120"/>
-              </a:rPr>
-              <a:t>Integrity</a:t>
-            </a:r>
-            <a:endParaRPr lang="en-US" sz="1100" dirty="0"/>
-          </a:p>
-        </p:txBody>
-      </p:sp>
-      <p:sp>
-        <p:nvSpPr>
-          <p:cNvPr id="24" name="Text 22"/>
-          <p:cNvSpPr/>
-          <p:nvPr/>
-        </p:nvSpPr>
-        <p:spPr>
-          <a:xfrm>
-            <a:off x="2057400" y="5321808"/>
-            <a:ext cx="4251960" cy="292608"/>
-          </a:xfrm>
-          <a:prstGeom prst="rect">
-            <a:avLst/>
-          </a:prstGeom>
-          <a:noFill/>
-          <a:ln/>
-        </p:spPr>
-        <p:txBody>
-          <a:bodyPr wrap="square" lIns="0" tIns="0" rIns="0" bIns="0" rtlCol="0" anchor="ctr">
-            <a:normAutofit/>
-          </a:bodyPr>
-          <a:lstStyle/>
-          <a:p>
-            <a:pPr algn="l" indent="0" marL="0">
-              <a:buNone/>
-            </a:pPr>
-            <a:r>
-              <a:rPr lang="en-US" sz="1200" b="1" dirty="0">
-                <a:solidFill>
-                  <a:srgbClr val="F5F7FA"/>
-                </a:solidFill>
-                <a:latin typeface="Liberation Sans" pitchFamily="34" charset="0"/>
-                <a:ea typeface="Liberation Sans" pitchFamily="34" charset="-122"/>
-                <a:cs typeface="Liberation Sans" pitchFamily="34" charset="-120"/>
-              </a:rPr>
-              <a:t>SHA-256 verified model file</a:t>
-            </a:r>
-            <a:endParaRPr lang="en-US" sz="1200" dirty="0"/>
-          </a:p>
-        </p:txBody>
-      </p:sp>
-      <p:sp>
-        <p:nvSpPr>
-          <p:cNvPr id="25" name="Shape 23"/>
-          <p:cNvSpPr/>
-          <p:nvPr/>
-        </p:nvSpPr>
-        <p:spPr>
-          <a:xfrm>
-            <a:off x="6720840" y="3063240"/>
-            <a:ext cx="4754880" cy="2542032"/>
+          <p:cNvPr id="13" name="Shape 11"/>
+          <p:cNvSpPr/>
+          <p:nvPr/>
+        </p:nvSpPr>
+        <p:spPr>
+          <a:xfrm>
+            <a:off x="658368" y="3017520"/>
+            <a:ext cx="10972800" cy="2606040"/>
           </a:xfrm>
           <a:prstGeom prst="rect">
             <a:avLst/>
@@ -6721,55 +7364,55 @@
       </p:sp>
       <p:sp>
         <p:nvSpPr>
-          <p:cNvPr id="26" name="Text 24"/>
-          <p:cNvSpPr/>
-          <p:nvPr/>
-        </p:nvSpPr>
-        <p:spPr>
-          <a:xfrm>
-            <a:off x="7059168" y="3474720"/>
-            <a:ext cx="4069080" cy="493776"/>
-          </a:xfrm>
-          <a:prstGeom prst="rect">
-            <a:avLst/>
-          </a:prstGeom>
-          <a:noFill/>
-          <a:ln/>
-        </p:spPr>
-        <p:txBody>
-          <a:bodyPr wrap="square" lIns="0" tIns="0" rIns="0" bIns="0" rtlCol="0" anchor="ctr">
-            <a:normAutofit/>
-          </a:bodyPr>
-          <a:lstStyle/>
-          <a:p>
-            <a:pPr algn="ctr" indent="0" marL="0">
-              <a:buNone/>
-            </a:pPr>
-            <a:r>
-              <a:rPr lang="en-US" sz="2400" b="1" dirty="0">
-                <a:solidFill>
-                  <a:srgbClr val="42BE65"/>
-                </a:solidFill>
-                <a:latin typeface="Liberation Mono" pitchFamily="34" charset="0"/>
-                <a:ea typeface="Liberation Mono" pitchFamily="34" charset="-122"/>
-                <a:cs typeface="Liberation Mono" pitchFamily="34" charset="-120"/>
-              </a:rPr>
-              <a:t>OFFLINE  ≡  LLM-PLANNED</a:t>
-            </a:r>
-            <a:endParaRPr lang="en-US" sz="2400" dirty="0"/>
-          </a:p>
-        </p:txBody>
-      </p:sp>
-      <p:sp>
-        <p:nvSpPr>
-          <p:cNvPr id="27" name="Text 25"/>
-          <p:cNvSpPr/>
-          <p:nvPr/>
-        </p:nvSpPr>
-        <p:spPr>
-          <a:xfrm>
-            <a:off x="7333488" y="4224528"/>
-            <a:ext cx="3520440" cy="749808"/>
+          <p:cNvPr id="14" name="Text 12"/>
+          <p:cNvSpPr/>
+          <p:nvPr/>
+        </p:nvSpPr>
+        <p:spPr>
+          <a:xfrm>
+            <a:off x="914400" y="3246120"/>
+            <a:ext cx="2377440" cy="274320"/>
+          </a:xfrm>
+          <a:prstGeom prst="rect">
+            <a:avLst/>
+          </a:prstGeom>
+          <a:noFill/>
+          <a:ln/>
+        </p:spPr>
+        <p:txBody>
+          <a:bodyPr wrap="square" lIns="0" tIns="0" rIns="0" bIns="0" rtlCol="0" anchor="ctr">
+            <a:normAutofit/>
+          </a:bodyPr>
+          <a:lstStyle/>
+          <a:p>
+            <a:pPr algn="l" indent="0" marL="0">
+              <a:buNone/>
+            </a:pPr>
+            <a:r>
+              <a:rPr lang="en-US" sz="1200" b="1" dirty="0">
+                <a:solidFill>
+                  <a:srgbClr val="FF6B00"/>
+                </a:solidFill>
+                <a:latin typeface="Liberation Sans" pitchFamily="34" charset="0"/>
+                <a:ea typeface="Liberation Sans" pitchFamily="34" charset="-122"/>
+                <a:cs typeface="Liberation Sans" pitchFamily="34" charset="-120"/>
+              </a:rPr>
+              <a:t>PHREEQC bridge</a:t>
+            </a:r>
+            <a:endParaRPr lang="en-US" sz="1200" dirty="0"/>
+          </a:p>
+        </p:txBody>
+      </p:sp>
+      <p:sp>
+        <p:nvSpPr>
+          <p:cNvPr id="15" name="Text 13"/>
+          <p:cNvSpPr/>
+          <p:nvPr/>
+        </p:nvSpPr>
+        <p:spPr>
+          <a:xfrm>
+            <a:off x="3429000" y="3246120"/>
+            <a:ext cx="7863840" cy="502920"/>
           </a:xfrm>
           <a:prstGeom prst="rect">
             <a:avLst/>
@@ -6783,11 +7426,11 @@
           </a:bodyPr>
           <a:lstStyle/>
           <a:p>
-            <a:pPr algn="ctr" indent="0" marL="0">
-              <a:buNone/>
-            </a:pPr>
-            <a:r>
-              <a:rPr lang="en-US" sz="1700" dirty="0">
+            <a:pPr algn="l" indent="0" marL="0">
+              <a:buNone/>
+            </a:pPr>
+            <a:r>
+              <a:rPr lang="en-US" sz="1150" dirty="0">
                 <a:solidFill>
                   <a:srgbClr val="F5F7FA"/>
                 </a:solidFill>
@@ -6795,16 +7438,81 @@
                 <a:ea typeface="Liberation Sans" pitchFamily="34" charset="-122"/>
                 <a:cs typeface="Liberation Sans" pitchFamily="34" charset="-120"/>
               </a:rPr>
-              <a:t>Identical physical runs</a:t>
-            </a:r>
-            <a:endParaRPr lang="en-US" sz="1700" dirty="0"/>
-          </a:p>
-          <a:p>
-            <a:pPr algn="ctr" indent="0" marL="0">
-              <a:buNone/>
-            </a:pPr>
-            <a:r>
-              <a:rPr lang="en-US" sz="1700" dirty="0">
+              <a:t>Opt-in scenario compiler: declared water chemistry, CEC and Cs + K/Na/Ca/Mg into SOLUTION/EXCHANGE/TRANSPORT input</a:t>
+            </a:r>
+            <a:endParaRPr lang="en-US" sz="1150" dirty="0"/>
+          </a:p>
+        </p:txBody>
+      </p:sp>
+      <p:sp>
+        <p:nvSpPr>
+          <p:cNvPr id="16" name="Text 14"/>
+          <p:cNvSpPr/>
+          <p:nvPr/>
+        </p:nvSpPr>
+        <p:spPr>
+          <a:xfrm>
+            <a:off x="914400" y="3813048"/>
+            <a:ext cx="2377440" cy="274320"/>
+          </a:xfrm>
+          <a:prstGeom prst="rect">
+            <a:avLst/>
+          </a:prstGeom>
+          <a:noFill/>
+          <a:ln/>
+        </p:spPr>
+        <p:txBody>
+          <a:bodyPr wrap="square" lIns="0" tIns="0" rIns="0" bIns="0" rtlCol="0" anchor="ctr">
+            <a:normAutofit/>
+          </a:bodyPr>
+          <a:lstStyle/>
+          <a:p>
+            <a:pPr algn="l" indent="0" marL="0">
+              <a:buNone/>
+            </a:pPr>
+            <a:r>
+              <a:rPr lang="en-US" sz="1200" b="1" dirty="0">
+                <a:solidFill>
+                  <a:srgbClr val="FF6B00"/>
+                </a:solidFill>
+                <a:latin typeface="Liberation Sans" pitchFamily="34" charset="0"/>
+                <a:ea typeface="Liberation Sans" pitchFamily="34" charset="-122"/>
+                <a:cs typeface="Liberation Sans" pitchFamily="34" charset="-120"/>
+              </a:rPr>
+              <a:t>Arithmetic oracle</a:t>
+            </a:r>
+            <a:endParaRPr lang="en-US" sz="1200" dirty="0"/>
+          </a:p>
+        </p:txBody>
+      </p:sp>
+      <p:sp>
+        <p:nvSpPr>
+          <p:cNvPr id="17" name="Text 15"/>
+          <p:cNvSpPr/>
+          <p:nvPr/>
+        </p:nvSpPr>
+        <p:spPr>
+          <a:xfrm>
+            <a:off x="3429000" y="3813048"/>
+            <a:ext cx="7863840" cy="502920"/>
+          </a:xfrm>
+          <a:prstGeom prst="rect">
+            <a:avLst/>
+          </a:prstGeom>
+          <a:noFill/>
+          <a:ln/>
+        </p:spPr>
+        <p:txBody>
+          <a:bodyPr wrap="square" lIns="0" tIns="0" rIns="0" bIns="0" rtlCol="0" anchor="t">
+            <a:normAutofit/>
+          </a:bodyPr>
+          <a:lstStyle/>
+          <a:p>
+            <a:pPr algn="l" indent="0" marL="0">
+              <a:buNone/>
+            </a:pPr>
+            <a:r>
+              <a:rPr lang="en-US" sz="1150" dirty="0">
                 <a:solidFill>
                   <a:srgbClr val="F5F7FA"/>
                 </a:solidFill>
@@ -6812,22 +7520,186 @@
                 <a:ea typeface="Liberation Sans" pitchFamily="34" charset="-122"/>
                 <a:cs typeface="Liberation Sans" pitchFamily="34" charset="-120"/>
               </a:rPr>
-              <a:t>for the same scenario</a:t>
-            </a:r>
-            <a:endParaRPr lang="en-US" sz="1700" dirty="0"/>
-          </a:p>
-        </p:txBody>
-      </p:sp>
-      <p:sp>
-        <p:nvSpPr>
-          <p:cNvPr id="28" name="Shape 26"/>
-          <p:cNvSpPr/>
-          <p:nvPr/>
-        </p:nvSpPr>
-        <p:spPr>
-          <a:xfrm>
-            <a:off x="8339328" y="5029200"/>
-            <a:ext cx="1527048" cy="292608"/>
+              <a:t>Independent machine-readable checks for units, grid mapping, non-negativity and exchange-site occupancy</a:t>
+            </a:r>
+            <a:endParaRPr lang="en-US" sz="1150" dirty="0"/>
+          </a:p>
+        </p:txBody>
+      </p:sp>
+      <p:sp>
+        <p:nvSpPr>
+          <p:cNvPr id="18" name="Text 16"/>
+          <p:cNvSpPr/>
+          <p:nvPr/>
+        </p:nvSpPr>
+        <p:spPr>
+          <a:xfrm>
+            <a:off x="914400" y="4379976"/>
+            <a:ext cx="2377440" cy="274320"/>
+          </a:xfrm>
+          <a:prstGeom prst="rect">
+            <a:avLst/>
+          </a:prstGeom>
+          <a:noFill/>
+          <a:ln/>
+        </p:spPr>
+        <p:txBody>
+          <a:bodyPr wrap="square" lIns="0" tIns="0" rIns="0" bIns="0" rtlCol="0" anchor="ctr">
+            <a:normAutofit/>
+          </a:bodyPr>
+          <a:lstStyle/>
+          <a:p>
+            <a:pPr algn="l" indent="0" marL="0">
+              <a:buNone/>
+            </a:pPr>
+            <a:r>
+              <a:rPr lang="en-US" sz="1200" b="1" dirty="0">
+                <a:solidFill>
+                  <a:srgbClr val="FF6B00"/>
+                </a:solidFill>
+                <a:latin typeface="Liberation Sans" pitchFamily="34" charset="0"/>
+                <a:ea typeface="Liberation Sans" pitchFamily="34" charset="-122"/>
+                <a:cs typeface="Liberation Sans" pitchFamily="34" charset="-120"/>
+              </a:rPr>
+              <a:t>Calibration gate</a:t>
+            </a:r>
+            <a:endParaRPr lang="en-US" sz="1200" dirty="0"/>
+          </a:p>
+        </p:txBody>
+      </p:sp>
+      <p:sp>
+        <p:nvSpPr>
+          <p:cNvPr id="19" name="Text 17"/>
+          <p:cNvSpPr/>
+          <p:nvPr/>
+        </p:nvSpPr>
+        <p:spPr>
+          <a:xfrm>
+            <a:off x="3429000" y="4379976"/>
+            <a:ext cx="7863840" cy="502920"/>
+          </a:xfrm>
+          <a:prstGeom prst="rect">
+            <a:avLst/>
+          </a:prstGeom>
+          <a:noFill/>
+          <a:ln/>
+        </p:spPr>
+        <p:txBody>
+          <a:bodyPr wrap="square" lIns="0" tIns="0" rIns="0" bIns="0" rtlCol="0" anchor="t">
+            <a:normAutofit/>
+          </a:bodyPr>
+          <a:lstStyle/>
+          <a:p>
+            <a:pPr algn="l" indent="0" marL="0">
+              <a:buNone/>
+            </a:pPr>
+            <a:r>
+              <a:rPr lang="en-US" sz="1150" dirty="0">
+                <a:solidFill>
+                  <a:srgbClr val="F5F7FA"/>
+                </a:solidFill>
+                <a:latin typeface="Liberation Sans" pitchFamily="34" charset="0"/>
+                <a:ea typeface="Liberation Sans" pitchFamily="34" charset="-122"/>
+                <a:cs typeface="Liberation Sans" pitchFamily="34" charset="-120"/>
+              </a:rPr>
+              <a:t>Dependency-free traceable Cs calibration/hold-out contract with fail-closed promotion; no data bundled</a:t>
+            </a:r>
+            <a:endParaRPr lang="en-US" sz="1150" dirty="0"/>
+          </a:p>
+        </p:txBody>
+      </p:sp>
+      <p:sp>
+        <p:nvSpPr>
+          <p:cNvPr id="20" name="Text 18"/>
+          <p:cNvSpPr/>
+          <p:nvPr/>
+        </p:nvSpPr>
+        <p:spPr>
+          <a:xfrm>
+            <a:off x="914400" y="4946904"/>
+            <a:ext cx="2377440" cy="274320"/>
+          </a:xfrm>
+          <a:prstGeom prst="rect">
+            <a:avLst/>
+          </a:prstGeom>
+          <a:noFill/>
+          <a:ln/>
+        </p:spPr>
+        <p:txBody>
+          <a:bodyPr wrap="square" lIns="0" tIns="0" rIns="0" bIns="0" rtlCol="0" anchor="ctr">
+            <a:normAutofit/>
+          </a:bodyPr>
+          <a:lstStyle/>
+          <a:p>
+            <a:pPr algn="l" indent="0" marL="0">
+              <a:buNone/>
+            </a:pPr>
+            <a:r>
+              <a:rPr lang="en-US" sz="1200" b="1" dirty="0">
+                <a:solidFill>
+                  <a:srgbClr val="FF6B00"/>
+                </a:solidFill>
+                <a:latin typeface="Liberation Sans" pitchFamily="34" charset="0"/>
+                <a:ea typeface="Liberation Sans" pitchFamily="34" charset="-122"/>
+                <a:cs typeface="Liberation Sans" pitchFamily="34" charset="-120"/>
+              </a:rPr>
+              <a:t>Benchmark registry</a:t>
+            </a:r>
+            <a:endParaRPr lang="en-US" sz="1200" dirty="0"/>
+          </a:p>
+        </p:txBody>
+      </p:sp>
+      <p:sp>
+        <p:nvSpPr>
+          <p:cNvPr id="21" name="Text 19"/>
+          <p:cNvSpPr/>
+          <p:nvPr/>
+        </p:nvSpPr>
+        <p:spPr>
+          <a:xfrm>
+            <a:off x="3429000" y="4946904"/>
+            <a:ext cx="7863840" cy="502920"/>
+          </a:xfrm>
+          <a:prstGeom prst="rect">
+            <a:avLst/>
+          </a:prstGeom>
+          <a:noFill/>
+          <a:ln/>
+        </p:spPr>
+        <p:txBody>
+          <a:bodyPr wrap="square" lIns="0" tIns="0" rIns="0" bIns="0" rtlCol="0" anchor="t">
+            <a:normAutofit/>
+          </a:bodyPr>
+          <a:lstStyle/>
+          <a:p>
+            <a:pPr algn="l" indent="0" marL="0">
+              <a:buNone/>
+            </a:pPr>
+            <a:r>
+              <a:rPr lang="en-US" sz="1150" dirty="0">
+                <a:solidFill>
+                  <a:srgbClr val="F5F7FA"/>
+                </a:solidFill>
+                <a:latin typeface="Liberation Sans" pitchFamily="34" charset="0"/>
+                <a:ea typeface="Liberation Sans" pitchFamily="34" charset="-122"/>
+                <a:cs typeface="Liberation Sans" pitchFamily="34" charset="-120"/>
+              </a:rPr>
+              <a:t>Separate EPA/Fuller/Dubus external Cs registry with source digests and calibration_eligible: false</a:t>
+            </a:r>
+            <a:endParaRPr lang="en-US" sz="1150" dirty="0"/>
+          </a:p>
+        </p:txBody>
+      </p:sp>
+      <p:sp>
+        <p:nvSpPr>
+          <p:cNvPr id="22" name="Shape 20"/>
+          <p:cNvSpPr/>
+          <p:nvPr/>
+        </p:nvSpPr>
+        <p:spPr>
+          <a:xfrm>
+            <a:off x="658368" y="5897880"/>
+            <a:ext cx="3291840" cy="292608"/>
           </a:xfrm>
           <a:prstGeom prst="roundRect">
             <a:avLst>
@@ -6835,13 +7707,13 @@
             </a:avLst>
           </a:prstGeom>
           <a:solidFill>
-            <a:srgbClr val="42BE65">
+            <a:srgbClr val="F1C21B">
               <a:alpha val="22000"/>
             </a:srgbClr>
           </a:solidFill>
           <a:ln w="12700">
             <a:solidFill>
-              <a:srgbClr val="42BE65"/>
+              <a:srgbClr val="F1C21B"/>
             </a:solidFill>
             <a:prstDash val="solid"/>
           </a:ln>
@@ -6849,14 +7721,14 @@
       </p:sp>
       <p:sp>
         <p:nvSpPr>
-          <p:cNvPr id="29" name="Text 27"/>
-          <p:cNvSpPr/>
-          <p:nvPr/>
-        </p:nvSpPr>
-        <p:spPr>
-          <a:xfrm>
-            <a:off x="8412480" y="5047488"/>
-            <a:ext cx="1380744" cy="219456"/>
+          <p:cNvPr id="23" name="Text 21"/>
+          <p:cNvSpPr/>
+          <p:nvPr/>
+        </p:nvSpPr>
+        <p:spPr>
+          <a:xfrm>
+            <a:off x="731520" y="5916168"/>
+            <a:ext cx="3145536" cy="219456"/>
           </a:xfrm>
           <a:prstGeom prst="rect">
             <a:avLst/>
@@ -6876,13 +7748,13 @@
             <a:r>
               <a:rPr lang="en-US" sz="900" b="1" dirty="0">
                 <a:solidFill>
-                  <a:srgbClr val="42BE65"/>
-                </a:solidFill>
-                <a:latin typeface="Liberation Sans" pitchFamily="34" charset="0"/>
-                <a:ea typeface="Liberation Sans" pitchFamily="34" charset="-122"/>
-                <a:cs typeface="Liberation Sans" pitchFamily="34" charset="-120"/>
-              </a:rPr>
-              <a:t>PHYSICS IDENTICAL</a:t>
+                  <a:srgbClr val="F1C21B"/>
+                </a:solidFill>
+                <a:latin typeface="Liberation Sans" pitchFamily="34" charset="0"/>
+                <a:ea typeface="Liberation Sans" pitchFamily="34" charset="-122"/>
+                <a:cs typeface="Liberation Sans" pitchFamily="34" charset="-120"/>
+              </a:rPr>
+              <a:t>PROCESS-QUALIFIED ONLY</a:t>
             </a:r>
             <a:endParaRPr lang="en-US" sz="900" dirty="0"/>
           </a:p>
@@ -6890,7 +7762,48 @@
       </p:sp>
       <p:sp>
         <p:nvSpPr>
-          <p:cNvPr id="30" name="Text 28"/>
+          <p:cNvPr id="24" name="Text 22"/>
+          <p:cNvSpPr/>
+          <p:nvPr/>
+        </p:nvSpPr>
+        <p:spPr>
+          <a:xfrm>
+            <a:off x="658368" y="6263640"/>
+            <a:ext cx="10058400" cy="274320"/>
+          </a:xfrm>
+          <a:prstGeom prst="rect">
+            <a:avLst/>
+          </a:prstGeom>
+          <a:noFill/>
+          <a:ln/>
+        </p:spPr>
+        <p:txBody>
+          <a:bodyPr wrap="square" lIns="0" tIns="0" rIns="0" bIns="0" rtlCol="0" anchor="ctr">
+            <a:normAutofit/>
+          </a:bodyPr>
+          <a:lstStyle/>
+          <a:p>
+            <a:pPr algn="l" indent="0" marL="0">
+              <a:buNone/>
+            </a:pPr>
+            <a:r>
+              <a:rPr lang="en-US" sz="1050" dirty="0">
+                <a:solidFill>
+                  <a:srgbClr val="A7ADB5"/>
+                </a:solidFill>
+                <a:latin typeface="Liberation Sans" pitchFamily="34" charset="0"/>
+                <a:ea typeface="Liberation Sans" pitchFamily="34" charset="-122"/>
+                <a:cs typeface="Liberation Sans" pitchFamily="34" charset="-120"/>
+              </a:rPr>
+              <a:t>Canonical transport-prototype-0.3 remains authoritative; the bridge is opt-in and does not replace it.</a:t>
+            </a:r>
+            <a:endParaRPr lang="en-US" sz="1050" dirty="0"/>
+          </a:p>
+        </p:txBody>
+      </p:sp>
+      <p:sp>
+        <p:nvSpPr>
+          <p:cNvPr id="25" name="Text 23"/>
           <p:cNvSpPr/>
           <p:nvPr/>
         </p:nvSpPr>
@@ -6931,7 +7844,7 @@
       </p:sp>
       <p:sp>
         <p:nvSpPr>
-          <p:cNvPr id="31" name="Text 29"/>
+          <p:cNvPr id="26" name="Text 24"/>
           <p:cNvSpPr/>
           <p:nvPr/>
         </p:nvSpPr>
@@ -7037,7 +7950,7 @@
                 <a:ea typeface="Liberation Sans" pitchFamily="34" charset="-122"/>
                 <a:cs typeface="Liberation Sans" pitchFamily="34" charset="-120"/>
               </a:rPr>
-              <a:t>PRODUCT EXPERIENCE</a:t>
+              <a:t>AMD DEPLOYMENT</a:t>
             </a:r>
             <a:endParaRPr lang="en-US" sz="1000" dirty="0"/>
           </a:p>
@@ -7078,7 +7991,7 @@
                 <a:ea typeface="Liberation Sans" pitchFamily="34" charset="-122"/>
                 <a:cs typeface="Liberation Sans" pitchFamily="34" charset="-120"/>
               </a:rPr>
-              <a:t>A technical dashboard, not an AI chat box</a:t>
+              <a:t>Qwen3.5-9B Q8 runs locally on Radeon + ROCm</a:t>
             </a:r>
             <a:endParaRPr lang="en-US" sz="3000" dirty="0"/>
           </a:p>
@@ -7119,46 +8032,842 @@
                 <a:ea typeface="Liberation Sans" pitchFamily="34" charset="-122"/>
                 <a:cs typeface="Liberation Sans" pitchFamily="34" charset="-120"/>
               </a:rPr>
-              <a:t>Inputs, workflow, evidence, uncertainty and artifacts remain visible in one place.</a:t>
+              <a:t>The measured local model fits in VRAM and produced the verified allow-listed plan.</a:t>
             </a:r>
             <a:endParaRPr lang="en-US" sz="1300" dirty="0"/>
           </a:p>
         </p:txBody>
       </p:sp>
-      <p:pic>
-        <p:nvPicPr>
-          <p:cNvPr id="5" name="Image 0" descr="NuclidePath dashboard overview">    </p:cNvPr>
-          <p:cNvPicPr>
-            <a:picLocks noChangeAspect="1"/>
-          </p:cNvPicPr>
-          <p:nvPr/>
-        </p:nvPicPr>
-        <p:blipFill>
-          <a:blip r:embed="rId1"/>
-          <a:stretch>
-            <a:fillRect/>
-          </a:stretch>
-        </p:blipFill>
-        <p:spPr>
-          <a:xfrm>
-            <a:off x="658368" y="1554480"/>
-            <a:ext cx="7635240" cy="4709160"/>
-          </a:xfrm>
-          <a:prstGeom prst="rect">
-            <a:avLst/>
-          </a:prstGeom>
-        </p:spPr>
-      </p:pic>
-      <p:sp>
-        <p:nvSpPr>
-          <p:cNvPr id="6" name="Shape 3"/>
-          <p:cNvSpPr/>
-          <p:nvPr/>
-        </p:nvSpPr>
-        <p:spPr>
-          <a:xfrm>
-            <a:off x="8613648" y="1572768"/>
-            <a:ext cx="2944368" cy="1234440"/>
+      <p:sp>
+        <p:nvSpPr>
+          <p:cNvPr id="5" name="Text 3"/>
+          <p:cNvSpPr/>
+          <p:nvPr/>
+        </p:nvSpPr>
+        <p:spPr>
+          <a:xfrm>
+            <a:off x="658368" y="1664208"/>
+            <a:ext cx="2743200" cy="658368"/>
+          </a:xfrm>
+          <a:prstGeom prst="rect">
+            <a:avLst/>
+          </a:prstGeom>
+          <a:noFill/>
+          <a:ln/>
+        </p:spPr>
+        <p:txBody>
+          <a:bodyPr wrap="square" lIns="0" tIns="0" rIns="0" bIns="0" rtlCol="0" anchor="ctr">
+            <a:normAutofit/>
+          </a:bodyPr>
+          <a:lstStyle/>
+          <a:p>
+            <a:pPr algn="l" indent="0" marL="0">
+              <a:buNone/>
+            </a:pPr>
+            <a:r>
+              <a:rPr lang="en-US" sz="3600" b="1" dirty="0">
+                <a:solidFill>
+                  <a:srgbClr val="FF6B00"/>
+                </a:solidFill>
+                <a:latin typeface="Liberation Mono" pitchFamily="34" charset="0"/>
+                <a:ea typeface="Liberation Mono" pitchFamily="34" charset="-122"/>
+                <a:cs typeface="Liberation Mono" pitchFamily="34" charset="-120"/>
+              </a:rPr>
+              <a:t>2,877.30</a:t>
+            </a:r>
+            <a:endParaRPr lang="en-US" sz="3600" dirty="0"/>
+          </a:p>
+        </p:txBody>
+      </p:sp>
+      <p:sp>
+        <p:nvSpPr>
+          <p:cNvPr id="6" name="Text 4"/>
+          <p:cNvSpPr/>
+          <p:nvPr/>
+        </p:nvSpPr>
+        <p:spPr>
+          <a:xfrm>
+            <a:off x="658368" y="2322576"/>
+            <a:ext cx="2743200" cy="310896"/>
+          </a:xfrm>
+          <a:prstGeom prst="rect">
+            <a:avLst/>
+          </a:prstGeom>
+          <a:noFill/>
+          <a:ln/>
+        </p:spPr>
+        <p:txBody>
+          <a:bodyPr wrap="square" lIns="0" tIns="0" rIns="0" bIns="0" rtlCol="0" anchor="t">
+            <a:normAutofit/>
+          </a:bodyPr>
+          <a:lstStyle/>
+          <a:p>
+            <a:pPr algn="l" indent="0" marL="0">
+              <a:buNone/>
+            </a:pPr>
+            <a:r>
+              <a:rPr lang="en-US" sz="1100" dirty="0">
+                <a:solidFill>
+                  <a:srgbClr val="A7ADB5"/>
+                </a:solidFill>
+                <a:latin typeface="Liberation Sans" pitchFamily="34" charset="0"/>
+                <a:ea typeface="Liberation Sans" pitchFamily="34" charset="-122"/>
+                <a:cs typeface="Liberation Sans" pitchFamily="34" charset="-120"/>
+              </a:rPr>
+              <a:t>prompt tokens/s · 512 tokens</a:t>
+            </a:r>
+            <a:endParaRPr lang="en-US" sz="1100" dirty="0"/>
+          </a:p>
+        </p:txBody>
+      </p:sp>
+      <p:sp>
+        <p:nvSpPr>
+          <p:cNvPr id="7" name="Text 5"/>
+          <p:cNvSpPr/>
+          <p:nvPr/>
+        </p:nvSpPr>
+        <p:spPr>
+          <a:xfrm>
+            <a:off x="3675888" y="1664208"/>
+            <a:ext cx="2743200" cy="658368"/>
+          </a:xfrm>
+          <a:prstGeom prst="rect">
+            <a:avLst/>
+          </a:prstGeom>
+          <a:noFill/>
+          <a:ln/>
+        </p:spPr>
+        <p:txBody>
+          <a:bodyPr wrap="square" lIns="0" tIns="0" rIns="0" bIns="0" rtlCol="0" anchor="ctr">
+            <a:normAutofit/>
+          </a:bodyPr>
+          <a:lstStyle/>
+          <a:p>
+            <a:pPr algn="l" indent="0" marL="0">
+              <a:buNone/>
+            </a:pPr>
+            <a:r>
+              <a:rPr lang="en-US" sz="3600" b="1" dirty="0">
+                <a:solidFill>
+                  <a:srgbClr val="78A9FF"/>
+                </a:solidFill>
+                <a:latin typeface="Liberation Mono" pitchFamily="34" charset="0"/>
+                <a:ea typeface="Liberation Mono" pitchFamily="34" charset="-122"/>
+                <a:cs typeface="Liberation Mono" pitchFamily="34" charset="-120"/>
+              </a:rPr>
+              <a:t>67.66</a:t>
+            </a:r>
+            <a:endParaRPr lang="en-US" sz="3600" dirty="0"/>
+          </a:p>
+        </p:txBody>
+      </p:sp>
+      <p:sp>
+        <p:nvSpPr>
+          <p:cNvPr id="8" name="Text 6"/>
+          <p:cNvSpPr/>
+          <p:nvPr/>
+        </p:nvSpPr>
+        <p:spPr>
+          <a:xfrm>
+            <a:off x="3675888" y="2322576"/>
+            <a:ext cx="2743200" cy="310896"/>
+          </a:xfrm>
+          <a:prstGeom prst="rect">
+            <a:avLst/>
+          </a:prstGeom>
+          <a:noFill/>
+          <a:ln/>
+        </p:spPr>
+        <p:txBody>
+          <a:bodyPr wrap="square" lIns="0" tIns="0" rIns="0" bIns="0" rtlCol="0" anchor="t">
+            <a:normAutofit/>
+          </a:bodyPr>
+          <a:lstStyle/>
+          <a:p>
+            <a:pPr algn="l" indent="0" marL="0">
+              <a:buNone/>
+            </a:pPr>
+            <a:r>
+              <a:rPr lang="en-US" sz="1100" dirty="0">
+                <a:solidFill>
+                  <a:srgbClr val="A7ADB5"/>
+                </a:solidFill>
+                <a:latin typeface="Liberation Sans" pitchFamily="34" charset="0"/>
+                <a:ea typeface="Liberation Sans" pitchFamily="34" charset="-122"/>
+                <a:cs typeface="Liberation Sans" pitchFamily="34" charset="-120"/>
+              </a:rPr>
+              <a:t>generation tokens/s · 128 tokens</a:t>
+            </a:r>
+            <a:endParaRPr lang="en-US" sz="1100" dirty="0"/>
+          </a:p>
+        </p:txBody>
+      </p:sp>
+      <p:sp>
+        <p:nvSpPr>
+          <p:cNvPr id="9" name="Text 7"/>
+          <p:cNvSpPr/>
+          <p:nvPr/>
+        </p:nvSpPr>
+        <p:spPr>
+          <a:xfrm>
+            <a:off x="6693408" y="1664208"/>
+            <a:ext cx="2468880" cy="658368"/>
+          </a:xfrm>
+          <a:prstGeom prst="rect">
+            <a:avLst/>
+          </a:prstGeom>
+          <a:noFill/>
+          <a:ln/>
+        </p:spPr>
+        <p:txBody>
+          <a:bodyPr wrap="square" lIns="0" tIns="0" rIns="0" bIns="0" rtlCol="0" anchor="ctr">
+            <a:normAutofit/>
+          </a:bodyPr>
+          <a:lstStyle/>
+          <a:p>
+            <a:pPr algn="l" indent="0" marL="0">
+              <a:buNone/>
+            </a:pPr>
+            <a:r>
+              <a:rPr lang="en-US" sz="3600" b="1" dirty="0">
+                <a:solidFill>
+                  <a:srgbClr val="42BE65"/>
+                </a:solidFill>
+                <a:latin typeface="Liberation Mono" pitchFamily="34" charset="0"/>
+                <a:ea typeface="Liberation Mono" pitchFamily="34" charset="-122"/>
+                <a:cs typeface="Liberation Mono" pitchFamily="34" charset="-120"/>
+              </a:rPr>
+              <a:t>19.9692 s</a:t>
+            </a:r>
+            <a:endParaRPr lang="en-US" sz="3600" dirty="0"/>
+          </a:p>
+        </p:txBody>
+      </p:sp>
+      <p:sp>
+        <p:nvSpPr>
+          <p:cNvPr id="10" name="Text 8"/>
+          <p:cNvSpPr/>
+          <p:nvPr/>
+        </p:nvSpPr>
+        <p:spPr>
+          <a:xfrm>
+            <a:off x="6693408" y="2322576"/>
+            <a:ext cx="2468880" cy="310896"/>
+          </a:xfrm>
+          <a:prstGeom prst="rect">
+            <a:avLst/>
+          </a:prstGeom>
+          <a:noFill/>
+          <a:ln/>
+        </p:spPr>
+        <p:txBody>
+          <a:bodyPr wrap="square" lIns="0" tIns="0" rIns="0" bIns="0" rtlCol="0" anchor="t">
+            <a:normAutofit/>
+          </a:bodyPr>
+          <a:lstStyle/>
+          <a:p>
+            <a:pPr algn="l" indent="0" marL="0">
+              <a:buNone/>
+            </a:pPr>
+            <a:r>
+              <a:rPr lang="en-US" sz="1100" dirty="0">
+                <a:solidFill>
+                  <a:srgbClr val="A7ADB5"/>
+                </a:solidFill>
+                <a:latin typeface="Liberation Sans" pitchFamily="34" charset="0"/>
+                <a:ea typeface="Liberation Sans" pitchFamily="34" charset="-122"/>
+                <a:cs typeface="Liberation Sans" pitchFamily="34" charset="-120"/>
+              </a:rPr>
+              <a:t>AMD v0.3 LLM pipeline</a:t>
+            </a:r>
+            <a:endParaRPr lang="en-US" sz="1100" dirty="0"/>
+          </a:p>
+        </p:txBody>
+      </p:sp>
+      <p:sp>
+        <p:nvSpPr>
+          <p:cNvPr id="11" name="Text 9"/>
+          <p:cNvSpPr/>
+          <p:nvPr/>
+        </p:nvSpPr>
+        <p:spPr>
+          <a:xfrm>
+            <a:off x="9528048" y="1664208"/>
+            <a:ext cx="1920240" cy="658368"/>
+          </a:xfrm>
+          <a:prstGeom prst="rect">
+            <a:avLst/>
+          </a:prstGeom>
+          <a:noFill/>
+          <a:ln/>
+        </p:spPr>
+        <p:txBody>
+          <a:bodyPr wrap="square" lIns="0" tIns="0" rIns="0" bIns="0" rtlCol="0" anchor="ctr">
+            <a:normAutofit/>
+          </a:bodyPr>
+          <a:lstStyle/>
+          <a:p>
+            <a:pPr algn="l" indent="0" marL="0">
+              <a:buNone/>
+            </a:pPr>
+            <a:r>
+              <a:rPr lang="en-US" sz="3600" b="1" dirty="0">
+                <a:solidFill>
+                  <a:srgbClr val="BE95FF"/>
+                </a:solidFill>
+                <a:latin typeface="Liberation Mono" pitchFamily="34" charset="0"/>
+                <a:ea typeface="Liberation Mono" pitchFamily="34" charset="-122"/>
+                <a:cs typeface="Liberation Mono" pitchFamily="34" charset="-120"/>
+              </a:rPr>
+              <a:t>8.86 GiB</a:t>
+            </a:r>
+            <a:endParaRPr lang="en-US" sz="3600" dirty="0"/>
+          </a:p>
+        </p:txBody>
+      </p:sp>
+      <p:sp>
+        <p:nvSpPr>
+          <p:cNvPr id="12" name="Text 10"/>
+          <p:cNvSpPr/>
+          <p:nvPr/>
+        </p:nvSpPr>
+        <p:spPr>
+          <a:xfrm>
+            <a:off x="9528048" y="2322576"/>
+            <a:ext cx="1920240" cy="310896"/>
+          </a:xfrm>
+          <a:prstGeom prst="rect">
+            <a:avLst/>
+          </a:prstGeom>
+          <a:noFill/>
+          <a:ln/>
+        </p:spPr>
+        <p:txBody>
+          <a:bodyPr wrap="square" lIns="0" tIns="0" rIns="0" bIns="0" rtlCol="0" anchor="t">
+            <a:normAutofit/>
+          </a:bodyPr>
+          <a:lstStyle/>
+          <a:p>
+            <a:pPr algn="l" indent="0" marL="0">
+              <a:buNone/>
+            </a:pPr>
+            <a:r>
+              <a:rPr lang="en-US" sz="1100" dirty="0">
+                <a:solidFill>
+                  <a:srgbClr val="A7ADB5"/>
+                </a:solidFill>
+                <a:latin typeface="Liberation Sans" pitchFamily="34" charset="0"/>
+                <a:ea typeface="Liberation Sans" pitchFamily="34" charset="-122"/>
+                <a:cs typeface="Liberation Sans" pitchFamily="34" charset="-120"/>
+              </a:rPr>
+              <a:t>Q8 model size</a:t>
+            </a:r>
+            <a:endParaRPr lang="en-US" sz="1100" dirty="0"/>
+          </a:p>
+        </p:txBody>
+      </p:sp>
+      <p:sp>
+        <p:nvSpPr>
+          <p:cNvPr id="13" name="Text 11"/>
+          <p:cNvSpPr/>
+          <p:nvPr/>
+        </p:nvSpPr>
+        <p:spPr>
+          <a:xfrm>
+            <a:off x="777240" y="3127248"/>
+            <a:ext cx="1234440" cy="292608"/>
+          </a:xfrm>
+          <a:prstGeom prst="rect">
+            <a:avLst/>
+          </a:prstGeom>
+          <a:noFill/>
+          <a:ln/>
+        </p:spPr>
+        <p:txBody>
+          <a:bodyPr wrap="square" lIns="0" tIns="0" rIns="0" bIns="0" rtlCol="0" anchor="ctr">
+            <a:normAutofit/>
+          </a:bodyPr>
+          <a:lstStyle/>
+          <a:p>
+            <a:pPr algn="l" indent="0" marL="0">
+              <a:buNone/>
+            </a:pPr>
+            <a:r>
+              <a:rPr lang="en-US" sz="1100" dirty="0">
+                <a:solidFill>
+                  <a:srgbClr val="A7ADB5"/>
+                </a:solidFill>
+                <a:latin typeface="Liberation Mono" pitchFamily="34" charset="0"/>
+                <a:ea typeface="Liberation Mono" pitchFamily="34" charset="-122"/>
+                <a:cs typeface="Liberation Mono" pitchFamily="34" charset="-120"/>
+              </a:rPr>
+              <a:t>GPU</a:t>
+            </a:r>
+            <a:endParaRPr lang="en-US" sz="1100" dirty="0"/>
+          </a:p>
+        </p:txBody>
+      </p:sp>
+      <p:sp>
+        <p:nvSpPr>
+          <p:cNvPr id="14" name="Text 12"/>
+          <p:cNvSpPr/>
+          <p:nvPr/>
+        </p:nvSpPr>
+        <p:spPr>
+          <a:xfrm>
+            <a:off x="2057400" y="3127248"/>
+            <a:ext cx="4251960" cy="292608"/>
+          </a:xfrm>
+          <a:prstGeom prst="rect">
+            <a:avLst/>
+          </a:prstGeom>
+          <a:noFill/>
+          <a:ln/>
+        </p:spPr>
+        <p:txBody>
+          <a:bodyPr wrap="square" lIns="0" tIns="0" rIns="0" bIns="0" rtlCol="0" anchor="ctr">
+            <a:normAutofit/>
+          </a:bodyPr>
+          <a:lstStyle/>
+          <a:p>
+            <a:pPr algn="l" indent="0" marL="0">
+              <a:buNone/>
+            </a:pPr>
+            <a:r>
+              <a:rPr lang="en-US" sz="1200" b="1" dirty="0">
+                <a:solidFill>
+                  <a:srgbClr val="F5F7FA"/>
+                </a:solidFill>
+                <a:latin typeface="Liberation Sans" pitchFamily="34" charset="0"/>
+                <a:ea typeface="Liberation Sans" pitchFamily="34" charset="-122"/>
+                <a:cs typeface="Liberation Sans" pitchFamily="34" charset="-120"/>
+              </a:rPr>
+              <a:t>AMD Radeon Graphics · gfx1100</a:t>
+            </a:r>
+            <a:endParaRPr lang="en-US" sz="1200" dirty="0"/>
+          </a:p>
+        </p:txBody>
+      </p:sp>
+      <p:sp>
+        <p:nvSpPr>
+          <p:cNvPr id="15" name="Text 13"/>
+          <p:cNvSpPr/>
+          <p:nvPr/>
+        </p:nvSpPr>
+        <p:spPr>
+          <a:xfrm>
+            <a:off x="777240" y="3566160"/>
+            <a:ext cx="1234440" cy="292608"/>
+          </a:xfrm>
+          <a:prstGeom prst="rect">
+            <a:avLst/>
+          </a:prstGeom>
+          <a:noFill/>
+          <a:ln/>
+        </p:spPr>
+        <p:txBody>
+          <a:bodyPr wrap="square" lIns="0" tIns="0" rIns="0" bIns="0" rtlCol="0" anchor="ctr">
+            <a:normAutofit/>
+          </a:bodyPr>
+          <a:lstStyle/>
+          <a:p>
+            <a:pPr algn="l" indent="0" marL="0">
+              <a:buNone/>
+            </a:pPr>
+            <a:r>
+              <a:rPr lang="en-US" sz="1100" dirty="0">
+                <a:solidFill>
+                  <a:srgbClr val="A7ADB5"/>
+                </a:solidFill>
+                <a:latin typeface="Liberation Mono" pitchFamily="34" charset="0"/>
+                <a:ea typeface="Liberation Mono" pitchFamily="34" charset="-122"/>
+                <a:cs typeface="Liberation Mono" pitchFamily="34" charset="-120"/>
+              </a:rPr>
+              <a:t>Stack</a:t>
+            </a:r>
+            <a:endParaRPr lang="en-US" sz="1100" dirty="0"/>
+          </a:p>
+        </p:txBody>
+      </p:sp>
+      <p:sp>
+        <p:nvSpPr>
+          <p:cNvPr id="16" name="Text 14"/>
+          <p:cNvSpPr/>
+          <p:nvPr/>
+        </p:nvSpPr>
+        <p:spPr>
+          <a:xfrm>
+            <a:off x="2057400" y="3566160"/>
+            <a:ext cx="4251960" cy="292608"/>
+          </a:xfrm>
+          <a:prstGeom prst="rect">
+            <a:avLst/>
+          </a:prstGeom>
+          <a:noFill/>
+          <a:ln/>
+        </p:spPr>
+        <p:txBody>
+          <a:bodyPr wrap="square" lIns="0" tIns="0" rIns="0" bIns="0" rtlCol="0" anchor="ctr">
+            <a:normAutofit/>
+          </a:bodyPr>
+          <a:lstStyle/>
+          <a:p>
+            <a:pPr algn="l" indent="0" marL="0">
+              <a:buNone/>
+            </a:pPr>
+            <a:r>
+              <a:rPr lang="en-US" sz="1200" b="1" dirty="0">
+                <a:solidFill>
+                  <a:srgbClr val="F5F7FA"/>
+                </a:solidFill>
+                <a:latin typeface="Liberation Sans" pitchFamily="34" charset="0"/>
+                <a:ea typeface="Liberation Sans" pitchFamily="34" charset="-122"/>
+                <a:cs typeface="Liberation Sans" pitchFamily="34" charset="-120"/>
+              </a:rPr>
+              <a:t>ROCm 7.2.1 · llama.cpp HIP Release</a:t>
+            </a:r>
+            <a:endParaRPr lang="en-US" sz="1200" dirty="0"/>
+          </a:p>
+        </p:txBody>
+      </p:sp>
+      <p:sp>
+        <p:nvSpPr>
+          <p:cNvPr id="17" name="Text 15"/>
+          <p:cNvSpPr/>
+          <p:nvPr/>
+        </p:nvSpPr>
+        <p:spPr>
+          <a:xfrm>
+            <a:off x="777240" y="4005072"/>
+            <a:ext cx="1234440" cy="292608"/>
+          </a:xfrm>
+          <a:prstGeom prst="rect">
+            <a:avLst/>
+          </a:prstGeom>
+          <a:noFill/>
+          <a:ln/>
+        </p:spPr>
+        <p:txBody>
+          <a:bodyPr wrap="square" lIns="0" tIns="0" rIns="0" bIns="0" rtlCol="0" anchor="ctr">
+            <a:normAutofit/>
+          </a:bodyPr>
+          <a:lstStyle/>
+          <a:p>
+            <a:pPr algn="l" indent="0" marL="0">
+              <a:buNone/>
+            </a:pPr>
+            <a:r>
+              <a:rPr lang="en-US" sz="1100" dirty="0">
+                <a:solidFill>
+                  <a:srgbClr val="A7ADB5"/>
+                </a:solidFill>
+                <a:latin typeface="Liberation Mono" pitchFamily="34" charset="0"/>
+                <a:ea typeface="Liberation Mono" pitchFamily="34" charset="-122"/>
+                <a:cs typeface="Liberation Mono" pitchFamily="34" charset="-120"/>
+              </a:rPr>
+              <a:t>Offload</a:t>
+            </a:r>
+            <a:endParaRPr lang="en-US" sz="1100" dirty="0"/>
+          </a:p>
+        </p:txBody>
+      </p:sp>
+      <p:sp>
+        <p:nvSpPr>
+          <p:cNvPr id="18" name="Text 16"/>
+          <p:cNvSpPr/>
+          <p:nvPr/>
+        </p:nvSpPr>
+        <p:spPr>
+          <a:xfrm>
+            <a:off x="2057400" y="4005072"/>
+            <a:ext cx="4251960" cy="292608"/>
+          </a:xfrm>
+          <a:prstGeom prst="rect">
+            <a:avLst/>
+          </a:prstGeom>
+          <a:noFill/>
+          <a:ln/>
+        </p:spPr>
+        <p:txBody>
+          <a:bodyPr wrap="square" lIns="0" tIns="0" rIns="0" bIns="0" rtlCol="0" anchor="ctr">
+            <a:normAutofit/>
+          </a:bodyPr>
+          <a:lstStyle/>
+          <a:p>
+            <a:pPr algn="l" indent="0" marL="0">
+              <a:buNone/>
+            </a:pPr>
+            <a:r>
+              <a:rPr lang="en-US" sz="1200" b="1" dirty="0">
+                <a:solidFill>
+                  <a:srgbClr val="F5F7FA"/>
+                </a:solidFill>
+                <a:latin typeface="Liberation Sans" pitchFamily="34" charset="0"/>
+                <a:ea typeface="Liberation Sans" pitchFamily="34" charset="-122"/>
+                <a:cs typeface="Liberation Sans" pitchFamily="34" charset="-120"/>
+              </a:rPr>
+              <a:t>-ngl 99 · all model layers</a:t>
+            </a:r>
+            <a:endParaRPr lang="en-US" sz="1200" dirty="0"/>
+          </a:p>
+        </p:txBody>
+      </p:sp>
+      <p:sp>
+        <p:nvSpPr>
+          <p:cNvPr id="19" name="Text 17"/>
+          <p:cNvSpPr/>
+          <p:nvPr/>
+        </p:nvSpPr>
+        <p:spPr>
+          <a:xfrm>
+            <a:off x="777240" y="4443984"/>
+            <a:ext cx="1234440" cy="292608"/>
+          </a:xfrm>
+          <a:prstGeom prst="rect">
+            <a:avLst/>
+          </a:prstGeom>
+          <a:noFill/>
+          <a:ln/>
+        </p:spPr>
+        <p:txBody>
+          <a:bodyPr wrap="square" lIns="0" tIns="0" rIns="0" bIns="0" rtlCol="0" anchor="ctr">
+            <a:normAutofit/>
+          </a:bodyPr>
+          <a:lstStyle/>
+          <a:p>
+            <a:pPr algn="l" indent="0" marL="0">
+              <a:buNone/>
+            </a:pPr>
+            <a:r>
+              <a:rPr lang="en-US" sz="1100" dirty="0">
+                <a:solidFill>
+                  <a:srgbClr val="A7ADB5"/>
+                </a:solidFill>
+                <a:latin typeface="Liberation Mono" pitchFamily="34" charset="0"/>
+                <a:ea typeface="Liberation Mono" pitchFamily="34" charset="-122"/>
+                <a:cs typeface="Liberation Mono" pitchFamily="34" charset="-120"/>
+              </a:rPr>
+              <a:t>Context</a:t>
+            </a:r>
+            <a:endParaRPr lang="en-US" sz="1100" dirty="0"/>
+          </a:p>
+        </p:txBody>
+      </p:sp>
+      <p:sp>
+        <p:nvSpPr>
+          <p:cNvPr id="20" name="Text 18"/>
+          <p:cNvSpPr/>
+          <p:nvPr/>
+        </p:nvSpPr>
+        <p:spPr>
+          <a:xfrm>
+            <a:off x="2057400" y="4443984"/>
+            <a:ext cx="4251960" cy="292608"/>
+          </a:xfrm>
+          <a:prstGeom prst="rect">
+            <a:avLst/>
+          </a:prstGeom>
+          <a:noFill/>
+          <a:ln/>
+        </p:spPr>
+        <p:txBody>
+          <a:bodyPr wrap="square" lIns="0" tIns="0" rIns="0" bIns="0" rtlCol="0" anchor="ctr">
+            <a:normAutofit/>
+          </a:bodyPr>
+          <a:lstStyle/>
+          <a:p>
+            <a:pPr algn="l" indent="0" marL="0">
+              <a:buNone/>
+            </a:pPr>
+            <a:r>
+              <a:rPr lang="en-US" sz="1200" b="1" dirty="0">
+                <a:solidFill>
+                  <a:srgbClr val="F5F7FA"/>
+                </a:solidFill>
+                <a:latin typeface="Liberation Sans" pitchFamily="34" charset="0"/>
+                <a:ea typeface="Liberation Sans" pitchFamily="34" charset="-122"/>
+                <a:cs typeface="Liberation Sans" pitchFamily="34" charset="-120"/>
+              </a:rPr>
+              <a:t>8192 tokens · reasoning off</a:t>
+            </a:r>
+            <a:endParaRPr lang="en-US" sz="1200" dirty="0"/>
+          </a:p>
+        </p:txBody>
+      </p:sp>
+      <p:sp>
+        <p:nvSpPr>
+          <p:cNvPr id="21" name="Text 19"/>
+          <p:cNvSpPr/>
+          <p:nvPr/>
+        </p:nvSpPr>
+        <p:spPr>
+          <a:xfrm>
+            <a:off x="777240" y="4882896"/>
+            <a:ext cx="1234440" cy="292608"/>
+          </a:xfrm>
+          <a:prstGeom prst="rect">
+            <a:avLst/>
+          </a:prstGeom>
+          <a:noFill/>
+          <a:ln/>
+        </p:spPr>
+        <p:txBody>
+          <a:bodyPr wrap="square" lIns="0" tIns="0" rIns="0" bIns="0" rtlCol="0" anchor="ctr">
+            <a:normAutofit/>
+          </a:bodyPr>
+          <a:lstStyle/>
+          <a:p>
+            <a:pPr algn="l" indent="0" marL="0">
+              <a:buNone/>
+            </a:pPr>
+            <a:r>
+              <a:rPr lang="en-US" sz="1100" dirty="0">
+                <a:solidFill>
+                  <a:srgbClr val="A7ADB5"/>
+                </a:solidFill>
+                <a:latin typeface="Liberation Mono" pitchFamily="34" charset="0"/>
+                <a:ea typeface="Liberation Mono" pitchFamily="34" charset="-122"/>
+                <a:cs typeface="Liberation Mono" pitchFamily="34" charset="-120"/>
+              </a:rPr>
+              <a:t>Network</a:t>
+            </a:r>
+            <a:endParaRPr lang="en-US" sz="1100" dirty="0"/>
+          </a:p>
+        </p:txBody>
+      </p:sp>
+      <p:sp>
+        <p:nvSpPr>
+          <p:cNvPr id="22" name="Text 20"/>
+          <p:cNvSpPr/>
+          <p:nvPr/>
+        </p:nvSpPr>
+        <p:spPr>
+          <a:xfrm>
+            <a:off x="2057400" y="4882896"/>
+            <a:ext cx="4251960" cy="292608"/>
+          </a:xfrm>
+          <a:prstGeom prst="rect">
+            <a:avLst/>
+          </a:prstGeom>
+          <a:noFill/>
+          <a:ln/>
+        </p:spPr>
+        <p:txBody>
+          <a:bodyPr wrap="square" lIns="0" tIns="0" rIns="0" bIns="0" rtlCol="0" anchor="ctr">
+            <a:normAutofit/>
+          </a:bodyPr>
+          <a:lstStyle/>
+          <a:p>
+            <a:pPr algn="l" indent="0" marL="0">
+              <a:buNone/>
+            </a:pPr>
+            <a:r>
+              <a:rPr lang="en-US" sz="1200" b="1" dirty="0">
+                <a:solidFill>
+                  <a:srgbClr val="F5F7FA"/>
+                </a:solidFill>
+                <a:latin typeface="Liberation Sans" pitchFamily="34" charset="0"/>
+                <a:ea typeface="Liberation Sans" pitchFamily="34" charset="-122"/>
+                <a:cs typeface="Liberation Sans" pitchFamily="34" charset="-120"/>
+              </a:rPr>
+              <a:t>127.0.0.1:8000 only</a:t>
+            </a:r>
+            <a:endParaRPr lang="en-US" sz="1200" dirty="0"/>
+          </a:p>
+        </p:txBody>
+      </p:sp>
+      <p:sp>
+        <p:nvSpPr>
+          <p:cNvPr id="23" name="Text 21"/>
+          <p:cNvSpPr/>
+          <p:nvPr/>
+        </p:nvSpPr>
+        <p:spPr>
+          <a:xfrm>
+            <a:off x="777240" y="5321808"/>
+            <a:ext cx="1234440" cy="292608"/>
+          </a:xfrm>
+          <a:prstGeom prst="rect">
+            <a:avLst/>
+          </a:prstGeom>
+          <a:noFill/>
+          <a:ln/>
+        </p:spPr>
+        <p:txBody>
+          <a:bodyPr wrap="square" lIns="0" tIns="0" rIns="0" bIns="0" rtlCol="0" anchor="ctr">
+            <a:normAutofit/>
+          </a:bodyPr>
+          <a:lstStyle/>
+          <a:p>
+            <a:pPr algn="l" indent="0" marL="0">
+              <a:buNone/>
+            </a:pPr>
+            <a:r>
+              <a:rPr lang="en-US" sz="1100" dirty="0">
+                <a:solidFill>
+                  <a:srgbClr val="A7ADB5"/>
+                </a:solidFill>
+                <a:latin typeface="Liberation Mono" pitchFamily="34" charset="0"/>
+                <a:ea typeface="Liberation Mono" pitchFamily="34" charset="-122"/>
+                <a:cs typeface="Liberation Mono" pitchFamily="34" charset="-120"/>
+              </a:rPr>
+              <a:t>Integrity</a:t>
+            </a:r>
+            <a:endParaRPr lang="en-US" sz="1100" dirty="0"/>
+          </a:p>
+        </p:txBody>
+      </p:sp>
+      <p:sp>
+        <p:nvSpPr>
+          <p:cNvPr id="24" name="Text 22"/>
+          <p:cNvSpPr/>
+          <p:nvPr/>
+        </p:nvSpPr>
+        <p:spPr>
+          <a:xfrm>
+            <a:off x="2057400" y="5321808"/>
+            <a:ext cx="4251960" cy="292608"/>
+          </a:xfrm>
+          <a:prstGeom prst="rect">
+            <a:avLst/>
+          </a:prstGeom>
+          <a:noFill/>
+          <a:ln/>
+        </p:spPr>
+        <p:txBody>
+          <a:bodyPr wrap="square" lIns="0" tIns="0" rIns="0" bIns="0" rtlCol="0" anchor="ctr">
+            <a:normAutofit/>
+          </a:bodyPr>
+          <a:lstStyle/>
+          <a:p>
+            <a:pPr algn="l" indent="0" marL="0">
+              <a:buNone/>
+            </a:pPr>
+            <a:r>
+              <a:rPr lang="en-US" sz="1200" b="1" dirty="0">
+                <a:solidFill>
+                  <a:srgbClr val="F5F7FA"/>
+                </a:solidFill>
+                <a:latin typeface="Liberation Sans" pitchFamily="34" charset="0"/>
+                <a:ea typeface="Liberation Sans" pitchFamily="34" charset="-122"/>
+                <a:cs typeface="Liberation Sans" pitchFamily="34" charset="-120"/>
+              </a:rPr>
+              <a:t>SHA-256 verified model file</a:t>
+            </a:r>
+            <a:endParaRPr lang="en-US" sz="1200" dirty="0"/>
+          </a:p>
+        </p:txBody>
+      </p:sp>
+      <p:sp>
+        <p:nvSpPr>
+          <p:cNvPr id="25" name="Shape 23"/>
+          <p:cNvSpPr/>
+          <p:nvPr/>
+        </p:nvSpPr>
+        <p:spPr>
+          <a:xfrm>
+            <a:off x="6720840" y="3063240"/>
+            <a:ext cx="4754880" cy="2542032"/>
           </a:xfrm>
           <a:prstGeom prst="rect">
             <a:avLst/>
@@ -7176,152 +8885,123 @@
       </p:sp>
       <p:sp>
         <p:nvSpPr>
-          <p:cNvPr id="7" name="Shape 4"/>
-          <p:cNvSpPr/>
-          <p:nvPr/>
-        </p:nvSpPr>
-        <p:spPr>
-          <a:xfrm>
-            <a:off x="8613648" y="1572768"/>
-            <a:ext cx="73152" cy="1234440"/>
-          </a:xfrm>
-          <a:prstGeom prst="rect">
-            <a:avLst/>
+          <p:cNvPr id="26" name="Text 24"/>
+          <p:cNvSpPr/>
+          <p:nvPr/>
+        </p:nvSpPr>
+        <p:spPr>
+          <a:xfrm>
+            <a:off x="7059168" y="3474720"/>
+            <a:ext cx="4069080" cy="493776"/>
+          </a:xfrm>
+          <a:prstGeom prst="rect">
+            <a:avLst/>
+          </a:prstGeom>
+          <a:noFill/>
+          <a:ln/>
+        </p:spPr>
+        <p:txBody>
+          <a:bodyPr wrap="square" lIns="0" tIns="0" rIns="0" bIns="0" rtlCol="0" anchor="ctr">
+            <a:normAutofit/>
+          </a:bodyPr>
+          <a:lstStyle/>
+          <a:p>
+            <a:pPr algn="ctr" indent="0" marL="0">
+              <a:buNone/>
+            </a:pPr>
+            <a:r>
+              <a:rPr lang="en-US" sz="2400" b="1" dirty="0">
+                <a:solidFill>
+                  <a:srgbClr val="42BE65"/>
+                </a:solidFill>
+                <a:latin typeface="Liberation Mono" pitchFamily="34" charset="0"/>
+                <a:ea typeface="Liberation Mono" pitchFamily="34" charset="-122"/>
+                <a:cs typeface="Liberation Mono" pitchFamily="34" charset="-120"/>
+              </a:rPr>
+              <a:t>OFFLINE  ≡  LLM-PLANNED</a:t>
+            </a:r>
+            <a:endParaRPr lang="en-US" sz="2400" dirty="0"/>
+          </a:p>
+        </p:txBody>
+      </p:sp>
+      <p:sp>
+        <p:nvSpPr>
+          <p:cNvPr id="27" name="Text 25"/>
+          <p:cNvSpPr/>
+          <p:nvPr/>
+        </p:nvSpPr>
+        <p:spPr>
+          <a:xfrm>
+            <a:off x="7333488" y="4224528"/>
+            <a:ext cx="3520440" cy="749808"/>
+          </a:xfrm>
+          <a:prstGeom prst="rect">
+            <a:avLst/>
+          </a:prstGeom>
+          <a:noFill/>
+          <a:ln/>
+        </p:spPr>
+        <p:txBody>
+          <a:bodyPr wrap="square" lIns="0" tIns="0" rIns="0" bIns="0" rtlCol="0" anchor="t">
+            <a:normAutofit/>
+          </a:bodyPr>
+          <a:lstStyle/>
+          <a:p>
+            <a:pPr algn="ctr" indent="0" marL="0">
+              <a:buNone/>
+            </a:pPr>
+            <a:r>
+              <a:rPr lang="en-US" sz="1700" dirty="0">
+                <a:solidFill>
+                  <a:srgbClr val="F5F7FA"/>
+                </a:solidFill>
+                <a:latin typeface="Liberation Sans" pitchFamily="34" charset="0"/>
+                <a:ea typeface="Liberation Sans" pitchFamily="34" charset="-122"/>
+                <a:cs typeface="Liberation Sans" pitchFamily="34" charset="-120"/>
+              </a:rPr>
+              <a:t>Identical physical runs</a:t>
+            </a:r>
+            <a:endParaRPr lang="en-US" sz="1700" dirty="0"/>
+          </a:p>
+          <a:p>
+            <a:pPr algn="ctr" indent="0" marL="0">
+              <a:buNone/>
+            </a:pPr>
+            <a:r>
+              <a:rPr lang="en-US" sz="1700" dirty="0">
+                <a:solidFill>
+                  <a:srgbClr val="F5F7FA"/>
+                </a:solidFill>
+                <a:latin typeface="Liberation Sans" pitchFamily="34" charset="0"/>
+                <a:ea typeface="Liberation Sans" pitchFamily="34" charset="-122"/>
+                <a:cs typeface="Liberation Sans" pitchFamily="34" charset="-120"/>
+              </a:rPr>
+              <a:t>for the same scenario</a:t>
+            </a:r>
+            <a:endParaRPr lang="en-US" sz="1700" dirty="0"/>
+          </a:p>
+        </p:txBody>
+      </p:sp>
+      <p:sp>
+        <p:nvSpPr>
+          <p:cNvPr id="28" name="Shape 26"/>
+          <p:cNvSpPr/>
+          <p:nvPr/>
+        </p:nvSpPr>
+        <p:spPr>
+          <a:xfrm>
+            <a:off x="8339328" y="5029200"/>
+            <a:ext cx="1527048" cy="292608"/>
+          </a:xfrm>
+          <a:prstGeom prst="roundRect">
+            <a:avLst>
+              <a:gd name="adj" fmla="val 25000"/>
+            </a:avLst>
           </a:prstGeom>
           <a:solidFill>
-            <a:srgbClr val="FF6B00"/>
-          </a:solidFill>
-          <a:ln w="12700">
-            <a:solidFill>
-              <a:srgbClr val="FF6B00"/>
-            </a:solidFill>
-            <a:prstDash val="solid"/>
-          </a:ln>
-        </p:spPr>
-      </p:sp>
-      <p:sp>
-        <p:nvSpPr>
-          <p:cNvPr id="8" name="Text 5"/>
-          <p:cNvSpPr/>
-          <p:nvPr/>
-        </p:nvSpPr>
-        <p:spPr>
-          <a:xfrm>
-            <a:off x="8833104" y="1737360"/>
-            <a:ext cx="2596896" cy="256032"/>
-          </a:xfrm>
-          <a:prstGeom prst="rect">
-            <a:avLst/>
-          </a:prstGeom>
-          <a:noFill/>
-          <a:ln/>
-        </p:spPr>
-        <p:txBody>
-          <a:bodyPr wrap="square" lIns="0" tIns="0" rIns="0" bIns="0" rtlCol="0" anchor="ctr">
-            <a:normAutofit/>
-          </a:bodyPr>
-          <a:lstStyle/>
-          <a:p>
-            <a:pPr algn="l" indent="0" marL="0">
-              <a:buNone/>
-            </a:pPr>
-            <a:r>
-              <a:rPr lang="en-US" sz="1400" b="1" dirty="0">
-                <a:solidFill>
-                  <a:srgbClr val="F5F7FA"/>
-                </a:solidFill>
-                <a:latin typeface="Liberation Sans" pitchFamily="34" charset="0"/>
-                <a:ea typeface="Liberation Sans" pitchFamily="34" charset="-122"/>
-                <a:cs typeface="Liberation Sans" pitchFamily="34" charset="-120"/>
-              </a:rPr>
-              <a:t>Editable physics</a:t>
-            </a:r>
-            <a:endParaRPr lang="en-US" sz="1400" dirty="0"/>
-          </a:p>
-        </p:txBody>
-      </p:sp>
-      <p:sp>
-        <p:nvSpPr>
-          <p:cNvPr id="9" name="Text 6"/>
-          <p:cNvSpPr/>
-          <p:nvPr/>
-        </p:nvSpPr>
-        <p:spPr>
-          <a:xfrm>
-            <a:off x="8833104" y="2075688"/>
-            <a:ext cx="2596896" cy="594360"/>
-          </a:xfrm>
-          <a:prstGeom prst="rect">
-            <a:avLst/>
-          </a:prstGeom>
-          <a:noFill/>
-          <a:ln/>
-        </p:spPr>
-        <p:txBody>
-          <a:bodyPr wrap="square" lIns="0" tIns="0" rIns="0" bIns="0" rtlCol="0" anchor="t">
-            <a:normAutofit/>
-          </a:bodyPr>
-          <a:lstStyle/>
-          <a:p>
-            <a:pPr algn="l" indent="0" marL="0">
-              <a:buNone/>
-            </a:pPr>
-            <a:r>
-              <a:rPr lang="en-US" sz="1150" dirty="0">
-                <a:solidFill>
-                  <a:srgbClr val="A7ADB5"/>
-                </a:solidFill>
-                <a:latin typeface="Liberation Sans" pitchFamily="34" charset="0"/>
-                <a:ea typeface="Liberation Sans" pitchFamily="34" charset="-122"/>
-                <a:cs typeface="Liberation Sans" pitchFamily="34" charset="-120"/>
-              </a:rPr>
-              <a:t>Kd, K+, velocity, porosity, distance and C₀.</a:t>
-            </a:r>
-            <a:endParaRPr lang="en-US" sz="1150" dirty="0"/>
-          </a:p>
-        </p:txBody>
-      </p:sp>
-      <p:sp>
-        <p:nvSpPr>
-          <p:cNvPr id="10" name="Shape 7"/>
-          <p:cNvSpPr/>
-          <p:nvPr/>
-        </p:nvSpPr>
-        <p:spPr>
-          <a:xfrm>
-            <a:off x="8613648" y="2999232"/>
-            <a:ext cx="2944368" cy="1234440"/>
-          </a:xfrm>
-          <a:prstGeom prst="rect">
-            <a:avLst/>
-          </a:prstGeom>
-          <a:solidFill>
-            <a:srgbClr val="15171A"/>
-          </a:solidFill>
-          <a:ln w="12700">
-            <a:solidFill>
-              <a:srgbClr val="363A40"/>
-            </a:solidFill>
-            <a:prstDash val="solid"/>
-          </a:ln>
-        </p:spPr>
-      </p:sp>
-      <p:sp>
-        <p:nvSpPr>
-          <p:cNvPr id="11" name="Shape 8"/>
-          <p:cNvSpPr/>
-          <p:nvPr/>
-        </p:nvSpPr>
-        <p:spPr>
-          <a:xfrm>
-            <a:off x="8613648" y="2999232"/>
-            <a:ext cx="73152" cy="1234440"/>
-          </a:xfrm>
-          <a:prstGeom prst="rect">
-            <a:avLst/>
-          </a:prstGeom>
-          <a:solidFill>
-            <a:srgbClr val="42BE65"/>
+            <a:srgbClr val="42BE65">
+              <a:alpha val="22000"/>
+            </a:srgbClr>
           </a:solidFill>
           <a:ln w="12700">
             <a:solidFill>
@@ -7333,221 +9013,48 @@
       </p:sp>
       <p:sp>
         <p:nvSpPr>
-          <p:cNvPr id="12" name="Text 9"/>
-          <p:cNvSpPr/>
-          <p:nvPr/>
-        </p:nvSpPr>
-        <p:spPr>
-          <a:xfrm>
-            <a:off x="8833104" y="3163824"/>
-            <a:ext cx="2596896" cy="256032"/>
-          </a:xfrm>
-          <a:prstGeom prst="rect">
-            <a:avLst/>
-          </a:prstGeom>
-          <a:noFill/>
-          <a:ln/>
-        </p:spPr>
-        <p:txBody>
-          <a:bodyPr wrap="square" lIns="0" tIns="0" rIns="0" bIns="0" rtlCol="0" anchor="ctr">
-            <a:normAutofit/>
-          </a:bodyPr>
-          <a:lstStyle/>
-          <a:p>
-            <a:pPr algn="l" indent="0" marL="0">
-              <a:buNone/>
-            </a:pPr>
-            <a:r>
-              <a:rPr lang="en-US" sz="1400" b="1" dirty="0">
-                <a:solidFill>
-                  <a:srgbClr val="F5F7FA"/>
-                </a:solidFill>
-                <a:latin typeface="Liberation Sans" pitchFamily="34" charset="0"/>
-                <a:ea typeface="Liberation Sans" pitchFamily="34" charset="-122"/>
-                <a:cs typeface="Liberation Sans" pitchFamily="34" charset="-120"/>
-              </a:rPr>
-              <a:t>Visible agency</a:t>
-            </a:r>
-            <a:endParaRPr lang="en-US" sz="1400" dirty="0"/>
-          </a:p>
-        </p:txBody>
-      </p:sp>
-      <p:sp>
-        <p:nvSpPr>
-          <p:cNvPr id="13" name="Text 10"/>
-          <p:cNvSpPr/>
-          <p:nvPr/>
-        </p:nvSpPr>
-        <p:spPr>
-          <a:xfrm>
-            <a:off x="8833104" y="3502152"/>
-            <a:ext cx="2596896" cy="594360"/>
-          </a:xfrm>
-          <a:prstGeom prst="rect">
-            <a:avLst/>
-          </a:prstGeom>
-          <a:noFill/>
-          <a:ln/>
-        </p:spPr>
-        <p:txBody>
-          <a:bodyPr wrap="square" lIns="0" tIns="0" rIns="0" bIns="0" rtlCol="0" anchor="t">
-            <a:normAutofit/>
-          </a:bodyPr>
-          <a:lstStyle/>
-          <a:p>
-            <a:pPr algn="l" indent="0" marL="0">
-              <a:buNone/>
-            </a:pPr>
-            <a:r>
-              <a:rPr lang="en-US" sz="1150" dirty="0">
-                <a:solidFill>
-                  <a:srgbClr val="A7ADB5"/>
-                </a:solidFill>
-                <a:latin typeface="Liberation Sans" pitchFamily="34" charset="0"/>
-                <a:ea typeface="Liberation Sans" pitchFamily="34" charset="-122"/>
-                <a:cs typeface="Liberation Sans" pitchFamily="34" charset="-120"/>
-              </a:rPr>
-              <a:t>Six completed steps and 5/5 capability badges.</a:t>
-            </a:r>
-            <a:endParaRPr lang="en-US" sz="1150" dirty="0"/>
-          </a:p>
-        </p:txBody>
-      </p:sp>
-      <p:sp>
-        <p:nvSpPr>
-          <p:cNvPr id="14" name="Shape 11"/>
-          <p:cNvSpPr/>
-          <p:nvPr/>
-        </p:nvSpPr>
-        <p:spPr>
-          <a:xfrm>
-            <a:off x="8613648" y="4425696"/>
-            <a:ext cx="2944368" cy="1234440"/>
-          </a:xfrm>
-          <a:prstGeom prst="rect">
-            <a:avLst/>
-          </a:prstGeom>
-          <a:solidFill>
-            <a:srgbClr val="15171A"/>
-          </a:solidFill>
-          <a:ln w="12700">
-            <a:solidFill>
-              <a:srgbClr val="363A40"/>
-            </a:solidFill>
-            <a:prstDash val="solid"/>
-          </a:ln>
-        </p:spPr>
-      </p:sp>
-      <p:sp>
-        <p:nvSpPr>
-          <p:cNvPr id="15" name="Shape 12"/>
-          <p:cNvSpPr/>
-          <p:nvPr/>
-        </p:nvSpPr>
-        <p:spPr>
-          <a:xfrm>
-            <a:off x="8613648" y="4425696"/>
-            <a:ext cx="73152" cy="1234440"/>
-          </a:xfrm>
-          <a:prstGeom prst="rect">
-            <a:avLst/>
-          </a:prstGeom>
-          <a:solidFill>
-            <a:srgbClr val="78A9FF"/>
-          </a:solidFill>
-          <a:ln w="12700">
-            <a:solidFill>
-              <a:srgbClr val="78A9FF"/>
-            </a:solidFill>
-            <a:prstDash val="solid"/>
-          </a:ln>
-        </p:spPr>
-      </p:sp>
-      <p:sp>
-        <p:nvSpPr>
-          <p:cNvPr id="16" name="Text 13"/>
-          <p:cNvSpPr/>
-          <p:nvPr/>
-        </p:nvSpPr>
-        <p:spPr>
-          <a:xfrm>
-            <a:off x="8833104" y="4590288"/>
-            <a:ext cx="2596896" cy="256032"/>
-          </a:xfrm>
-          <a:prstGeom prst="rect">
-            <a:avLst/>
-          </a:prstGeom>
-          <a:noFill/>
-          <a:ln/>
-        </p:spPr>
-        <p:txBody>
-          <a:bodyPr wrap="square" lIns="0" tIns="0" rIns="0" bIns="0" rtlCol="0" anchor="ctr">
-            <a:normAutofit/>
-          </a:bodyPr>
-          <a:lstStyle/>
-          <a:p>
-            <a:pPr algn="l" indent="0" marL="0">
-              <a:buNone/>
-            </a:pPr>
-            <a:r>
-              <a:rPr lang="en-US" sz="1400" b="1" dirty="0">
-                <a:solidFill>
-                  <a:srgbClr val="F5F7FA"/>
-                </a:solidFill>
-                <a:latin typeface="Liberation Sans" pitchFamily="34" charset="0"/>
-                <a:ea typeface="Liberation Sans" pitchFamily="34" charset="-122"/>
-                <a:cs typeface="Liberation Sans" pitchFamily="34" charset="-120"/>
-              </a:rPr>
-              <a:t>Auditable output</a:t>
-            </a:r>
-            <a:endParaRPr lang="en-US" sz="1400" dirty="0"/>
-          </a:p>
-        </p:txBody>
-      </p:sp>
-      <p:sp>
-        <p:nvSpPr>
-          <p:cNvPr id="17" name="Text 14"/>
-          <p:cNvSpPr/>
-          <p:nvPr/>
-        </p:nvSpPr>
-        <p:spPr>
-          <a:xfrm>
-            <a:off x="8833104" y="4928616"/>
-            <a:ext cx="2596896" cy="594360"/>
-          </a:xfrm>
-          <a:prstGeom prst="rect">
-            <a:avLst/>
-          </a:prstGeom>
-          <a:noFill/>
-          <a:ln/>
-        </p:spPr>
-        <p:txBody>
-          <a:bodyPr wrap="square" lIns="0" tIns="0" rIns="0" bIns="0" rtlCol="0" anchor="t">
-            <a:normAutofit/>
-          </a:bodyPr>
-          <a:lstStyle/>
-          <a:p>
-            <a:pPr algn="l" indent="0" marL="0">
-              <a:buNone/>
-            </a:pPr>
-            <a:r>
-              <a:rPr lang="en-US" sz="1150" dirty="0">
-                <a:solidFill>
-                  <a:srgbClr val="A7ADB5"/>
-                </a:solidFill>
-                <a:latin typeface="Liberation Sans" pitchFamily="34" charset="0"/>
-                <a:ea typeface="Liberation Sans" pitchFamily="34" charset="-122"/>
-                <a:cs typeface="Liberation Sans" pitchFamily="34" charset="-120"/>
-              </a:rPr>
-              <a:t>Ten downloadable artifacts plus a checksum manifest.</a:t>
-            </a:r>
-            <a:endParaRPr lang="en-US" sz="1150" dirty="0"/>
-          </a:p>
-        </p:txBody>
-      </p:sp>
-      <p:sp>
-        <p:nvSpPr>
-          <p:cNvPr id="18" name="Text 15"/>
+          <p:cNvPr id="29" name="Text 27"/>
+          <p:cNvSpPr/>
+          <p:nvPr/>
+        </p:nvSpPr>
+        <p:spPr>
+          <a:xfrm>
+            <a:off x="8412480" y="5047488"/>
+            <a:ext cx="1380744" cy="219456"/>
+          </a:xfrm>
+          <a:prstGeom prst="rect">
+            <a:avLst/>
+          </a:prstGeom>
+          <a:noFill/>
+          <a:ln/>
+        </p:spPr>
+        <p:txBody>
+          <a:bodyPr wrap="square" lIns="0" tIns="0" rIns="0" bIns="0" rtlCol="0" anchor="ctr">
+            <a:normAutofit/>
+          </a:bodyPr>
+          <a:lstStyle/>
+          <a:p>
+            <a:pPr algn="ctr" indent="0" marL="0">
+              <a:buNone/>
+            </a:pPr>
+            <a:r>
+              <a:rPr lang="en-US" sz="900" b="1" dirty="0">
+                <a:solidFill>
+                  <a:srgbClr val="42BE65"/>
+                </a:solidFill>
+                <a:latin typeface="Liberation Sans" pitchFamily="34" charset="0"/>
+                <a:ea typeface="Liberation Sans" pitchFamily="34" charset="-122"/>
+                <a:cs typeface="Liberation Sans" pitchFamily="34" charset="-120"/>
+              </a:rPr>
+              <a:t>PHYSICS IDENTICAL</a:t>
+            </a:r>
+            <a:endParaRPr lang="en-US" sz="900" dirty="0"/>
+          </a:p>
+        </p:txBody>
+      </p:sp>
+      <p:sp>
+        <p:nvSpPr>
+          <p:cNvPr id="30" name="Text 28"/>
           <p:cNvSpPr/>
           <p:nvPr/>
         </p:nvSpPr>
@@ -7588,7 +9095,7 @@
       </p:sp>
       <p:sp>
         <p:nvSpPr>
-          <p:cNvPr id="19" name="Text 16"/>
+          <p:cNvPr id="31" name="Text 29"/>
           <p:cNvSpPr/>
           <p:nvPr/>
         </p:nvSpPr>
@@ -7694,7 +9201,7 @@
                 <a:ea typeface="Liberation Sans" pitchFamily="34" charset="-122"/>
                 <a:cs typeface="Liberation Sans" pitchFamily="34" charset="-120"/>
               </a:rPr>
-              <a:t>TRUST LAYER</a:t>
+              <a:t>PRODUCT EXPERIENCE</a:t>
             </a:r>
             <a:endParaRPr lang="en-US" sz="1000" dirty="0"/>
           </a:p>
@@ -7735,7 +9242,7 @@
                 <a:ea typeface="Liberation Sans" pitchFamily="34" charset="-122"/>
                 <a:cs typeface="Liberation Sans" pitchFamily="34" charset="-120"/>
               </a:rPr>
-              <a:t>Uncertainty is declared, classified and reproducible</a:t>
+              <a:t>A technical dashboard, not an AI chat box</a:t>
             </a:r>
             <a:endParaRPr lang="en-US" sz="3000" dirty="0"/>
           </a:p>
@@ -7776,7 +9283,7 @@
                 <a:ea typeface="Liberation Sans" pitchFamily="34" charset="-122"/>
                 <a:cs typeface="Liberation Sans" pitchFamily="34" charset="-120"/>
               </a:rPr>
-              <a:t>The project distinguishes literature evidence from demonstration inputs.</a:t>
+              <a:t>Inputs, workflow, evidence, uncertainty and artifacts remain visible in one place.</a:t>
             </a:r>
             <a:endParaRPr lang="en-US" sz="1300" dirty="0"/>
           </a:p>
@@ -7784,7 +9291,7 @@
       </p:sp>
       <p:pic>
         <p:nvPicPr>
-          <p:cNvPr id="5" name="Image 0" descr="NuclidePath uncertainty dashboard">    </p:cNvPr>
+          <p:cNvPr id="5" name="Image 0" descr="NuclidePath dashboard overview">    </p:cNvPr>
           <p:cNvPicPr>
             <a:picLocks noChangeAspect="1"/>
           </p:cNvPicPr>
@@ -7798,8 +9305,8 @@
         </p:blipFill>
         <p:spPr>
           <a:xfrm>
-            <a:off x="658368" y="1536192"/>
-            <a:ext cx="6995160" cy="4379976"/>
+            <a:off x="658368" y="1554480"/>
+            <a:ext cx="7635240" cy="4709160"/>
           </a:xfrm>
           <a:prstGeom prst="rect">
             <a:avLst/>
@@ -7814,8 +9321,8 @@
         </p:nvSpPr>
         <p:spPr>
           <a:xfrm>
-            <a:off x="7955280" y="1572768"/>
-            <a:ext cx="3611880" cy="1234440"/>
+            <a:off x="8613648" y="1572768"/>
+            <a:ext cx="2944368" cy="1234440"/>
           </a:xfrm>
           <a:prstGeom prst="rect">
             <a:avLst/>
@@ -7839,18 +9346,18 @@
         </p:nvSpPr>
         <p:spPr>
           <a:xfrm>
-            <a:off x="7955280" y="1572768"/>
+            <a:off x="8613648" y="1572768"/>
             <a:ext cx="73152" cy="1234440"/>
           </a:xfrm>
           <a:prstGeom prst="rect">
             <a:avLst/>
           </a:prstGeom>
           <a:solidFill>
-            <a:srgbClr val="BE95FF"/>
+            <a:srgbClr val="FF6B00"/>
           </a:solidFill>
           <a:ln w="12700">
             <a:solidFill>
-              <a:srgbClr val="BE95FF"/>
+              <a:srgbClr val="FF6B00"/>
             </a:solidFill>
             <a:prstDash val="solid"/>
           </a:ln>
@@ -7864,8 +9371,8 @@
         </p:nvSpPr>
         <p:spPr>
           <a:xfrm>
-            <a:off x="8174736" y="1737360"/>
-            <a:ext cx="3264408" cy="256032"/>
+            <a:off x="8833104" y="1737360"/>
+            <a:ext cx="2596896" cy="256032"/>
           </a:xfrm>
           <a:prstGeom prst="rect">
             <a:avLst/>
@@ -7891,7 +9398,7 @@
                 <a:ea typeface="Liberation Sans" pitchFamily="34" charset="-122"/>
                 <a:cs typeface="Liberation Sans" pitchFamily="34" charset="-120"/>
               </a:rPr>
-              <a:t>Literature-informed range</a:t>
+              <a:t>Editable physics</a:t>
             </a:r>
             <a:endParaRPr lang="en-US" sz="1400" dirty="0"/>
           </a:p>
@@ -7905,8 +9412,8 @@
         </p:nvSpPr>
         <p:spPr>
           <a:xfrm>
-            <a:off x="8174736" y="2075688"/>
-            <a:ext cx="3264408" cy="594360"/>
+            <a:off x="8833104" y="2075688"/>
+            <a:ext cx="2596896" cy="594360"/>
           </a:xfrm>
           <a:prstGeom prst="rect">
             <a:avLst/>
@@ -7932,7 +9439,7 @@
                 <a:ea typeface="Liberation Sans" pitchFamily="34" charset="-122"/>
                 <a:cs typeface="Liberation Sans" pitchFamily="34" charset="-120"/>
               </a:rPr>
-              <a:t>Cs Kd: 0.05–5.0 m³/kg · IAEA TECDOC-2095</a:t>
+              <a:t>Kd, K+, velocity, porosity, distance and C₀.</a:t>
             </a:r>
             <a:endParaRPr lang="en-US" sz="1150" dirty="0"/>
           </a:p>
@@ -7946,8 +9453,8 @@
         </p:nvSpPr>
         <p:spPr>
           <a:xfrm>
-            <a:off x="7955280" y="2999232"/>
-            <a:ext cx="3611880" cy="1234440"/>
+            <a:off x="8613648" y="2999232"/>
+            <a:ext cx="2944368" cy="1234440"/>
           </a:xfrm>
           <a:prstGeom prst="rect">
             <a:avLst/>
@@ -7971,18 +9478,18 @@
         </p:nvSpPr>
         <p:spPr>
           <a:xfrm>
-            <a:off x="7955280" y="2999232"/>
+            <a:off x="8613648" y="2999232"/>
             <a:ext cx="73152" cy="1234440"/>
           </a:xfrm>
           <a:prstGeom prst="rect">
             <a:avLst/>
           </a:prstGeom>
           <a:solidFill>
-            <a:srgbClr val="F1C21B"/>
+            <a:srgbClr val="42BE65"/>
           </a:solidFill>
           <a:ln w="12700">
             <a:solidFill>
-              <a:srgbClr val="F1C21B"/>
+              <a:srgbClr val="42BE65"/>
             </a:solidFill>
             <a:prstDash val="solid"/>
           </a:ln>
@@ -7996,8 +9503,8 @@
         </p:nvSpPr>
         <p:spPr>
           <a:xfrm>
-            <a:off x="8174736" y="3163824"/>
-            <a:ext cx="3264408" cy="256032"/>
+            <a:off x="8833104" y="3163824"/>
+            <a:ext cx="2596896" cy="256032"/>
           </a:xfrm>
           <a:prstGeom prst="rect">
             <a:avLst/>
@@ -8023,7 +9530,7 @@
                 <a:ea typeface="Liberation Sans" pitchFamily="34" charset="-122"/>
                 <a:cs typeface="Liberation Sans" pitchFamily="34" charset="-120"/>
               </a:rPr>
-              <a:t>Demonstration ranges</a:t>
+              <a:t>Visible agency</a:t>
             </a:r>
             <a:endParaRPr lang="en-US" sz="1400" dirty="0"/>
           </a:p>
@@ -8037,8 +9544,8 @@
         </p:nvSpPr>
         <p:spPr>
           <a:xfrm>
-            <a:off x="8174736" y="3502152"/>
-            <a:ext cx="3264408" cy="594360"/>
+            <a:off x="8833104" y="3502152"/>
+            <a:ext cx="2596896" cy="594360"/>
           </a:xfrm>
           <a:prstGeom prst="rect">
             <a:avLst/>
@@ -8064,7 +9571,7 @@
                 <a:ea typeface="Liberation Sans" pitchFamily="34" charset="-122"/>
                 <a:cs typeface="Liberation Sans" pitchFamily="34" charset="-120"/>
               </a:rPr>
-              <a:t>Hydraulics, dispersion, K+ and empirical competition are never presented as site truth.</a:t>
+              <a:t>Six completed steps and 5/5 capability badges.</a:t>
             </a:r>
             <a:endParaRPr lang="en-US" sz="1150" dirty="0"/>
           </a:p>
@@ -8078,8 +9585,8 @@
         </p:nvSpPr>
         <p:spPr>
           <a:xfrm>
-            <a:off x="7955280" y="4425696"/>
-            <a:ext cx="3611880" cy="1234440"/>
+            <a:off x="8613648" y="4425696"/>
+            <a:ext cx="2944368" cy="1234440"/>
           </a:xfrm>
           <a:prstGeom prst="rect">
             <a:avLst/>
@@ -8103,18 +9610,18 @@
         </p:nvSpPr>
         <p:spPr>
           <a:xfrm>
-            <a:off x="7955280" y="4425696"/>
+            <a:off x="8613648" y="4425696"/>
             <a:ext cx="73152" cy="1234440"/>
           </a:xfrm>
           <a:prstGeom prst="rect">
             <a:avLst/>
           </a:prstGeom>
           <a:solidFill>
-            <a:srgbClr val="42BE65"/>
+            <a:srgbClr val="78A9FF"/>
           </a:solidFill>
           <a:ln w="12700">
             <a:solidFill>
-              <a:srgbClr val="42BE65"/>
+              <a:srgbClr val="78A9FF"/>
             </a:solidFill>
             <a:prstDash val="solid"/>
           </a:ln>
@@ -8128,8 +9635,8 @@
         </p:nvSpPr>
         <p:spPr>
           <a:xfrm>
-            <a:off x="8174736" y="4590288"/>
-            <a:ext cx="3264408" cy="256032"/>
+            <a:off x="8833104" y="4590288"/>
+            <a:ext cx="2596896" cy="256032"/>
           </a:xfrm>
           <a:prstGeom prst="rect">
             <a:avLst/>
@@ -8155,7 +9662,7 @@
                 <a:ea typeface="Liberation Sans" pitchFamily="34" charset="-122"/>
                 <a:cs typeface="Liberation Sans" pitchFamily="34" charset="-120"/>
               </a:rPr>
-              <a:t>Reproducible propagation</a:t>
+              <a:t>Auditable output</a:t>
             </a:r>
             <a:endParaRPr lang="en-US" sz="1400" dirty="0"/>
           </a:p>
@@ -8169,8 +9676,8 @@
         </p:nvSpPr>
         <p:spPr>
           <a:xfrm>
-            <a:off x="8174736" y="4928616"/>
-            <a:ext cx="3264408" cy="594360"/>
+            <a:off x="8833104" y="4928616"/>
+            <a:ext cx="2596896" cy="594360"/>
           </a:xfrm>
           <a:prstGeom prst="rect">
             <a:avLst/>
@@ -8196,7 +9703,7 @@
                 <a:ea typeface="Liberation Sans" pitchFamily="34" charset="-122"/>
                 <a:cs typeface="Liberation Sans" pitchFamily="34" charset="-120"/>
               </a:rPr>
-              <a:t>Seeded Monte Carlo · P05/P50/P95 · JSON/CSV/SVG</a:t>
+              <a:t>Ten downloadable artifacts plus a checksum manifest.</a:t>
             </a:r>
             <a:endParaRPr lang="en-US" sz="1150" dirty="0"/>
           </a:p>
@@ -8324,26 +9831,26 @@
         </p:nvSpPr>
         <p:spPr>
           <a:xfrm>
-            <a:off x="658368" y="502920"/>
-            <a:ext cx="3840480" cy="274320"/>
-          </a:xfrm>
-          <a:prstGeom prst="rect">
-            <a:avLst/>
-          </a:prstGeom>
-          <a:noFill/>
-          <a:ln/>
-        </p:spPr>
-        <p:txBody>
-          <a:bodyPr wrap="square" lIns="0" tIns="0" rIns="0" bIns="0" rtlCol="0" anchor="ctr">
-            <a:normAutofit/>
-          </a:bodyPr>
-          <a:lstStyle/>
-          <a:p>
-            <a:pPr algn="l" indent="0" marL="0">
-              <a:buNone/>
-            </a:pPr>
-            <a:r>
-              <a:rPr lang="en-US" sz="1100" b="1" spc="180" kern="0" dirty="0">
+            <a:off x="566928" y="320040"/>
+            <a:ext cx="5303520" cy="256032"/>
+          </a:xfrm>
+          <a:prstGeom prst="rect">
+            <a:avLst/>
+          </a:prstGeom>
+          <a:noFill/>
+          <a:ln/>
+        </p:spPr>
+        <p:txBody>
+          <a:bodyPr wrap="square" lIns="0" tIns="0" rIns="0" bIns="0" rtlCol="0" anchor="ctr">
+            <a:normAutofit/>
+          </a:bodyPr>
+          <a:lstStyle/>
+          <a:p>
+            <a:pPr algn="l" indent="0" marL="0">
+              <a:buNone/>
+            </a:pPr>
+            <a:r>
+              <a:rPr lang="en-US" sz="1000" b="1" spc="180" kern="0" dirty="0">
                 <a:solidFill>
                   <a:srgbClr val="FF6B00"/>
                 </a:solidFill>
@@ -8351,9 +9858,9 @@
                 <a:ea typeface="Liberation Sans" pitchFamily="34" charset="-122"/>
                 <a:cs typeface="Liberation Sans" pitchFamily="34" charset="-120"/>
               </a:rPr>
-              <a:t>WHY NUCLIDEPATH WINS</a:t>
-            </a:r>
-            <a:endParaRPr lang="en-US" sz="1100" dirty="0"/>
+              <a:t>TRUST LAYER</a:t>
+            </a:r>
+            <a:endParaRPr lang="en-US" sz="1000" dirty="0"/>
           </a:p>
         </p:txBody>
       </p:sp>
@@ -8365,26 +9872,26 @@
         </p:nvSpPr>
         <p:spPr>
           <a:xfrm>
-            <a:off x="658368" y="1097280"/>
-            <a:ext cx="5623560" cy="1389888"/>
-          </a:xfrm>
-          <a:prstGeom prst="rect">
-            <a:avLst/>
-          </a:prstGeom>
-          <a:noFill/>
-          <a:ln/>
-        </p:spPr>
-        <p:txBody>
-          <a:bodyPr wrap="square" lIns="0" tIns="0" rIns="0" bIns="0" rtlCol="0" anchor="t">
-            <a:normAutofit/>
-          </a:bodyPr>
-          <a:lstStyle/>
-          <a:p>
-            <a:pPr algn="l" indent="0" marL="0">
-              <a:buNone/>
-            </a:pPr>
-            <a:r>
-              <a:rPr lang="en-US" sz="3600" b="1" dirty="0">
+            <a:off x="566928" y="621792"/>
+            <a:ext cx="10972800" cy="530352"/>
+          </a:xfrm>
+          <a:prstGeom prst="rect">
+            <a:avLst/>
+          </a:prstGeom>
+          <a:noFill/>
+          <a:ln/>
+        </p:spPr>
+        <p:txBody>
+          <a:bodyPr wrap="square" lIns="0" tIns="0" rIns="0" bIns="0" rtlCol="0" anchor="ctr">
+            <a:normAutofit/>
+          </a:bodyPr>
+          <a:lstStyle/>
+          <a:p>
+            <a:pPr algn="l" indent="0" marL="0">
+              <a:buNone/>
+            </a:pPr>
+            <a:r>
+              <a:rPr lang="en-US" sz="3000" dirty="0">
                 <a:solidFill>
                   <a:srgbClr val="F5F7FA"/>
                 </a:solidFill>
@@ -8392,26 +9899,9 @@
                 <a:ea typeface="Liberation Sans" pitchFamily="34" charset="-122"/>
                 <a:cs typeface="Liberation Sans" pitchFamily="34" charset="-120"/>
               </a:rPr>
-              <a:t>Private AI without</a:t>
-            </a:r>
-            <a:endParaRPr lang="en-US" sz="3600" dirty="0"/>
-          </a:p>
-          <a:p>
-            <a:pPr algn="l" indent="0" marL="0">
-              <a:buNone/>
-            </a:pPr>
-            <a:r>
-              <a:rPr lang="en-US" sz="3600" b="1" dirty="0">
-                <a:solidFill>
-                  <a:srgbClr val="F5F7FA"/>
-                </a:solidFill>
-                <a:latin typeface="Liberation Sans" pitchFamily="34" charset="0"/>
-                <a:ea typeface="Liberation Sans" pitchFamily="34" charset="-122"/>
-                <a:cs typeface="Liberation Sans" pitchFamily="34" charset="-120"/>
-              </a:rPr>
-              <a:t>scientific surrender.</a:t>
-            </a:r>
-            <a:endParaRPr lang="en-US" sz="3600" dirty="0"/>
+              <a:t>Uncertainty is declared, classified and reproducible</a:t>
+            </a:r>
+            <a:endParaRPr lang="en-US" sz="3000" dirty="0"/>
           </a:p>
         </p:txBody>
       </p:sp>
@@ -8423,336 +9913,73 @@
         </p:nvSpPr>
         <p:spPr>
           <a:xfrm>
-            <a:off x="749808" y="2971800"/>
-            <a:ext cx="1280160" cy="310896"/>
-          </a:xfrm>
-          <a:prstGeom prst="rect">
-            <a:avLst/>
-          </a:prstGeom>
-          <a:noFill/>
-          <a:ln/>
-        </p:spPr>
-        <p:txBody>
-          <a:bodyPr wrap="square" lIns="0" tIns="0" rIns="0" bIns="0" rtlCol="0" anchor="ctr">
-            <a:normAutofit/>
-          </a:bodyPr>
-          <a:lstStyle/>
-          <a:p>
-            <a:pPr algn="l" indent="0" marL="0">
-              <a:buNone/>
-            </a:pPr>
-            <a:r>
-              <a:rPr lang="en-US" sz="1200" b="1" dirty="0">
-                <a:solidFill>
-                  <a:srgbClr val="42BE65"/>
-                </a:solidFill>
-                <a:latin typeface="Liberation Mono" pitchFamily="34" charset="0"/>
-                <a:ea typeface="Liberation Mono" pitchFamily="34" charset="-122"/>
-                <a:cs typeface="Liberation Mono" pitchFamily="34" charset="-120"/>
-              </a:rPr>
-              <a:t>LOCAL</a:t>
-            </a:r>
-            <a:endParaRPr lang="en-US" sz="1200" dirty="0"/>
-          </a:p>
-        </p:txBody>
-      </p:sp>
-      <p:sp>
-        <p:nvSpPr>
-          <p:cNvPr id="5" name="Text 3"/>
-          <p:cNvSpPr/>
-          <p:nvPr/>
-        </p:nvSpPr>
-        <p:spPr>
-          <a:xfrm>
-            <a:off x="2103120" y="2971800"/>
-            <a:ext cx="4206240" cy="310896"/>
-          </a:xfrm>
-          <a:prstGeom prst="rect">
-            <a:avLst/>
-          </a:prstGeom>
-          <a:noFill/>
-          <a:ln/>
-        </p:spPr>
-        <p:txBody>
-          <a:bodyPr wrap="square" lIns="0" tIns="0" rIns="0" bIns="0" rtlCol="0" anchor="ctr">
-            <a:normAutofit/>
-          </a:bodyPr>
-          <a:lstStyle/>
-          <a:p>
-            <a:pPr algn="l" indent="0" marL="0">
-              <a:buNone/>
-            </a:pPr>
-            <a:r>
-              <a:rPr lang="en-US" sz="1600" b="1" dirty="0">
-                <a:solidFill>
-                  <a:srgbClr val="F5F7FA"/>
-                </a:solidFill>
-                <a:latin typeface="Liberation Sans" pitchFamily="34" charset="0"/>
-                <a:ea typeface="Liberation Sans" pitchFamily="34" charset="-122"/>
-                <a:cs typeface="Liberation Sans" pitchFamily="34" charset="-120"/>
-              </a:rPr>
-              <a:t>Qwen3.5-9B + RAG + memory on AMD</a:t>
-            </a:r>
-            <a:endParaRPr lang="en-US" sz="1600" dirty="0"/>
-          </a:p>
-        </p:txBody>
-      </p:sp>
-      <p:sp>
-        <p:nvSpPr>
-          <p:cNvPr id="6" name="Text 4"/>
-          <p:cNvSpPr/>
-          <p:nvPr/>
-        </p:nvSpPr>
-        <p:spPr>
-          <a:xfrm>
-            <a:off x="749808" y="3630168"/>
-            <a:ext cx="1280160" cy="310896"/>
-          </a:xfrm>
-          <a:prstGeom prst="rect">
-            <a:avLst/>
-          </a:prstGeom>
-          <a:noFill/>
-          <a:ln/>
-        </p:spPr>
-        <p:txBody>
-          <a:bodyPr wrap="square" lIns="0" tIns="0" rIns="0" bIns="0" rtlCol="0" anchor="ctr">
-            <a:normAutofit/>
-          </a:bodyPr>
-          <a:lstStyle/>
-          <a:p>
-            <a:pPr algn="l" indent="0" marL="0">
-              <a:buNone/>
-            </a:pPr>
-            <a:r>
-              <a:rPr lang="en-US" sz="1200" b="1" dirty="0">
-                <a:solidFill>
-                  <a:srgbClr val="78A9FF"/>
-                </a:solidFill>
-                <a:latin typeface="Liberation Mono" pitchFamily="34" charset="0"/>
-                <a:ea typeface="Liberation Mono" pitchFamily="34" charset="-122"/>
-                <a:cs typeface="Liberation Mono" pitchFamily="34" charset="-120"/>
-              </a:rPr>
-              <a:t>VERIFIABLE</a:t>
-            </a:r>
-            <a:endParaRPr lang="en-US" sz="1200" dirty="0"/>
-          </a:p>
-        </p:txBody>
-      </p:sp>
-      <p:sp>
-        <p:nvSpPr>
-          <p:cNvPr id="7" name="Text 5"/>
-          <p:cNvSpPr/>
-          <p:nvPr/>
-        </p:nvSpPr>
-        <p:spPr>
-          <a:xfrm>
-            <a:off x="2103120" y="3630168"/>
-            <a:ext cx="4206240" cy="310896"/>
-          </a:xfrm>
-          <a:prstGeom prst="rect">
-            <a:avLst/>
-          </a:prstGeom>
-          <a:noFill/>
-          <a:ln/>
-        </p:spPr>
-        <p:txBody>
-          <a:bodyPr wrap="square" lIns="0" tIns="0" rIns="0" bIns="0" rtlCol="0" anchor="ctr">
-            <a:normAutofit/>
-          </a:bodyPr>
-          <a:lstStyle/>
-          <a:p>
-            <a:pPr algn="l" indent="0" marL="0">
-              <a:buNone/>
-            </a:pPr>
-            <a:r>
-              <a:rPr lang="en-US" sz="1600" b="1" dirty="0">
-                <a:solidFill>
-                  <a:srgbClr val="F5F7FA"/>
-                </a:solidFill>
-                <a:latin typeface="Liberation Sans" pitchFamily="34" charset="0"/>
-                <a:ea typeface="Liberation Sans" pitchFamily="34" charset="-122"/>
-                <a:cs typeface="Liberation Sans" pitchFamily="34" charset="-120"/>
-              </a:rPr>
-              <a:t>388 AMD post-merge tests + FP64 parity + SHA-256</a:t>
-            </a:r>
-            <a:endParaRPr lang="en-US" sz="1600" dirty="0"/>
-          </a:p>
-        </p:txBody>
-      </p:sp>
-      <p:sp>
-        <p:nvSpPr>
-          <p:cNvPr id="8" name="Text 6"/>
-          <p:cNvSpPr/>
-          <p:nvPr/>
-        </p:nvSpPr>
-        <p:spPr>
-          <a:xfrm>
-            <a:off x="749808" y="4288536"/>
-            <a:ext cx="1280160" cy="310896"/>
-          </a:xfrm>
-          <a:prstGeom prst="rect">
-            <a:avLst/>
-          </a:prstGeom>
-          <a:noFill/>
-          <a:ln/>
-        </p:spPr>
-        <p:txBody>
-          <a:bodyPr wrap="square" lIns="0" tIns="0" rIns="0" bIns="0" rtlCol="0" anchor="ctr">
-            <a:normAutofit/>
-          </a:bodyPr>
-          <a:lstStyle/>
-          <a:p>
-            <a:pPr algn="l" indent="0" marL="0">
-              <a:buNone/>
-            </a:pPr>
-            <a:r>
-              <a:rPr lang="en-US" sz="1200" b="1" dirty="0">
-                <a:solidFill>
-                  <a:srgbClr val="FF6B00"/>
-                </a:solidFill>
-                <a:latin typeface="Liberation Mono" pitchFamily="34" charset="0"/>
-                <a:ea typeface="Liberation Mono" pitchFamily="34" charset="-122"/>
-                <a:cs typeface="Liberation Mono" pitchFamily="34" charset="-120"/>
-              </a:rPr>
-              <a:t>USEFUL</a:t>
-            </a:r>
-            <a:endParaRPr lang="en-US" sz="1200" dirty="0"/>
-          </a:p>
-        </p:txBody>
-      </p:sp>
-      <p:sp>
-        <p:nvSpPr>
-          <p:cNvPr id="9" name="Text 7"/>
-          <p:cNvSpPr/>
-          <p:nvPr/>
-        </p:nvSpPr>
-        <p:spPr>
-          <a:xfrm>
-            <a:off x="2103120" y="4288536"/>
-            <a:ext cx="4206240" cy="310896"/>
-          </a:xfrm>
-          <a:prstGeom prst="rect">
-            <a:avLst/>
-          </a:prstGeom>
-          <a:noFill/>
-          <a:ln/>
-        </p:spPr>
-        <p:txBody>
-          <a:bodyPr wrap="square" lIns="0" tIns="0" rIns="0" bIns="0" rtlCol="0" anchor="ctr">
-            <a:normAutofit/>
-          </a:bodyPr>
-          <a:lstStyle/>
-          <a:p>
-            <a:pPr algn="l" indent="0" marL="0">
-              <a:buNone/>
-            </a:pPr>
-            <a:r>
-              <a:rPr lang="en-US" sz="1600" b="1" dirty="0">
-                <a:solidFill>
-                  <a:srgbClr val="F5F7FA"/>
-                </a:solidFill>
-                <a:latin typeface="Liberation Sans" pitchFamily="34" charset="0"/>
-                <a:ea typeface="Liberation Sans" pitchFamily="34" charset="-122"/>
-                <a:cs typeface="Liberation Sans" pitchFamily="34" charset="-120"/>
-              </a:rPr>
-              <a:t>One-click workflow from case to report</a:t>
-            </a:r>
-            <a:endParaRPr lang="en-US" sz="1600" dirty="0"/>
-          </a:p>
-        </p:txBody>
-      </p:sp>
-      <p:sp>
-        <p:nvSpPr>
-          <p:cNvPr id="10" name="Text 8"/>
-          <p:cNvSpPr/>
-          <p:nvPr/>
-        </p:nvSpPr>
-        <p:spPr>
-          <a:xfrm>
-            <a:off x="749808" y="4946904"/>
-            <a:ext cx="1280160" cy="310896"/>
-          </a:xfrm>
-          <a:prstGeom prst="rect">
-            <a:avLst/>
-          </a:prstGeom>
-          <a:noFill/>
-          <a:ln/>
-        </p:spPr>
-        <p:txBody>
-          <a:bodyPr wrap="square" lIns="0" tIns="0" rIns="0" bIns="0" rtlCol="0" anchor="ctr">
-            <a:normAutofit/>
-          </a:bodyPr>
-          <a:lstStyle/>
-          <a:p>
-            <a:pPr algn="l" indent="0" marL="0">
-              <a:buNone/>
-            </a:pPr>
-            <a:r>
-              <a:rPr lang="en-US" sz="1200" b="1" dirty="0">
-                <a:solidFill>
-                  <a:srgbClr val="F1C21B"/>
-                </a:solidFill>
-                <a:latin typeface="Liberation Mono" pitchFamily="34" charset="0"/>
-                <a:ea typeface="Liberation Mono" pitchFamily="34" charset="-122"/>
-                <a:cs typeface="Liberation Mono" pitchFamily="34" charset="-120"/>
-              </a:rPr>
-              <a:t>HONEST</a:t>
-            </a:r>
-            <a:endParaRPr lang="en-US" sz="1200" dirty="0"/>
-          </a:p>
-        </p:txBody>
-      </p:sp>
-      <p:sp>
-        <p:nvSpPr>
-          <p:cNvPr id="11" name="Text 9"/>
-          <p:cNvSpPr/>
-          <p:nvPr/>
-        </p:nvSpPr>
-        <p:spPr>
-          <a:xfrm>
-            <a:off x="2103120" y="4946904"/>
-            <a:ext cx="4206240" cy="310896"/>
-          </a:xfrm>
-          <a:prstGeom prst="rect">
-            <a:avLst/>
-          </a:prstGeom>
-          <a:noFill/>
-          <a:ln/>
-        </p:spPr>
-        <p:txBody>
-          <a:bodyPr wrap="square" lIns="0" tIns="0" rIns="0" bIns="0" rtlCol="0" anchor="ctr">
-            <a:normAutofit/>
-          </a:bodyPr>
-          <a:lstStyle/>
-          <a:p>
-            <a:pPr algn="l" indent="0" marL="0">
-              <a:buNone/>
-            </a:pPr>
-            <a:r>
-              <a:rPr lang="en-US" sz="1600" b="1" dirty="0">
-                <a:solidFill>
-                  <a:srgbClr val="F5F7FA"/>
-                </a:solidFill>
-                <a:latin typeface="Liberation Sans" pitchFamily="34" charset="0"/>
-                <a:ea typeface="Liberation Sans" pitchFamily="34" charset="-122"/>
-                <a:cs typeface="Liberation Sans" pitchFamily="34" charset="-120"/>
-              </a:rPr>
-              <a:t>PHREEQC bridge explicit; no unqualified science</a:t>
-            </a:r>
-            <a:endParaRPr lang="en-US" sz="1600" dirty="0"/>
-          </a:p>
-        </p:txBody>
-      </p:sp>
-      <p:sp>
-        <p:nvSpPr>
-          <p:cNvPr id="12" name="Shape 10"/>
-          <p:cNvSpPr/>
-          <p:nvPr/>
-        </p:nvSpPr>
-        <p:spPr>
-          <a:xfrm>
-            <a:off x="6903720" y="658368"/>
-            <a:ext cx="4645152" cy="5468112"/>
+            <a:off x="585216" y="1143000"/>
+            <a:ext cx="10789920" cy="347472"/>
+          </a:xfrm>
+          <a:prstGeom prst="rect">
+            <a:avLst/>
+          </a:prstGeom>
+          <a:noFill/>
+          <a:ln/>
+        </p:spPr>
+        <p:txBody>
+          <a:bodyPr wrap="square" lIns="0" tIns="0" rIns="0" bIns="0" rtlCol="0" anchor="ctr">
+            <a:normAutofit/>
+          </a:bodyPr>
+          <a:lstStyle/>
+          <a:p>
+            <a:pPr algn="l" indent="0" marL="0">
+              <a:buNone/>
+            </a:pPr>
+            <a:r>
+              <a:rPr lang="en-US" sz="1300" dirty="0">
+                <a:solidFill>
+                  <a:srgbClr val="A7ADB5"/>
+                </a:solidFill>
+                <a:latin typeface="Liberation Sans" pitchFamily="34" charset="0"/>
+                <a:ea typeface="Liberation Sans" pitchFamily="34" charset="-122"/>
+                <a:cs typeface="Liberation Sans" pitchFamily="34" charset="-120"/>
+              </a:rPr>
+              <a:t>The project distinguishes literature evidence from demonstration inputs.</a:t>
+            </a:r>
+            <a:endParaRPr lang="en-US" sz="1300" dirty="0"/>
+          </a:p>
+        </p:txBody>
+      </p:sp>
+      <p:pic>
+        <p:nvPicPr>
+          <p:cNvPr id="5" name="Image 0" descr="NuclidePath uncertainty dashboard">    </p:cNvPr>
+          <p:cNvPicPr>
+            <a:picLocks noChangeAspect="1"/>
+          </p:cNvPicPr>
+          <p:nvPr/>
+        </p:nvPicPr>
+        <p:blipFill>
+          <a:blip r:embed="rId1"/>
+          <a:stretch>
+            <a:fillRect/>
+          </a:stretch>
+        </p:blipFill>
+        <p:spPr>
+          <a:xfrm>
+            <a:off x="658368" y="1536192"/>
+            <a:ext cx="6995160" cy="4379976"/>
+          </a:xfrm>
+          <a:prstGeom prst="rect">
+            <a:avLst/>
+          </a:prstGeom>
+        </p:spPr>
+      </p:pic>
+      <p:sp>
+        <p:nvSpPr>
+          <p:cNvPr id="6" name="Shape 3"/>
+          <p:cNvSpPr/>
+          <p:nvPr/>
+        </p:nvSpPr>
+        <p:spPr>
+          <a:xfrm>
+            <a:off x="7955280" y="1572768"/>
+            <a:ext cx="3611880" cy="1234440"/>
           </a:xfrm>
           <a:prstGeom prst="rect">
             <a:avLst/>
@@ -8770,32 +9997,57 @@
       </p:sp>
       <p:sp>
         <p:nvSpPr>
-          <p:cNvPr id="13" name="Text 11"/>
-          <p:cNvSpPr/>
-          <p:nvPr/>
-        </p:nvSpPr>
-        <p:spPr>
-          <a:xfrm>
-            <a:off x="7269480" y="1005840"/>
-            <a:ext cx="1828800" cy="329184"/>
-          </a:xfrm>
-          <a:prstGeom prst="rect">
-            <a:avLst/>
-          </a:prstGeom>
-          <a:noFill/>
-          <a:ln/>
-        </p:spPr>
-        <p:txBody>
-          <a:bodyPr wrap="square" lIns="0" tIns="0" rIns="0" bIns="0" rtlCol="0" anchor="ctr">
-            <a:normAutofit/>
-          </a:bodyPr>
-          <a:lstStyle/>
-          <a:p>
-            <a:pPr algn="l" indent="0" marL="0">
-              <a:buNone/>
-            </a:pPr>
-            <a:r>
-              <a:rPr lang="en-US" sz="2000" b="1" dirty="0">
+          <p:cNvPr id="7" name="Shape 4"/>
+          <p:cNvSpPr/>
+          <p:nvPr/>
+        </p:nvSpPr>
+        <p:spPr>
+          <a:xfrm>
+            <a:off x="7955280" y="1572768"/>
+            <a:ext cx="73152" cy="1234440"/>
+          </a:xfrm>
+          <a:prstGeom prst="rect">
+            <a:avLst/>
+          </a:prstGeom>
+          <a:solidFill>
+            <a:srgbClr val="BE95FF"/>
+          </a:solidFill>
+          <a:ln w="12700">
+            <a:solidFill>
+              <a:srgbClr val="BE95FF"/>
+            </a:solidFill>
+            <a:prstDash val="solid"/>
+          </a:ln>
+        </p:spPr>
+      </p:sp>
+      <p:sp>
+        <p:nvSpPr>
+          <p:cNvPr id="8" name="Text 5"/>
+          <p:cNvSpPr/>
+          <p:nvPr/>
+        </p:nvSpPr>
+        <p:spPr>
+          <a:xfrm>
+            <a:off x="8174736" y="1737360"/>
+            <a:ext cx="3264408" cy="256032"/>
+          </a:xfrm>
+          <a:prstGeom prst="rect">
+            <a:avLst/>
+          </a:prstGeom>
+          <a:noFill/>
+          <a:ln/>
+        </p:spPr>
+        <p:txBody>
+          <a:bodyPr wrap="square" lIns="0" tIns="0" rIns="0" bIns="0" rtlCol="0" anchor="ctr">
+            <a:normAutofit/>
+          </a:bodyPr>
+          <a:lstStyle/>
+          <a:p>
+            <a:pPr algn="l" indent="0" marL="0">
+              <a:buNone/>
+            </a:pPr>
+            <a:r>
+              <a:rPr lang="en-US" sz="1400" b="1" dirty="0">
                 <a:solidFill>
                   <a:srgbClr val="F5F7FA"/>
                 </a:solidFill>
@@ -8803,63 +10055,22 @@
                 <a:ea typeface="Liberation Sans" pitchFamily="34" charset="-122"/>
                 <a:cs typeface="Liberation Sans" pitchFamily="34" charset="-120"/>
               </a:rPr>
-              <a:t>The proof</a:t>
-            </a:r>
-            <a:endParaRPr lang="en-US" sz="2000" dirty="0"/>
-          </a:p>
-        </p:txBody>
-      </p:sp>
-      <p:sp>
-        <p:nvSpPr>
-          <p:cNvPr id="14" name="Text 12"/>
-          <p:cNvSpPr/>
-          <p:nvPr/>
-        </p:nvSpPr>
-        <p:spPr>
-          <a:xfrm>
-            <a:off x="7269480" y="1627632"/>
-            <a:ext cx="1828800" cy="658368"/>
-          </a:xfrm>
-          <a:prstGeom prst="rect">
-            <a:avLst/>
-          </a:prstGeom>
-          <a:noFill/>
-          <a:ln/>
-        </p:spPr>
-        <p:txBody>
-          <a:bodyPr wrap="square" lIns="0" tIns="0" rIns="0" bIns="0" rtlCol="0" anchor="ctr">
-            <a:normAutofit/>
-          </a:bodyPr>
-          <a:lstStyle/>
-          <a:p>
-            <a:pPr algn="l" indent="0" marL="0">
-              <a:buNone/>
-            </a:pPr>
-            <a:r>
-              <a:rPr lang="en-US" sz="3600" b="1" dirty="0">
-                <a:solidFill>
-                  <a:srgbClr val="42BE65"/>
-                </a:solidFill>
-                <a:latin typeface="Liberation Mono" pitchFamily="34" charset="0"/>
-                <a:ea typeface="Liberation Mono" pitchFamily="34" charset="-122"/>
-                <a:cs typeface="Liberation Mono" pitchFamily="34" charset="-120"/>
-              </a:rPr>
-              <a:t>5/5</a:t>
-            </a:r>
-            <a:endParaRPr lang="en-US" sz="3600" dirty="0"/>
-          </a:p>
-        </p:txBody>
-      </p:sp>
-      <p:sp>
-        <p:nvSpPr>
-          <p:cNvPr id="15" name="Text 13"/>
-          <p:cNvSpPr/>
-          <p:nvPr/>
-        </p:nvSpPr>
-        <p:spPr>
-          <a:xfrm>
-            <a:off x="7269480" y="2286000"/>
-            <a:ext cx="1828800" cy="310896"/>
+              <a:t>Literature-informed range</a:t>
+            </a:r>
+            <a:endParaRPr lang="en-US" sz="1400" dirty="0"/>
+          </a:p>
+        </p:txBody>
+      </p:sp>
+      <p:sp>
+        <p:nvSpPr>
+          <p:cNvPr id="9" name="Text 6"/>
+          <p:cNvSpPr/>
+          <p:nvPr/>
+        </p:nvSpPr>
+        <p:spPr>
+          <a:xfrm>
+            <a:off x="8174736" y="2075688"/>
+            <a:ext cx="3264408" cy="594360"/>
           </a:xfrm>
           <a:prstGeom prst="rect">
             <a:avLst/>
@@ -8877,7 +10088,7 @@
               <a:buNone/>
             </a:pPr>
             <a:r>
-              <a:rPr lang="en-US" sz="1100" dirty="0">
+              <a:rPr lang="en-US" sz="1150" dirty="0">
                 <a:solidFill>
                   <a:srgbClr val="A7ADB5"/>
                 </a:solidFill>
@@ -8885,63 +10096,113 @@
                 <a:ea typeface="Liberation Sans" pitchFamily="34" charset="-122"/>
                 <a:cs typeface="Liberation Sans" pitchFamily="34" charset="-120"/>
               </a:rPr>
-              <a:t>Track 2 capabilities</a:t>
-            </a:r>
-            <a:endParaRPr lang="en-US" sz="1100" dirty="0"/>
-          </a:p>
-        </p:txBody>
-      </p:sp>
-      <p:sp>
-        <p:nvSpPr>
-          <p:cNvPr id="16" name="Text 14"/>
-          <p:cNvSpPr/>
-          <p:nvPr/>
-        </p:nvSpPr>
-        <p:spPr>
-          <a:xfrm>
-            <a:off x="9390888" y="1627632"/>
-            <a:ext cx="1691640" cy="658368"/>
-          </a:xfrm>
-          <a:prstGeom prst="rect">
-            <a:avLst/>
-          </a:prstGeom>
-          <a:noFill/>
-          <a:ln/>
-        </p:spPr>
-        <p:txBody>
-          <a:bodyPr wrap="square" lIns="0" tIns="0" rIns="0" bIns="0" rtlCol="0" anchor="ctr">
-            <a:normAutofit/>
-          </a:bodyPr>
-          <a:lstStyle/>
-          <a:p>
-            <a:pPr algn="l" indent="0" marL="0">
-              <a:buNone/>
-            </a:pPr>
-            <a:r>
-              <a:rPr lang="en-US" sz="3600" b="1" dirty="0">
-                <a:solidFill>
-                  <a:srgbClr val="78A9FF"/>
-                </a:solidFill>
-                <a:latin typeface="Liberation Mono" pitchFamily="34" charset="0"/>
-                <a:ea typeface="Liberation Mono" pitchFamily="34" charset="-122"/>
-                <a:cs typeface="Liberation Mono" pitchFamily="34" charset="-120"/>
-              </a:rPr>
-              <a:t>388</a:t>
-            </a:r>
-            <a:endParaRPr lang="en-US" sz="3600" dirty="0"/>
-          </a:p>
-        </p:txBody>
-      </p:sp>
-      <p:sp>
-        <p:nvSpPr>
-          <p:cNvPr id="17" name="Text 15"/>
-          <p:cNvSpPr/>
-          <p:nvPr/>
-        </p:nvSpPr>
-        <p:spPr>
-          <a:xfrm>
-            <a:off x="9390888" y="2286000"/>
-            <a:ext cx="1691640" cy="310896"/>
+              <a:t>Cs Kd: 0.05–5.0 m³/kg · IAEA TECDOC-2095</a:t>
+            </a:r>
+            <a:endParaRPr lang="en-US" sz="1150" dirty="0"/>
+          </a:p>
+        </p:txBody>
+      </p:sp>
+      <p:sp>
+        <p:nvSpPr>
+          <p:cNvPr id="10" name="Shape 7"/>
+          <p:cNvSpPr/>
+          <p:nvPr/>
+        </p:nvSpPr>
+        <p:spPr>
+          <a:xfrm>
+            <a:off x="7955280" y="2999232"/>
+            <a:ext cx="3611880" cy="1234440"/>
+          </a:xfrm>
+          <a:prstGeom prst="rect">
+            <a:avLst/>
+          </a:prstGeom>
+          <a:solidFill>
+            <a:srgbClr val="15171A"/>
+          </a:solidFill>
+          <a:ln w="12700">
+            <a:solidFill>
+              <a:srgbClr val="363A40"/>
+            </a:solidFill>
+            <a:prstDash val="solid"/>
+          </a:ln>
+        </p:spPr>
+      </p:sp>
+      <p:sp>
+        <p:nvSpPr>
+          <p:cNvPr id="11" name="Shape 8"/>
+          <p:cNvSpPr/>
+          <p:nvPr/>
+        </p:nvSpPr>
+        <p:spPr>
+          <a:xfrm>
+            <a:off x="7955280" y="2999232"/>
+            <a:ext cx="73152" cy="1234440"/>
+          </a:xfrm>
+          <a:prstGeom prst="rect">
+            <a:avLst/>
+          </a:prstGeom>
+          <a:solidFill>
+            <a:srgbClr val="F1C21B"/>
+          </a:solidFill>
+          <a:ln w="12700">
+            <a:solidFill>
+              <a:srgbClr val="F1C21B"/>
+            </a:solidFill>
+            <a:prstDash val="solid"/>
+          </a:ln>
+        </p:spPr>
+      </p:sp>
+      <p:sp>
+        <p:nvSpPr>
+          <p:cNvPr id="12" name="Text 9"/>
+          <p:cNvSpPr/>
+          <p:nvPr/>
+        </p:nvSpPr>
+        <p:spPr>
+          <a:xfrm>
+            <a:off x="8174736" y="3163824"/>
+            <a:ext cx="3264408" cy="256032"/>
+          </a:xfrm>
+          <a:prstGeom prst="rect">
+            <a:avLst/>
+          </a:prstGeom>
+          <a:noFill/>
+          <a:ln/>
+        </p:spPr>
+        <p:txBody>
+          <a:bodyPr wrap="square" lIns="0" tIns="0" rIns="0" bIns="0" rtlCol="0" anchor="ctr">
+            <a:normAutofit/>
+          </a:bodyPr>
+          <a:lstStyle/>
+          <a:p>
+            <a:pPr algn="l" indent="0" marL="0">
+              <a:buNone/>
+            </a:pPr>
+            <a:r>
+              <a:rPr lang="en-US" sz="1400" b="1" dirty="0">
+                <a:solidFill>
+                  <a:srgbClr val="F5F7FA"/>
+                </a:solidFill>
+                <a:latin typeface="Liberation Sans" pitchFamily="34" charset="0"/>
+                <a:ea typeface="Liberation Sans" pitchFamily="34" charset="-122"/>
+                <a:cs typeface="Liberation Sans" pitchFamily="34" charset="-120"/>
+              </a:rPr>
+              <a:t>Demonstration ranges</a:t>
+            </a:r>
+            <a:endParaRPr lang="en-US" sz="1400" dirty="0"/>
+          </a:p>
+        </p:txBody>
+      </p:sp>
+      <p:sp>
+        <p:nvSpPr>
+          <p:cNvPr id="13" name="Text 10"/>
+          <p:cNvSpPr/>
+          <p:nvPr/>
+        </p:nvSpPr>
+        <p:spPr>
+          <a:xfrm>
+            <a:off x="8174736" y="3502152"/>
+            <a:ext cx="3264408" cy="594360"/>
           </a:xfrm>
           <a:prstGeom prst="rect">
             <a:avLst/>
@@ -8959,7 +10220,7 @@
               <a:buNone/>
             </a:pPr>
             <a:r>
-              <a:rPr lang="en-US" sz="1100" dirty="0">
+              <a:rPr lang="en-US" sz="1150" dirty="0">
                 <a:solidFill>
                   <a:srgbClr val="A7ADB5"/>
                 </a:solidFill>
@@ -8967,278 +10228,53 @@
                 <a:ea typeface="Liberation Sans" pitchFamily="34" charset="-122"/>
                 <a:cs typeface="Liberation Sans" pitchFamily="34" charset="-120"/>
               </a:rPr>
-              <a:t>AMD tests (post-merge)</a:t>
-            </a:r>
-            <a:endParaRPr lang="en-US" sz="1100" dirty="0"/>
-          </a:p>
-        </p:txBody>
-      </p:sp>
-      <p:sp>
-        <p:nvSpPr>
-          <p:cNvPr id="18" name="Text 16"/>
-          <p:cNvSpPr/>
-          <p:nvPr/>
-        </p:nvSpPr>
-        <p:spPr>
-          <a:xfrm>
-            <a:off x="7269480" y="2788920"/>
-            <a:ext cx="1828800" cy="658368"/>
-          </a:xfrm>
-          <a:prstGeom prst="rect">
-            <a:avLst/>
-          </a:prstGeom>
-          <a:noFill/>
-          <a:ln/>
-        </p:spPr>
-        <p:txBody>
-          <a:bodyPr wrap="square" lIns="0" tIns="0" rIns="0" bIns="0" rtlCol="0" anchor="ctr">
-            <a:normAutofit/>
-          </a:bodyPr>
-          <a:lstStyle/>
-          <a:p>
-            <a:pPr algn="l" indent="0" marL="0">
-              <a:buNone/>
-            </a:pPr>
-            <a:r>
-              <a:rPr lang="en-US" sz="3600" b="1" dirty="0">
-                <a:solidFill>
-                  <a:srgbClr val="FF6B00"/>
-                </a:solidFill>
-                <a:latin typeface="Liberation Mono" pitchFamily="34" charset="0"/>
-                <a:ea typeface="Liberation Mono" pitchFamily="34" charset="-122"/>
-                <a:cs typeface="Liberation Mono" pitchFamily="34" charset="-120"/>
-              </a:rPr>
-              <a:t>137.09×</a:t>
-            </a:r>
-            <a:endParaRPr lang="en-US" sz="3600" dirty="0"/>
-          </a:p>
-        </p:txBody>
-      </p:sp>
-      <p:sp>
-        <p:nvSpPr>
-          <p:cNvPr id="19" name="Text 17"/>
-          <p:cNvSpPr/>
-          <p:nvPr/>
-        </p:nvSpPr>
-        <p:spPr>
-          <a:xfrm>
-            <a:off x="7269480" y="3447288"/>
-            <a:ext cx="1828800" cy="310896"/>
-          </a:xfrm>
-          <a:prstGeom prst="rect">
-            <a:avLst/>
-          </a:prstGeom>
-          <a:noFill/>
-          <a:ln/>
-        </p:spPr>
-        <p:txBody>
-          <a:bodyPr wrap="square" lIns="0" tIns="0" rIns="0" bIns="0" rtlCol="0" anchor="t">
-            <a:normAutofit/>
-          </a:bodyPr>
-          <a:lstStyle/>
-          <a:p>
-            <a:pPr algn="l" indent="0" marL="0">
-              <a:buNone/>
-            </a:pPr>
-            <a:r>
-              <a:rPr lang="en-US" sz="1100" dirty="0">
-                <a:solidFill>
-                  <a:srgbClr val="A7ADB5"/>
-                </a:solidFill>
-                <a:latin typeface="Liberation Sans" pitchFamily="34" charset="0"/>
-                <a:ea typeface="Liberation Sans" pitchFamily="34" charset="-122"/>
-                <a:cs typeface="Liberation Sans" pitchFamily="34" charset="-120"/>
-              </a:rPr>
-              <a:t>FP64 platform</a:t>
-            </a:r>
-            <a:endParaRPr lang="en-US" sz="1100" dirty="0"/>
-          </a:p>
-        </p:txBody>
-      </p:sp>
-      <p:sp>
-        <p:nvSpPr>
-          <p:cNvPr id="20" name="Text 18"/>
-          <p:cNvSpPr/>
-          <p:nvPr/>
-        </p:nvSpPr>
-        <p:spPr>
-          <a:xfrm>
-            <a:off x="9390888" y="2788920"/>
-            <a:ext cx="1691640" cy="658368"/>
-          </a:xfrm>
-          <a:prstGeom prst="rect">
-            <a:avLst/>
-          </a:prstGeom>
-          <a:noFill/>
-          <a:ln/>
-        </p:spPr>
-        <p:txBody>
-          <a:bodyPr wrap="square" lIns="0" tIns="0" rIns="0" bIns="0" rtlCol="0" anchor="ctr">
-            <a:normAutofit/>
-          </a:bodyPr>
-          <a:lstStyle/>
-          <a:p>
-            <a:pPr algn="l" indent="0" marL="0">
-              <a:buNone/>
-            </a:pPr>
-            <a:r>
-              <a:rPr lang="en-US" sz="3600" b="1" dirty="0">
-                <a:solidFill>
-                  <a:srgbClr val="BE95FF"/>
-                </a:solidFill>
-                <a:latin typeface="Liberation Mono" pitchFamily="34" charset="0"/>
-                <a:ea typeface="Liberation Mono" pitchFamily="34" charset="-122"/>
-                <a:cs typeface="Liberation Mono" pitchFamily="34" charset="-120"/>
-              </a:rPr>
-              <a:t>0</a:t>
-            </a:r>
-            <a:endParaRPr lang="en-US" sz="3600" dirty="0"/>
-          </a:p>
-        </p:txBody>
-      </p:sp>
-      <p:sp>
-        <p:nvSpPr>
-          <p:cNvPr id="21" name="Text 19"/>
-          <p:cNvSpPr/>
-          <p:nvPr/>
-        </p:nvSpPr>
-        <p:spPr>
-          <a:xfrm>
-            <a:off x="9390888" y="3447288"/>
-            <a:ext cx="1691640" cy="310896"/>
-          </a:xfrm>
-          <a:prstGeom prst="rect">
-            <a:avLst/>
-          </a:prstGeom>
-          <a:noFill/>
-          <a:ln/>
-        </p:spPr>
-        <p:txBody>
-          <a:bodyPr wrap="square" lIns="0" tIns="0" rIns="0" bIns="0" rtlCol="0" anchor="t">
-            <a:normAutofit/>
-          </a:bodyPr>
-          <a:lstStyle/>
-          <a:p>
-            <a:pPr algn="l" indent="0" marL="0">
-              <a:buNone/>
-            </a:pPr>
-            <a:r>
-              <a:rPr lang="en-US" sz="1100" dirty="0">
-                <a:solidFill>
-                  <a:srgbClr val="A7ADB5"/>
-                </a:solidFill>
-                <a:latin typeface="Liberation Sans" pitchFamily="34" charset="0"/>
-                <a:ea typeface="Liberation Sans" pitchFamily="34" charset="-122"/>
-                <a:cs typeface="Liberation Sans" pitchFamily="34" charset="-120"/>
-              </a:rPr>
-              <a:t>cloud calls</a:t>
-            </a:r>
-            <a:endParaRPr lang="en-US" sz="1100" dirty="0"/>
-          </a:p>
-        </p:txBody>
-      </p:sp>
-      <p:sp>
-        <p:nvSpPr>
-          <p:cNvPr id="22" name="Text 20"/>
-          <p:cNvSpPr/>
-          <p:nvPr/>
-        </p:nvSpPr>
-        <p:spPr>
-          <a:xfrm>
-            <a:off x="7269480" y="4187952"/>
-            <a:ext cx="3657600" cy="320040"/>
-          </a:xfrm>
-          <a:prstGeom prst="rect">
-            <a:avLst/>
-          </a:prstGeom>
-          <a:noFill/>
-          <a:ln/>
-        </p:spPr>
-        <p:txBody>
-          <a:bodyPr wrap="square" lIns="0" tIns="0" rIns="0" bIns="0" rtlCol="0" anchor="ctr">
-            <a:normAutofit/>
-          </a:bodyPr>
-          <a:lstStyle/>
-          <a:p>
-            <a:pPr algn="l" indent="0" marL="0">
-              <a:buNone/>
-            </a:pPr>
-            <a:r>
-              <a:rPr lang="en-US" sz="1500" b="1" dirty="0">
-                <a:solidFill>
-                  <a:srgbClr val="F5F7FA"/>
-                </a:solidFill>
-                <a:latin typeface="Liberation Sans" pitchFamily="34" charset="0"/>
-                <a:ea typeface="Liberation Sans" pitchFamily="34" charset="-122"/>
-                <a:cs typeface="Liberation Sans" pitchFamily="34" charset="-120"/>
-              </a:rPr>
-              <a:t>Track 2 · Physics-First AI · NuclidePath</a:t>
-            </a:r>
-            <a:endParaRPr lang="en-US" sz="1500" dirty="0"/>
-          </a:p>
-        </p:txBody>
-      </p:sp>
-      <p:sp>
-        <p:nvSpPr>
-          <p:cNvPr id="23" name="Text 21"/>
-          <p:cNvSpPr/>
-          <p:nvPr/>
-        </p:nvSpPr>
-        <p:spPr>
-          <a:xfrm>
-            <a:off x="7269480" y="4709160"/>
-            <a:ext cx="3657600" cy="292608"/>
-          </a:xfrm>
-          <a:prstGeom prst="rect">
-            <a:avLst/>
-          </a:prstGeom>
-          <a:noFill/>
-          <a:ln/>
-        </p:spPr>
-        <p:txBody>
-          <a:bodyPr wrap="square" lIns="0" tIns="0" rIns="0" bIns="0" rtlCol="0" anchor="ctr">
-            <a:normAutofit/>
-          </a:bodyPr>
-          <a:lstStyle/>
-          <a:p>
-            <a:pPr algn="l" indent="0" marL="0">
-              <a:buNone/>
-            </a:pPr>
-            <a:r>
-              <a:rPr lang="en-US" sz="1200" dirty="0">
-                <a:solidFill>
-                  <a:srgbClr val="78A9FF"/>
-                </a:solidFill>
-                <a:latin typeface="Liberation Mono" pitchFamily="34" charset="0"/>
-                <a:ea typeface="Liberation Mono" pitchFamily="34" charset="-122"/>
-                <a:cs typeface="Liberation Mono" pitchFamily="34" charset="-120"/>
-              </a:rPr>
-              <a:t>Official AMD Track 2 PR package</a:t>
-            </a:r>
-            <a:endParaRPr lang="en-US" sz="1200" dirty="0"/>
-          </a:p>
-        </p:txBody>
-      </p:sp>
-      <p:sp>
-        <p:nvSpPr>
-          <p:cNvPr id="24" name="Shape 22"/>
-          <p:cNvSpPr/>
-          <p:nvPr/>
-        </p:nvSpPr>
-        <p:spPr>
-          <a:xfrm>
-            <a:off x="7269480" y="5303520"/>
-            <a:ext cx="1874520" cy="292608"/>
-          </a:xfrm>
-          <a:prstGeom prst="roundRect">
-            <a:avLst>
-              <a:gd name="adj" fmla="val 25000"/>
-            </a:avLst>
+              <a:t>Hydraulics, dispersion, K+ and empirical competition are never presented as site truth.</a:t>
+            </a:r>
+            <a:endParaRPr lang="en-US" sz="1150" dirty="0"/>
+          </a:p>
+        </p:txBody>
+      </p:sp>
+      <p:sp>
+        <p:nvSpPr>
+          <p:cNvPr id="14" name="Shape 11"/>
+          <p:cNvSpPr/>
+          <p:nvPr/>
+        </p:nvSpPr>
+        <p:spPr>
+          <a:xfrm>
+            <a:off x="7955280" y="4425696"/>
+            <a:ext cx="3611880" cy="1234440"/>
+          </a:xfrm>
+          <a:prstGeom prst="rect">
+            <a:avLst/>
           </a:prstGeom>
           <a:solidFill>
-            <a:srgbClr val="42BE65">
-              <a:alpha val="22000"/>
-            </a:srgbClr>
+            <a:srgbClr val="15171A"/>
+          </a:solidFill>
+          <a:ln w="12700">
+            <a:solidFill>
+              <a:srgbClr val="363A40"/>
+            </a:solidFill>
+            <a:prstDash val="solid"/>
+          </a:ln>
+        </p:spPr>
+      </p:sp>
+      <p:sp>
+        <p:nvSpPr>
+          <p:cNvPr id="15" name="Shape 12"/>
+          <p:cNvSpPr/>
+          <p:nvPr/>
+        </p:nvSpPr>
+        <p:spPr>
+          <a:xfrm>
+            <a:off x="7955280" y="4425696"/>
+            <a:ext cx="73152" cy="1234440"/>
+          </a:xfrm>
+          <a:prstGeom prst="rect">
+            <a:avLst/>
+          </a:prstGeom>
+          <a:solidFill>
+            <a:srgbClr val="42BE65"/>
           </a:solidFill>
           <a:ln w="12700">
             <a:solidFill>
@@ -9250,83 +10286,165 @@
       </p:sp>
       <p:sp>
         <p:nvSpPr>
-          <p:cNvPr id="25" name="Text 23"/>
-          <p:cNvSpPr/>
-          <p:nvPr/>
-        </p:nvSpPr>
-        <p:spPr>
-          <a:xfrm>
-            <a:off x="7342632" y="5321808"/>
-            <a:ext cx="1728216" cy="219456"/>
-          </a:xfrm>
-          <a:prstGeom prst="rect">
-            <a:avLst/>
-          </a:prstGeom>
-          <a:noFill/>
-          <a:ln/>
-        </p:spPr>
-        <p:txBody>
-          <a:bodyPr wrap="square" lIns="0" tIns="0" rIns="0" bIns="0" rtlCol="0" anchor="ctr">
-            <a:normAutofit/>
-          </a:bodyPr>
-          <a:lstStyle/>
-          <a:p>
-            <a:pPr algn="ctr" indent="0" marL="0">
-              <a:buNone/>
-            </a:pPr>
-            <a:r>
-              <a:rPr lang="en-US" sz="900" b="1" dirty="0">
-                <a:solidFill>
-                  <a:srgbClr val="42BE65"/>
-                </a:solidFill>
-                <a:latin typeface="Liberation Sans" pitchFamily="34" charset="0"/>
-                <a:ea typeface="Liberation Sans" pitchFamily="34" charset="-122"/>
-                <a:cs typeface="Liberation Sans" pitchFamily="34" charset="-120"/>
-              </a:rPr>
-              <a:t>TECHNICAL BUILD VERIFIED</a:t>
+          <p:cNvPr id="16" name="Text 13"/>
+          <p:cNvSpPr/>
+          <p:nvPr/>
+        </p:nvSpPr>
+        <p:spPr>
+          <a:xfrm>
+            <a:off x="8174736" y="4590288"/>
+            <a:ext cx="3264408" cy="256032"/>
+          </a:xfrm>
+          <a:prstGeom prst="rect">
+            <a:avLst/>
+          </a:prstGeom>
+          <a:noFill/>
+          <a:ln/>
+        </p:spPr>
+        <p:txBody>
+          <a:bodyPr wrap="square" lIns="0" tIns="0" rIns="0" bIns="0" rtlCol="0" anchor="ctr">
+            <a:normAutofit/>
+          </a:bodyPr>
+          <a:lstStyle/>
+          <a:p>
+            <a:pPr algn="l" indent="0" marL="0">
+              <a:buNone/>
+            </a:pPr>
+            <a:r>
+              <a:rPr lang="en-US" sz="1400" b="1" dirty="0">
+                <a:solidFill>
+                  <a:srgbClr val="F5F7FA"/>
+                </a:solidFill>
+                <a:latin typeface="Liberation Sans" pitchFamily="34" charset="0"/>
+                <a:ea typeface="Liberation Sans" pitchFamily="34" charset="-122"/>
+                <a:cs typeface="Liberation Sans" pitchFamily="34" charset="-120"/>
+              </a:rPr>
+              <a:t>Reproducible propagation</a:t>
+            </a:r>
+            <a:endParaRPr lang="en-US" sz="1400" dirty="0"/>
+          </a:p>
+        </p:txBody>
+      </p:sp>
+      <p:sp>
+        <p:nvSpPr>
+          <p:cNvPr id="17" name="Text 14"/>
+          <p:cNvSpPr/>
+          <p:nvPr/>
+        </p:nvSpPr>
+        <p:spPr>
+          <a:xfrm>
+            <a:off x="8174736" y="4928616"/>
+            <a:ext cx="3264408" cy="594360"/>
+          </a:xfrm>
+          <a:prstGeom prst="rect">
+            <a:avLst/>
+          </a:prstGeom>
+          <a:noFill/>
+          <a:ln/>
+        </p:spPr>
+        <p:txBody>
+          <a:bodyPr wrap="square" lIns="0" tIns="0" rIns="0" bIns="0" rtlCol="0" anchor="t">
+            <a:normAutofit/>
+          </a:bodyPr>
+          <a:lstStyle/>
+          <a:p>
+            <a:pPr algn="l" indent="0" marL="0">
+              <a:buNone/>
+            </a:pPr>
+            <a:r>
+              <a:rPr lang="en-US" sz="1150" dirty="0">
+                <a:solidFill>
+                  <a:srgbClr val="A7ADB5"/>
+                </a:solidFill>
+                <a:latin typeface="Liberation Sans" pitchFamily="34" charset="0"/>
+                <a:ea typeface="Liberation Sans" pitchFamily="34" charset="-122"/>
+                <a:cs typeface="Liberation Sans" pitchFamily="34" charset="-120"/>
+              </a:rPr>
+              <a:t>Seeded Monte Carlo · P05/P50/P95 · JSON/CSV/SVG</a:t>
+            </a:r>
+            <a:endParaRPr lang="en-US" sz="1150" dirty="0"/>
+          </a:p>
+        </p:txBody>
+      </p:sp>
+      <p:sp>
+        <p:nvSpPr>
+          <p:cNvPr id="18" name="Text 15"/>
+          <p:cNvSpPr/>
+          <p:nvPr/>
+        </p:nvSpPr>
+        <p:spPr>
+          <a:xfrm>
+            <a:off x="566928" y="6547104"/>
+            <a:ext cx="7498080" cy="164592"/>
+          </a:xfrm>
+          <a:prstGeom prst="rect">
+            <a:avLst/>
+          </a:prstGeom>
+          <a:noFill/>
+          <a:ln/>
+        </p:spPr>
+        <p:txBody>
+          <a:bodyPr wrap="square" lIns="0" tIns="0" rIns="0" bIns="0" rtlCol="0" anchor="ctr">
+            <a:normAutofit/>
+          </a:bodyPr>
+          <a:lstStyle/>
+          <a:p>
+            <a:pPr algn="l" indent="0" marL="0">
+              <a:buNone/>
+            </a:pPr>
+            <a:r>
+              <a:rPr lang="en-US" sz="800" spc="100" kern="0" dirty="0">
+                <a:solidFill>
+                  <a:srgbClr val="A7ADB5"/>
+                </a:solidFill>
+                <a:latin typeface="Liberation Sans" pitchFamily="34" charset="0"/>
+                <a:ea typeface="Liberation Sans" pitchFamily="34" charset="-122"/>
+                <a:cs typeface="Liberation Sans" pitchFamily="34" charset="-120"/>
+              </a:rPr>
+              <a:t>PHYSICS-FIRST AI  ·  AMD AI DEVMASTER 2026  ·  TRACK 2</a:t>
+            </a:r>
+            <a:endParaRPr lang="en-US" sz="800" dirty="0"/>
+          </a:p>
+        </p:txBody>
+      </p:sp>
+      <p:sp>
+        <p:nvSpPr>
+          <p:cNvPr id="19" name="Text 16"/>
+          <p:cNvSpPr/>
+          <p:nvPr/>
+        </p:nvSpPr>
+        <p:spPr>
+          <a:xfrm>
+            <a:off x="11119104" y="6519672"/>
+            <a:ext cx="502920" cy="201168"/>
+          </a:xfrm>
+          <a:prstGeom prst="rect">
+            <a:avLst/>
+          </a:prstGeom>
+          <a:noFill/>
+          <a:ln/>
+        </p:spPr>
+        <p:txBody>
+          <a:bodyPr wrap="square" lIns="0" tIns="0" rIns="0" bIns="0" rtlCol="0" anchor="ctr">
+            <a:normAutofit/>
+          </a:bodyPr>
+          <a:lstStyle/>
+          <a:p>
+            <a:pPr algn="r" indent="0" marL="0">
+              <a:buNone/>
+            </a:pPr>
+            <a:r>
+              <a:rPr lang="en-US" sz="900" dirty="0">
+                <a:solidFill>
+                  <a:srgbClr val="FF6B00"/>
+                </a:solidFill>
+                <a:latin typeface="Liberation Mono" pitchFamily="34" charset="0"/>
+                <a:ea typeface="Liberation Mono" pitchFamily="34" charset="-122"/>
+                <a:cs typeface="Liberation Mono" pitchFamily="34" charset="-120"/>
+              </a:rPr>
+              <a:t>09</a:t>
             </a:r>
             <a:endParaRPr lang="en-US" sz="900" dirty="0"/>
-          </a:p>
-        </p:txBody>
-      </p:sp>
-      <p:sp>
-        <p:nvSpPr>
-          <p:cNvPr id="26" name="Text 24"/>
-          <p:cNvSpPr/>
-          <p:nvPr/>
-        </p:nvSpPr>
-        <p:spPr>
-          <a:xfrm>
-            <a:off x="658368" y="6080760"/>
-            <a:ext cx="2011680" cy="292608"/>
-          </a:xfrm>
-          <a:prstGeom prst="rect">
-            <a:avLst/>
-          </a:prstGeom>
-          <a:noFill/>
-          <a:ln/>
-        </p:spPr>
-        <p:txBody>
-          <a:bodyPr wrap="square" lIns="0" tIns="0" rIns="0" bIns="0" rtlCol="0" anchor="ctr">
-            <a:normAutofit/>
-          </a:bodyPr>
-          <a:lstStyle/>
-          <a:p>
-            <a:pPr algn="l" indent="0" marL="0">
-              <a:buNone/>
-            </a:pPr>
-            <a:r>
-              <a:rPr lang="en-US" sz="1100" spc="200" kern="0" dirty="0">
-                <a:solidFill>
-                  <a:srgbClr val="A7ADB5"/>
-                </a:solidFill>
-                <a:latin typeface="Liberation Sans" pitchFamily="34" charset="0"/>
-                <a:ea typeface="Liberation Sans" pitchFamily="34" charset="-122"/>
-                <a:cs typeface="Liberation Sans" pitchFamily="34" charset="-120"/>
-              </a:rPr>
-              <a:t>THANK YOU</a:t>
-            </a:r>
-            <a:endParaRPr lang="en-US" sz="1100" dirty="0"/>
           </a:p>
         </p:txBody>
       </p:sp>

--- a/submissions/Track2-Physics-First-AI-NuclidePath/NuclidePath_Track2_Deck.pptx
+++ b/submissions/Track2-Physics-First-AI-NuclidePath/NuclidePath_Track2_Deck.pptx
@@ -951,7 +951,7 @@
           <a:p>
             <a:r>
               <a:rPr lang="en-US" dirty="0"/>
-              <a:t>Describe the formulas and say validation means software/formula verification, not regulatory validation.</a:t>
+              <a:t>Describe the formulas and say validation means software/formula verification, not regulatory validation. The multicomponent K/Na/Ca/Mg bridge is opt-in and process-qualified only; the canonical Cs–K GCS path remains authoritative.</a:t>
             </a:r>
             <a:endParaRPr lang="en-US" dirty="0"/>
           </a:p>
@@ -6774,7 +6774,139 @@
       </p:sp>
       <p:sp>
         <p:nvSpPr>
-          <p:cNvPr id="21" name="Text 19"/>
+          <p:cNvPr id="21" name="Shape 19"/>
+          <p:cNvSpPr/>
+          <p:nvPr/>
+        </p:nvSpPr>
+        <p:spPr>
+          <a:xfrm>
+            <a:off x="6839712" y="5559552"/>
+            <a:ext cx="4736592" cy="777240"/>
+          </a:xfrm>
+          <a:prstGeom prst="rect">
+            <a:avLst/>
+          </a:prstGeom>
+          <a:solidFill>
+            <a:srgbClr val="15171A"/>
+          </a:solidFill>
+          <a:ln w="12700">
+            <a:solidFill>
+              <a:srgbClr val="363A40"/>
+            </a:solidFill>
+            <a:prstDash val="solid"/>
+          </a:ln>
+        </p:spPr>
+      </p:sp>
+      <p:sp>
+        <p:nvSpPr>
+          <p:cNvPr id="22" name="Shape 20"/>
+          <p:cNvSpPr/>
+          <p:nvPr/>
+        </p:nvSpPr>
+        <p:spPr>
+          <a:xfrm>
+            <a:off x="6839712" y="5559552"/>
+            <a:ext cx="73152" cy="777240"/>
+          </a:xfrm>
+          <a:prstGeom prst="rect">
+            <a:avLst/>
+          </a:prstGeom>
+          <a:solidFill>
+            <a:srgbClr val="BE95FF"/>
+          </a:solidFill>
+          <a:ln w="12700">
+            <a:solidFill>
+              <a:srgbClr val="BE95FF"/>
+            </a:solidFill>
+            <a:prstDash val="solid"/>
+          </a:ln>
+        </p:spPr>
+      </p:sp>
+      <p:sp>
+        <p:nvSpPr>
+          <p:cNvPr id="23" name="Text 21"/>
+          <p:cNvSpPr/>
+          <p:nvPr/>
+        </p:nvSpPr>
+        <p:spPr>
+          <a:xfrm>
+            <a:off x="7059168" y="5724144"/>
+            <a:ext cx="4389120" cy="256032"/>
+          </a:xfrm>
+          <a:prstGeom prst="rect">
+            <a:avLst/>
+          </a:prstGeom>
+          <a:noFill/>
+          <a:ln/>
+        </p:spPr>
+        <p:txBody>
+          <a:bodyPr wrap="square" lIns="0" tIns="0" rIns="0" bIns="0" rtlCol="0" anchor="ctr">
+            <a:normAutofit/>
+          </a:bodyPr>
+          <a:lstStyle/>
+          <a:p>
+            <a:pPr algn="l" indent="0" marL="0">
+              <a:buNone/>
+            </a:pPr>
+            <a:r>
+              <a:rPr lang="en-US" sz="1400" b="1" dirty="0">
+                <a:solidFill>
+                  <a:srgbClr val="F5F7FA"/>
+                </a:solidFill>
+                <a:latin typeface="Liberation Sans" pitchFamily="34" charset="0"/>
+                <a:ea typeface="Liberation Sans" pitchFamily="34" charset="-122"/>
+                <a:cs typeface="Liberation Sans" pitchFamily="34" charset="-120"/>
+              </a:rPr>
+              <a:t>Multicomponent bridge (opt-in)</a:t>
+            </a:r>
+            <a:endParaRPr lang="en-US" sz="1400" dirty="0"/>
+          </a:p>
+        </p:txBody>
+      </p:sp>
+      <p:sp>
+        <p:nvSpPr>
+          <p:cNvPr id="24" name="Text 22"/>
+          <p:cNvSpPr/>
+          <p:nvPr/>
+        </p:nvSpPr>
+        <p:spPr>
+          <a:xfrm>
+            <a:off x="7059168" y="6062472"/>
+            <a:ext cx="4389120" cy="137160"/>
+          </a:xfrm>
+          <a:prstGeom prst="rect">
+            <a:avLst/>
+          </a:prstGeom>
+          <a:noFill/>
+          <a:ln/>
+        </p:spPr>
+        <p:txBody>
+          <a:bodyPr wrap="square" lIns="0" tIns="0" rIns="0" bIns="0" rtlCol="0" anchor="t">
+            <a:normAutofit/>
+          </a:bodyPr>
+          <a:lstStyle/>
+          <a:p>
+            <a:pPr algn="l" indent="0" marL="0">
+              <a:buNone/>
+            </a:pPr>
+            <a:r>
+              <a:rPr lang="en-US" sz="1150" dirty="0">
+                <a:solidFill>
+                  <a:srgbClr val="A7ADB5"/>
+                </a:solidFill>
+                <a:latin typeface="Liberation Sans" pitchFamily="34" charset="0"/>
+                <a:ea typeface="Liberation Sans" pitchFamily="34" charset="-122"/>
+                <a:cs typeface="Liberation Sans" pitchFamily="34" charset="-120"/>
+              </a:rPr>
+              <a:t>GCS K/Na competition + NH₄ on FES; extended K/Na/Ca/Mg path is process-qualified, not promoted.</a:t>
+            </a:r>
+            <a:endParaRPr lang="en-US" sz="1150" dirty="0"/>
+          </a:p>
+        </p:txBody>
+      </p:sp>
+      <p:sp>
+        <p:nvSpPr>
+          <p:cNvPr id="25" name="Text 23"/>
           <p:cNvSpPr/>
           <p:nvPr/>
         </p:nvSpPr>
@@ -6815,7 +6947,7 @@
       </p:sp>
       <p:sp>
         <p:nvSpPr>
-          <p:cNvPr id="22" name="Text 20"/>
+          <p:cNvPr id="26" name="Text 24"/>
           <p:cNvSpPr/>
           <p:nvPr/>
         </p:nvSpPr>

--- a/submissions/Track2-Physics-First-AI-NuclidePath/NuclidePath_Track2_Deck.pptx
+++ b/submissions/Track2-Physics-First-AI-NuclidePath/NuclidePath_Track2_Deck.pptx
@@ -2352,7 +2352,7 @@
                 <a:ea typeface="Liberation Mono" pitchFamily="34" charset="-122"/>
                 <a:cs typeface="Liberation Mono" pitchFamily="34" charset="-120"/>
               </a:rPr>
-              <a:t>373/15</a:t>
+              <a:t>376/15</a:t>
             </a:r>
             <a:endParaRPr lang="en-US" sz="3600" dirty="0"/>
           </a:p>

--- a/submissions/Track2-Physics-First-AI-NuclidePath/NuclidePath_Track2_Deck.pptx
+++ b/submissions/Track2-Physics-First-AI-NuclidePath/NuclidePath_Track2_Deck.pptx
@@ -2352,7 +2352,7 @@
                 <a:ea typeface="Liberation Mono" pitchFamily="34" charset="-122"/>
                 <a:cs typeface="Liberation Mono" pitchFamily="34" charset="-120"/>
               </a:rPr>
-              <a:t>376/15</a:t>
+              <a:t>377/15</a:t>
             </a:r>
             <a:endParaRPr lang="en-US" sz="3600" dirty="0"/>
           </a:p>

--- a/submissions/Track2-Physics-First-AI-NuclidePath/NuclidePath_Track2_Deck.pptx
+++ b/submissions/Track2-Physics-First-AI-NuclidePath/NuclidePath_Track2_Deck.pptx
@@ -599,7 +599,7 @@
           <a:p>
             <a:r>
               <a:rPr lang="en-US" dirty="0"/>
-              <a:t>Close on current evidence: local, tested, reproducible and honest about scope. The 137.09× result is the measured device-resident FP64 primary-GCS to receptor pipeline versus the scalar reference, not environmental validation.</a:t>
+              <a:t>Close on current evidence: local, tested, reproducible and honest about scope. The 132.8× result is the measured device-resident FP64 primary-GCS to receptor pipeline versus the scalar reference, reproduced in the 5 August post-merge AMD rerun alongside the 388 passing tests (the 28 July core snapshot measured 137.09× on the same pipeline). This is a performance result, not environmental validation.</a:t>
             </a:r>
             <a:endParaRPr lang="en-US" dirty="0"/>
           </a:p>
@@ -2393,7 +2393,7 @@
                 <a:ea typeface="Liberation Sans" pitchFamily="34" charset="-122"/>
                 <a:cs typeface="Liberation Sans" pitchFamily="34" charset="-120"/>
               </a:rPr>
-              <a:t>latest PR gate</a:t>
+              <a:t>latest CI gate</a:t>
             </a:r>
             <a:endParaRPr lang="en-US" sz="1100" dirty="0"/>
           </a:p>
@@ -3123,7 +3123,7 @@
                 <a:ea typeface="Liberation Mono" pitchFamily="34" charset="-122"/>
                 <a:cs typeface="Liberation Mono" pitchFamily="34" charset="-120"/>
               </a:rPr>
-              <a:t>137.09×</a:t>
+              <a:t>132.8×</a:t>
             </a:r>
             <a:endParaRPr lang="en-US" sz="3600" dirty="0"/>
           </a:p>
@@ -3164,7 +3164,7 @@
                 <a:ea typeface="Liberation Sans" pitchFamily="34" charset="-122"/>
                 <a:cs typeface="Liberation Sans" pitchFamily="34" charset="-120"/>
               </a:rPr>
-              <a:t>FP64 platform</a:t>
+              <a:t>FP64 platform (post-merge)</a:t>
             </a:r>
             <a:endParaRPr lang="en-US" sz="1100" dirty="0"/>
           </a:p>
